--- a/pregrado/s05/presentacion/S05A.pptx
+++ b/pregrado/s05/presentacion/S05A.pptx
@@ -1,6 +1,6 @@
 
 <file path=ppt/presentation.xml><?xml version="1.0" encoding="utf-8"?>
-<p:presentation xmlns:a="http://schemas.openxmlformats.org/drawingml/2006/main" xmlns:r="http://schemas.openxmlformats.org/officeDocument/2006/relationships" xmlns:p="http://schemas.openxmlformats.org/presentationml/2006/main" saveSubsetFonts="1" autoCompressPictures="0">
+<p:presentation xmlns:a="http://schemas.openxmlformats.org/drawingml/2006/main" xmlns:r="http://schemas.openxmlformats.org/officeDocument/2006/relationships" xmlns:p="http://schemas.openxmlformats.org/presentationml/2006/main" embedTrueTypeFonts="1" saveSubsetFonts="1" autoCompressPictures="0">
   <p:sldMasterIdLst>
     <p:sldMasterId id="2147483648" r:id="rId1"/>
   </p:sldMasterIdLst>
@@ -11,20 +11,16 @@
     <p:sldId id="259" r:id="rId11"/>
     <p:sldId id="260" r:id="rId12"/>
     <p:sldId id="261" r:id="rId13"/>
-    <p:sldId id="287" r:id="rId30"/>
     <p:sldId id="262" r:id="rId14"/>
     <p:sldId id="265" r:id="rId17"/>
-    <p:sldId id="288" r:id="rId31"/>
     <p:sldId id="266" r:id="rId18"/>
     <p:sldId id="267" r:id="rId19"/>
     <p:sldId id="268" r:id="rId20"/>
     <p:sldId id="269" r:id="rId21"/>
     <p:sldId id="270" r:id="rId22"/>
-    <p:sldId id="276" r:id="rId28"/>
-    <p:sldId id="289" r:id="rId32"/>
     <p:sldId id="274" r:id="rId26"/>
     <p:sldId id="275" r:id="rId27"/>
-    <p:sldId id="290" r:id="rId33"/>
+    <p:sldId id="276" r:id="rId28"/>
     <p:sldId id="263" r:id="rId15"/>
     <p:sldId id="264" r:id="rId16"/>
     <p:sldId id="271" r:id="rId23"/>
@@ -34,6 +30,15 @@
   </p:sldIdLst>
   <p:sldSz cx="12192000" cy="6858000" type="screen16x9"/>
   <p:notesSz cx="6858000" cy="9144000"/>
+  <p:embeddedFontLst>
+    <p:embeddedFont>
+      <p:font typeface="Calibri"/>
+      <p:regular r:id="rId40"/>
+      <p:bold r:id="rId41"/>
+      <p:italic r:id="rId42"/>
+      <p:boldItalic r:id="rId43"/>
+    </p:embeddedFont>
+  </p:embeddedFontLst>
   <p:defaultTextStyle>
     <a:defPPr>
       <a:defRPr lang="en-US"/>
@@ -1087,7 +1092,7 @@
           <a:lstStyle/>
           <a:p>
             <a:r>
-              <a:t>GUION: EVIDENCIA de contraer/seleccionar, SIN sobrestimar el resultado. Orden: LASSO 0,485 &lt;= Ridge 0,497 &lt;= OLS 0,521 (barras reconstruidas leyendo comparacion_modelos, no un array introducido manualmente). PERO el Std Error del MSE del OLS es 0,179: las diferencias (~0,04, es decir ~0,2 SE) están DENTRO del ruido y no sostienen una ventaja de desempeño. El mensaje honesto —el mismo que la sesión usa en Communities— es que el LASSO IGUALA el error del OLS con solo 3 de 8 variables (λ operativo 0,2203 de comparacion_modelos!D4): prevalece la PARSIMONIA, no la precisión. Regla: entre modelos dentro de ~1 SE, se elige el más simple. Fuente: INTERPRETACION Sección 5. [Jueves, capítulo 5.5]</a:t>
+              <a:t>GUION: EVIDENCIA de contraer/seleccionar, SIN sobrestimar el resultado. Orden: LASSO 0,485 &lt;= Ridge 0,497 &lt;= OLS 0,521 (barras reconstruidas leyendo comparacion_modelos, no un array introducido manualmente). PERO el Std Error del MSE del OLS es 0,179: las diferencias (~0,04, es decir ~0,2 SE) están DENTRO del ruido y no sostienen una ventaja de desempeño. El mensaje honesto —el mismo que la sesión usa en Communities— es que el LASSO IGUALA el error del OLS con solo 3 de 8 variables (λ operativo 0,2203 de comparacion_modelos!D4): gana la PARSIMONIA, no la precisión. Regla: entre modelos dentro de ~1 SE, se elige el más simple. Fuente: INTERPRETACION Sección 5. [Jueves, capítulo 5.5]</a:t>
             </a:r>
           </a:p>
         </p:txBody>
@@ -1438,286 +1443,6 @@
           <a:p>
             <a:r>
               <a:t>GUION: Definir ELASTIC NET. Penalización mixta L1+L2 con un parámetro de mezcla α (l1_ratio en sklearn) que interpola entre Ridge (α=0) y LASSO (α=1). Hereda del LASSO la selección y del Ridge la estabilidad ante correlación: su efecto de AGRUPAMIENTO tiende a incluir o excluir en bloque a las variables gemelas, evitando la lotería del LASSO puro. Drill 2: justificar Elastic Net frente a LASSO con predictores muy correlacionados. Fuente: INTERPRETACION Sección 6. [Jueves, capítulo 5.3]</a:t>
-            </a:r>
-          </a:p>
-        </p:txBody>
-      </p:sp>
-      <p:sp>
-        <p:nvSpPr>
-          <p:cNvPr id="4" name="Slide Number Placeholder 3"/>
-          <p:cNvSpPr>
-            <a:spLocks noGrp="1"/>
-          </p:cNvSpPr>
-          <p:nvPr>
-            <p:ph type="sldNum" idx="5" sz="quarter"/>
-          </p:nvPr>
-        </p:nvSpPr>
-        <p:spPr/>
-      </p:sp>
-    </p:spTree>
-  </p:cSld>
-  <p:clrMapOvr>
-    <a:masterClrMapping/>
-  </p:clrMapOvr>
-</p:notes>
-</file>
-
-<file path=ppt/notesSlides/notesSlide23.xml><?xml version="1.0" encoding="utf-8"?>
-<p:notes xmlns:a="http://schemas.openxmlformats.org/drawingml/2006/main" xmlns:p="http://schemas.openxmlformats.org/presentationml/2006/main" xmlns:r="http://schemas.openxmlformats.org/officeDocument/2006/relationships">
-  <p:cSld>
-    <p:spTree>
-      <p:nvGrpSpPr>
-        <p:cNvPr id="1" name=""/>
-        <p:cNvGrpSpPr/>
-        <p:nvPr/>
-      </p:nvGrpSpPr>
-      <p:grpSpPr>
-        <a:xfrm>
-          <a:off x="0" y="0"/>
-          <a:ext cx="0" cy="0"/>
-          <a:chOff x="0" y="0"/>
-          <a:chExt cx="0" cy="0"/>
-        </a:xfrm>
-      </p:grpSpPr>
-      <p:sp>
-        <p:nvSpPr>
-          <p:cNvPr id="2" name="Slide Image Placeholder 1"/>
-          <p:cNvSpPr>
-            <a:spLocks noGrp="1"/>
-          </p:cNvSpPr>
-          <p:nvPr>
-            <p:ph type="sldImg" idx="2"/>
-          </p:nvPr>
-        </p:nvSpPr>
-        <p:spPr/>
-      </p:sp>
-      <p:sp>
-        <p:nvSpPr>
-          <p:cNvPr id="3" name="Notes Placeholder 2"/>
-          <p:cNvSpPr>
-            <a:spLocks noGrp="1"/>
-          </p:cNvSpPr>
-          <p:nvPr>
-            <p:ph type="body" idx="3" sz="quarter"/>
-          </p:nvPr>
-        </p:nvSpPr>
-        <p:spPr/>
-        <p:txBody>
-          <a:bodyPr/>
-          <a:lstStyle/>
-          <a:p>
-            <a:r>
-              <a:t>Divisor del capítulo 5.2. Se enuncia la pregunta tal como aparece en el sílabo, la ficha, el cuaderno y la guía: es el mismo código en todos. [Jueves, capítulo 5.2]</a:t>
-            </a:r>
-          </a:p>
-        </p:txBody>
-      </p:sp>
-      <p:sp>
-        <p:nvSpPr>
-          <p:cNvPr id="4" name="Slide Number Placeholder 3"/>
-          <p:cNvSpPr>
-            <a:spLocks noGrp="1"/>
-          </p:cNvSpPr>
-          <p:nvPr>
-            <p:ph type="sldNum" idx="5" sz="quarter"/>
-          </p:nvPr>
-        </p:nvSpPr>
-        <p:spPr/>
-      </p:sp>
-    </p:spTree>
-  </p:cSld>
-  <p:clrMapOvr>
-    <a:masterClrMapping/>
-  </p:clrMapOvr>
-</p:notes>
-</file>
-
-<file path=ppt/notesSlides/notesSlide24.xml><?xml version="1.0" encoding="utf-8"?>
-<p:notes xmlns:a="http://schemas.openxmlformats.org/drawingml/2006/main" xmlns:p="http://schemas.openxmlformats.org/presentationml/2006/main" xmlns:r="http://schemas.openxmlformats.org/officeDocument/2006/relationships">
-  <p:cSld>
-    <p:spTree>
-      <p:nvGrpSpPr>
-        <p:cNvPr id="1" name=""/>
-        <p:cNvGrpSpPr/>
-        <p:nvPr/>
-      </p:nvGrpSpPr>
-      <p:grpSpPr>
-        <a:xfrm>
-          <a:off x="0" y="0"/>
-          <a:ext cx="0" cy="0"/>
-          <a:chOff x="0" y="0"/>
-          <a:chExt cx="0" cy="0"/>
-        </a:xfrm>
-      </p:grpSpPr>
-      <p:sp>
-        <p:nvSpPr>
-          <p:cNvPr id="2" name="Slide Image Placeholder 1"/>
-          <p:cNvSpPr>
-            <a:spLocks noGrp="1"/>
-          </p:cNvSpPr>
-          <p:nvPr>
-            <p:ph type="sldImg" idx="2"/>
-          </p:nvPr>
-        </p:nvSpPr>
-        <p:spPr/>
-      </p:sp>
-      <p:sp>
-        <p:nvSpPr>
-          <p:cNvPr id="3" name="Notes Placeholder 2"/>
-          <p:cNvSpPr>
-            <a:spLocks noGrp="1"/>
-          </p:cNvSpPr>
-          <p:nvPr>
-            <p:ph type="body" idx="3" sz="quarter"/>
-          </p:nvPr>
-        </p:nvSpPr>
-        <p:spPr/>
-        <p:txBody>
-          <a:bodyPr/>
-          <a:lstStyle/>
-          <a:p>
-            <a:r>
-              <a:t>Divisor del capítulo 5.3. Se enuncia la pregunta tal como aparece en el sílabo, la ficha, el cuaderno y la guía: es el mismo código en todos. [Jueves, capítulo 5.3]</a:t>
-            </a:r>
-          </a:p>
-        </p:txBody>
-      </p:sp>
-      <p:sp>
-        <p:nvSpPr>
-          <p:cNvPr id="4" name="Slide Number Placeholder 3"/>
-          <p:cNvSpPr>
-            <a:spLocks noGrp="1"/>
-          </p:cNvSpPr>
-          <p:nvPr>
-            <p:ph type="sldNum" idx="5" sz="quarter"/>
-          </p:nvPr>
-        </p:nvSpPr>
-        <p:spPr/>
-      </p:sp>
-    </p:spTree>
-  </p:cSld>
-  <p:clrMapOvr>
-    <a:masterClrMapping/>
-  </p:clrMapOvr>
-</p:notes>
-</file>
-
-<file path=ppt/notesSlides/notesSlide25.xml><?xml version="1.0" encoding="utf-8"?>
-<p:notes xmlns:a="http://schemas.openxmlformats.org/drawingml/2006/main" xmlns:p="http://schemas.openxmlformats.org/presentationml/2006/main" xmlns:r="http://schemas.openxmlformats.org/officeDocument/2006/relationships">
-  <p:cSld>
-    <p:spTree>
-      <p:nvGrpSpPr>
-        <p:cNvPr id="1" name=""/>
-        <p:cNvGrpSpPr/>
-        <p:nvPr/>
-      </p:nvGrpSpPr>
-      <p:grpSpPr>
-        <a:xfrm>
-          <a:off x="0" y="0"/>
-          <a:ext cx="0" cy="0"/>
-          <a:chOff x="0" y="0"/>
-          <a:chExt cx="0" cy="0"/>
-        </a:xfrm>
-      </p:grpSpPr>
-      <p:sp>
-        <p:nvSpPr>
-          <p:cNvPr id="2" name="Slide Image Placeholder 1"/>
-          <p:cNvSpPr>
-            <a:spLocks noGrp="1"/>
-          </p:cNvSpPr>
-          <p:nvPr>
-            <p:ph type="sldImg" idx="2"/>
-          </p:nvPr>
-        </p:nvSpPr>
-        <p:spPr/>
-      </p:sp>
-      <p:sp>
-        <p:nvSpPr>
-          <p:cNvPr id="3" name="Notes Placeholder 2"/>
-          <p:cNvSpPr>
-            <a:spLocks noGrp="1"/>
-          </p:cNvSpPr>
-          <p:nvPr>
-            <p:ph type="body" idx="3" sz="quarter"/>
-          </p:nvPr>
-        </p:nvSpPr>
-        <p:spPr/>
-        <p:txBody>
-          <a:bodyPr/>
-          <a:lstStyle/>
-          <a:p>
-            <a:r>
-              <a:t>Divisor del capítulo 5.4. Se enuncia la pregunta tal como aparece en el sílabo, la ficha, el cuaderno y la guía: es el mismo código en todos. [Jueves, capítulo 5.4]</a:t>
-            </a:r>
-          </a:p>
-        </p:txBody>
-      </p:sp>
-      <p:sp>
-        <p:nvSpPr>
-          <p:cNvPr id="4" name="Slide Number Placeholder 3"/>
-          <p:cNvSpPr>
-            <a:spLocks noGrp="1"/>
-          </p:cNvSpPr>
-          <p:nvPr>
-            <p:ph type="sldNum" idx="5" sz="quarter"/>
-          </p:nvPr>
-        </p:nvSpPr>
-        <p:spPr/>
-      </p:sp>
-    </p:spTree>
-  </p:cSld>
-  <p:clrMapOvr>
-    <a:masterClrMapping/>
-  </p:clrMapOvr>
-</p:notes>
-</file>
-
-<file path=ppt/notesSlides/notesSlide26.xml><?xml version="1.0" encoding="utf-8"?>
-<p:notes xmlns:a="http://schemas.openxmlformats.org/drawingml/2006/main" xmlns:p="http://schemas.openxmlformats.org/presentationml/2006/main" xmlns:r="http://schemas.openxmlformats.org/officeDocument/2006/relationships">
-  <p:cSld>
-    <p:spTree>
-      <p:nvGrpSpPr>
-        <p:cNvPr id="1" name=""/>
-        <p:cNvGrpSpPr/>
-        <p:nvPr/>
-      </p:nvGrpSpPr>
-      <p:grpSpPr>
-        <a:xfrm>
-          <a:off x="0" y="0"/>
-          <a:ext cx="0" cy="0"/>
-          <a:chOff x="0" y="0"/>
-          <a:chExt cx="0" cy="0"/>
-        </a:xfrm>
-      </p:grpSpPr>
-      <p:sp>
-        <p:nvSpPr>
-          <p:cNvPr id="2" name="Slide Image Placeholder 1"/>
-          <p:cNvSpPr>
-            <a:spLocks noGrp="1"/>
-          </p:cNvSpPr>
-          <p:nvPr>
-            <p:ph type="sldImg" idx="2"/>
-          </p:nvPr>
-        </p:nvSpPr>
-        <p:spPr/>
-      </p:sp>
-      <p:sp>
-        <p:nvSpPr>
-          <p:cNvPr id="3" name="Notes Placeholder 2"/>
-          <p:cNvSpPr>
-            <a:spLocks noGrp="1"/>
-          </p:cNvSpPr>
-          <p:nvPr>
-            <p:ph type="body" idx="3" sz="quarter"/>
-          </p:nvPr>
-        </p:nvSpPr>
-        <p:spPr/>
-        <p:txBody>
-          <a:bodyPr/>
-          <a:lstStyle/>
-          <a:p>
-            <a:r>
-              <a:t>Divisor del capítulo 5.5. Se enuncia la pregunta tal como aparece en el sílabo, la ficha, el cuaderno y la guía: es el mismo código en todos. [Jueves, capítulo 5.5]</a:t>
             </a:r>
           </a:p>
         </p:txBody>
@@ -5521,7 +5246,7 @@
     <p:bg>
       <p:bgPr>
         <a:solidFill>
-          <a:srgbClr val="9B1B30"/>
+          <a:srgbClr val="FFFFFF"/>
         </a:solidFill>
         <a:effectLst/>
       </p:bgPr>
@@ -5535,20 +5260,90 @@
       <p:grpSpPr/>
       <p:sp>
         <p:nvSpPr>
-          <p:cNvPr id="2" name="Oval 1"/>
+          <p:cNvPr id="2" name="TextBox 1"/>
+          <p:cNvSpPr txBox="1"/>
+          <p:nvPr/>
+        </p:nvSpPr>
+        <p:spPr>
+          <a:xfrm>
+            <a:off x="548640" y="411480"/>
+            <a:ext cx="11094720" cy="292608"/>
+          </a:xfrm>
+          <a:prstGeom prst="rect">
+            <a:avLst/>
+          </a:prstGeom>
+          <a:noFill/>
+        </p:spPr>
+        <p:txBody>
+          <a:bodyPr wrap="square" anchor="t" lIns="0" rIns="0" tIns="0" bIns="0">
+            <a:spAutoFit/>
+          </a:bodyPr>
+          <a:lstStyle/>
+          <a:p>
+            <a:pPr algn="l"/>
+            <a:r>
+              <a:rPr sz="1300" b="1">
+                <a:solidFill>
+                  <a:srgbClr val="9B1B30"/>
+                </a:solidFill>
+                <a:latin typeface="Calibri"/>
+              </a:rPr>
+              <a:t>[PIZARRA] DEMOSTRACIÓN 1 DE 2 — SE DERIVA EN EL TABLERO</a:t>
+            </a:r>
+          </a:p>
+        </p:txBody>
+      </p:sp>
+      <p:sp>
+        <p:nvSpPr>
+          <p:cNvPr id="3" name="TextBox 2"/>
+          <p:cNvSpPr txBox="1"/>
+          <p:nvPr/>
+        </p:nvSpPr>
+        <p:spPr>
+          <a:xfrm>
+            <a:off x="548640" y="731520"/>
+            <a:ext cx="11094720" cy="777240"/>
+          </a:xfrm>
+          <a:prstGeom prst="rect">
+            <a:avLst/>
+          </a:prstGeom>
+          <a:noFill/>
+        </p:spPr>
+        <p:txBody>
+          <a:bodyPr wrap="square" anchor="t" lIns="0" rIns="0" tIns="0" bIns="0">
+            <a:spAutoFit/>
+          </a:bodyPr>
+          <a:lstStyle/>
+          <a:p>
+            <a:pPr algn="l"/>
+            <a:r>
+              <a:rPr sz="4000" b="1">
+                <a:solidFill>
+                  <a:srgbClr val="2D2D2D"/>
+                </a:solidFill>
+                <a:latin typeface="Calibri"/>
+              </a:rPr>
+              <a:t>Ridge: sumar λI salva la matriz que el OLS no puede invertir</a:t>
+            </a:r>
+          </a:p>
+        </p:txBody>
+      </p:sp>
+      <p:sp>
+        <p:nvSpPr>
+          <p:cNvPr id="4" name="Rectangle 3"/>
           <p:cNvSpPr/>
           <p:nvPr/>
         </p:nvSpPr>
         <p:spPr>
           <a:xfrm>
-            <a:off x="914400" y="2103120"/>
-            <a:ext cx="2377440" cy="2377440"/>
-          </a:xfrm>
-          <a:prstGeom prst="ellipse">
+            <a:off x="1935480" y="2802255"/>
+            <a:ext cx="8321040" cy="19050"/>
+          </a:xfrm>
+          <a:prstGeom prst="rect">
             <a:avLst/>
           </a:prstGeom>
           <a:solidFill>
-            <a:srgbClr val="FFFFFF"/>
+            <a:srgbClr val="F4F4F4"/>
           </a:solidFill>
           <a:ln>
             <a:noFill/>
@@ -5570,32 +5365,76 @@
           </a:fontRef>
         </p:style>
         <p:txBody>
+          <a:bodyPr rtlCol="0" anchor="ctr"/>
+          <a:lstStyle/>
+          <a:p>
+            <a:pPr algn="ctr"/>
+          </a:p>
+        </p:txBody>
+      </p:sp>
+      <p:sp>
+        <p:nvSpPr>
+          <p:cNvPr id="5" name="Oval 4"/>
+          <p:cNvSpPr/>
+          <p:nvPr/>
+        </p:nvSpPr>
+        <p:spPr>
+          <a:xfrm>
+            <a:off x="1592580" y="2468880"/>
+            <a:ext cx="685800" cy="685800"/>
+          </a:xfrm>
+          <a:prstGeom prst="ellipse">
+            <a:avLst/>
+          </a:prstGeom>
+          <a:solidFill>
+            <a:srgbClr val="E4002B"/>
+          </a:solidFill>
+          <a:ln>
+            <a:noFill/>
+          </a:ln>
+          <a:effectLst/>
+        </p:spPr>
+        <p:style>
+          <a:lnRef idx="1">
+            <a:schemeClr val="accent1"/>
+          </a:lnRef>
+          <a:fillRef idx="3">
+            <a:schemeClr val="accent1"/>
+          </a:fillRef>
+          <a:effectRef idx="2">
+            <a:schemeClr val="accent1"/>
+          </a:effectRef>
+          <a:fontRef idx="minor">
+            <a:schemeClr val="lt1"/>
+          </a:fontRef>
+        </p:style>
+        <p:txBody>
           <a:bodyPr rtlCol="0" anchor="ctr" lIns="0" rIns="0" tIns="0" bIns="0"/>
           <a:lstStyle/>
           <a:p>
             <a:pPr algn="ctr"/>
             <a:r>
-              <a:rPr sz="10000" b="1">
-                <a:solidFill>
-                  <a:srgbClr val="9B1B30"/>
-                </a:solidFill>
-                <a:latin typeface="Calibri"/>
-              </a:rPr>
-              <a:t>3</a:t>
-            </a:r>
-          </a:p>
-        </p:txBody>
-      </p:sp>
-      <p:sp>
-        <p:nvSpPr>
-          <p:cNvPr id="3" name="TextBox 2"/>
+              <a:rPr sz="2200" b="1">
+                <a:solidFill>
+                  <a:srgbClr val="FFFFFF"/>
+                </a:solidFill>
+                <a:latin typeface="Calibri"/>
+              </a:rPr>
+              <a:t>1</a:t>
+            </a:r>
+          </a:p>
+        </p:txBody>
+      </p:sp>
+      <p:sp>
+        <p:nvSpPr>
+          <p:cNvPr id="6" name="TextBox 5"/>
           <p:cNvSpPr txBox="1"/>
           <p:nvPr/>
         </p:nvSpPr>
         <p:spPr>
           <a:xfrm>
-            <a:off x="3931920" y="2651760"/>
-            <a:ext cx="7589520" cy="1371600"/>
+            <a:off x="621792" y="3319272"/>
+            <a:ext cx="2627376" cy="594360"/>
           </a:xfrm>
           <a:prstGeom prst="rect">
             <a:avLst/>
@@ -5608,29 +5447,29 @@
           </a:bodyPr>
           <a:lstStyle/>
           <a:p>
-            <a:pPr algn="l"/>
-            <a:r>
-              <a:rPr sz="4000" b="1">
-                <a:solidFill>
-                  <a:srgbClr val="FFFFFF"/>
-                </a:solidFill>
-                <a:latin typeface="Calibri"/>
-              </a:rPr>
-              <a:t>¿Cómo operan la contracción de RIDGE y la selección de LASSO?</a:t>
-            </a:r>
-          </a:p>
-        </p:txBody>
-      </p:sp>
-      <p:sp>
-        <p:nvSpPr>
-          <p:cNvPr id="4" name="TextBox 3"/>
+            <a:pPr algn="ctr"/>
+            <a:r>
+              <a:rPr sz="1500" b="1">
+                <a:solidFill>
+                  <a:srgbClr val="2D2D2D"/>
+                </a:solidFill>
+                <a:latin typeface="Calibri"/>
+              </a:rPr>
+              <a:t>Objetivo</a:t>
+            </a:r>
+          </a:p>
+        </p:txBody>
+      </p:sp>
+      <p:sp>
+        <p:nvSpPr>
+          <p:cNvPr id="7" name="TextBox 6"/>
           <p:cNvSpPr txBox="1"/>
           <p:nvPr/>
         </p:nvSpPr>
         <p:spPr>
           <a:xfrm>
-            <a:off x="3931920" y="3977639"/>
-            <a:ext cx="7589520" cy="914400"/>
+            <a:off x="621792" y="3931920"/>
+            <a:ext cx="2627376" cy="1554480"/>
           </a:xfrm>
           <a:prstGeom prst="rect">
             <a:avLst/>
@@ -5643,15 +5482,667 @@
           </a:bodyPr>
           <a:lstStyle/>
           <a:p>
+            <a:pPr algn="ctr"/>
+            <a:r>
+              <a:rPr sz="1200" b="0">
+                <a:solidFill>
+                  <a:srgbClr val="6E6E6E"/>
+                </a:solidFill>
+                <a:latin typeface="Calibri"/>
+              </a:rPr>
+              <a:t>J(β) = RSS + λ·Σβ²</a:t>
+            </a:r>
+          </a:p>
+        </p:txBody>
+      </p:sp>
+      <p:sp>
+        <p:nvSpPr>
+          <p:cNvPr id="8" name="Oval 7"/>
+          <p:cNvSpPr/>
+          <p:nvPr/>
+        </p:nvSpPr>
+        <p:spPr>
+          <a:xfrm>
+            <a:off x="4366260" y="2468880"/>
+            <a:ext cx="685800" cy="685800"/>
+          </a:xfrm>
+          <a:prstGeom prst="ellipse">
+            <a:avLst/>
+          </a:prstGeom>
+          <a:solidFill>
+            <a:srgbClr val="9B1B30"/>
+          </a:solidFill>
+          <a:ln>
+            <a:noFill/>
+          </a:ln>
+          <a:effectLst/>
+        </p:spPr>
+        <p:style>
+          <a:lnRef idx="1">
+            <a:schemeClr val="accent1"/>
+          </a:lnRef>
+          <a:fillRef idx="3">
+            <a:schemeClr val="accent1"/>
+          </a:fillRef>
+          <a:effectRef idx="2">
+            <a:schemeClr val="accent1"/>
+          </a:effectRef>
+          <a:fontRef idx="minor">
+            <a:schemeClr val="lt1"/>
+          </a:fontRef>
+        </p:style>
+        <p:txBody>
+          <a:bodyPr rtlCol="0" anchor="ctr" lIns="0" rIns="0" tIns="0" bIns="0"/>
+          <a:lstStyle/>
+          <a:p>
+            <a:pPr algn="ctr"/>
+            <a:r>
+              <a:rPr sz="2200" b="1">
+                <a:solidFill>
+                  <a:srgbClr val="FFFFFF"/>
+                </a:solidFill>
+                <a:latin typeface="Calibri"/>
+              </a:rPr>
+              <a:t>2</a:t>
+            </a:r>
+          </a:p>
+        </p:txBody>
+      </p:sp>
+      <p:sp>
+        <p:nvSpPr>
+          <p:cNvPr id="9" name="TextBox 8"/>
+          <p:cNvSpPr txBox="1"/>
+          <p:nvPr/>
+        </p:nvSpPr>
+        <p:spPr>
+          <a:xfrm>
+            <a:off x="3395472" y="3319272"/>
+            <a:ext cx="2627376" cy="594360"/>
+          </a:xfrm>
+          <a:prstGeom prst="rect">
+            <a:avLst/>
+          </a:prstGeom>
+          <a:noFill/>
+        </p:spPr>
+        <p:txBody>
+          <a:bodyPr wrap="square" anchor="t" lIns="0" rIns="0" tIns="0" bIns="0">
+            <a:spAutoFit/>
+          </a:bodyPr>
+          <a:lstStyle/>
+          <a:p>
+            <a:pPr algn="ctr"/>
+            <a:r>
+              <a:rPr sz="1500" b="1">
+                <a:solidFill>
+                  <a:srgbClr val="2D2D2D"/>
+                </a:solidFill>
+                <a:latin typeface="Calibri"/>
+              </a:rPr>
+              <a:t>Derivar</a:t>
+            </a:r>
+          </a:p>
+        </p:txBody>
+      </p:sp>
+      <p:sp>
+        <p:nvSpPr>
+          <p:cNvPr id="10" name="TextBox 9"/>
+          <p:cNvSpPr txBox="1"/>
+          <p:nvPr/>
+        </p:nvSpPr>
+        <p:spPr>
+          <a:xfrm>
+            <a:off x="3395472" y="3931920"/>
+            <a:ext cx="2627376" cy="1554480"/>
+          </a:xfrm>
+          <a:prstGeom prst="rect">
+            <a:avLst/>
+          </a:prstGeom>
+          <a:noFill/>
+        </p:spPr>
+        <p:txBody>
+          <a:bodyPr wrap="square" anchor="t" lIns="0" rIns="0" tIns="0" bIns="0">
+            <a:spAutoFit/>
+          </a:bodyPr>
+          <a:lstStyle/>
+          <a:p>
+            <a:pPr algn="ctr"/>
+            <a:r>
+              <a:rPr sz="1200" b="0">
+                <a:solidFill>
+                  <a:srgbClr val="6E6E6E"/>
+                </a:solidFill>
+                <a:latin typeface="Calibri"/>
+              </a:rPr>
+              <a:t>∂J/∂β = −2Xᵀy + 2XᵀXβ + 2λβ</a:t>
+            </a:r>
+          </a:p>
+        </p:txBody>
+      </p:sp>
+      <p:sp>
+        <p:nvSpPr>
+          <p:cNvPr id="11" name="Oval 10"/>
+          <p:cNvSpPr/>
+          <p:nvPr/>
+        </p:nvSpPr>
+        <p:spPr>
+          <a:xfrm>
+            <a:off x="7139940" y="2468880"/>
+            <a:ext cx="685800" cy="685800"/>
+          </a:xfrm>
+          <a:prstGeom prst="ellipse">
+            <a:avLst/>
+          </a:prstGeom>
+          <a:solidFill>
+            <a:srgbClr val="E4002B"/>
+          </a:solidFill>
+          <a:ln>
+            <a:noFill/>
+          </a:ln>
+          <a:effectLst/>
+        </p:spPr>
+        <p:style>
+          <a:lnRef idx="1">
+            <a:schemeClr val="accent1"/>
+          </a:lnRef>
+          <a:fillRef idx="3">
+            <a:schemeClr val="accent1"/>
+          </a:fillRef>
+          <a:effectRef idx="2">
+            <a:schemeClr val="accent1"/>
+          </a:effectRef>
+          <a:fontRef idx="minor">
+            <a:schemeClr val="lt1"/>
+          </a:fontRef>
+        </p:style>
+        <p:txBody>
+          <a:bodyPr rtlCol="0" anchor="ctr" lIns="0" rIns="0" tIns="0" bIns="0"/>
+          <a:lstStyle/>
+          <a:p>
+            <a:pPr algn="ctr"/>
+            <a:r>
+              <a:rPr sz="2200" b="1">
+                <a:solidFill>
+                  <a:srgbClr val="FFFFFF"/>
+                </a:solidFill>
+                <a:latin typeface="Calibri"/>
+              </a:rPr>
+              <a:t>3</a:t>
+            </a:r>
+          </a:p>
+        </p:txBody>
+      </p:sp>
+      <p:sp>
+        <p:nvSpPr>
+          <p:cNvPr id="12" name="TextBox 11"/>
+          <p:cNvSpPr txBox="1"/>
+          <p:nvPr/>
+        </p:nvSpPr>
+        <p:spPr>
+          <a:xfrm>
+            <a:off x="6169152" y="3319272"/>
+            <a:ext cx="2627376" cy="594360"/>
+          </a:xfrm>
+          <a:prstGeom prst="rect">
+            <a:avLst/>
+          </a:prstGeom>
+          <a:noFill/>
+        </p:spPr>
+        <p:txBody>
+          <a:bodyPr wrap="square" anchor="t" lIns="0" rIns="0" tIns="0" bIns="0">
+            <a:spAutoFit/>
+          </a:bodyPr>
+          <a:lstStyle/>
+          <a:p>
+            <a:pPr algn="ctr"/>
+            <a:r>
+              <a:rPr sz="1500" b="1">
+                <a:solidFill>
+                  <a:srgbClr val="2D2D2D"/>
+                </a:solidFill>
+                <a:latin typeface="Calibri"/>
+              </a:rPr>
+              <a:t>Igualar a 0</a:t>
+            </a:r>
+          </a:p>
+        </p:txBody>
+      </p:sp>
+      <p:sp>
+        <p:nvSpPr>
+          <p:cNvPr id="13" name="TextBox 12"/>
+          <p:cNvSpPr txBox="1"/>
+          <p:nvPr/>
+        </p:nvSpPr>
+        <p:spPr>
+          <a:xfrm>
+            <a:off x="6169152" y="3931920"/>
+            <a:ext cx="2627376" cy="1554480"/>
+          </a:xfrm>
+          <a:prstGeom prst="rect">
+            <a:avLst/>
+          </a:prstGeom>
+          <a:noFill/>
+        </p:spPr>
+        <p:txBody>
+          <a:bodyPr wrap="square" anchor="t" lIns="0" rIns="0" tIns="0" bIns="0">
+            <a:spAutoFit/>
+          </a:bodyPr>
+          <a:lstStyle/>
+          <a:p>
+            <a:pPr algn="ctr"/>
+            <a:r>
+              <a:rPr sz="1200" b="0">
+                <a:solidFill>
+                  <a:srgbClr val="6E6E6E"/>
+                </a:solidFill>
+                <a:latin typeface="Calibri"/>
+              </a:rPr>
+              <a:t>(XᵀX + λI)·β = Xᵀy</a:t>
+            </a:r>
+          </a:p>
+        </p:txBody>
+      </p:sp>
+      <p:sp>
+        <p:nvSpPr>
+          <p:cNvPr id="14" name="Oval 13"/>
+          <p:cNvSpPr/>
+          <p:nvPr/>
+        </p:nvSpPr>
+        <p:spPr>
+          <a:xfrm>
+            <a:off x="9913620" y="2468880"/>
+            <a:ext cx="685800" cy="685800"/>
+          </a:xfrm>
+          <a:prstGeom prst="ellipse">
+            <a:avLst/>
+          </a:prstGeom>
+          <a:solidFill>
+            <a:srgbClr val="9B1B30"/>
+          </a:solidFill>
+          <a:ln>
+            <a:noFill/>
+          </a:ln>
+          <a:effectLst/>
+        </p:spPr>
+        <p:style>
+          <a:lnRef idx="1">
+            <a:schemeClr val="accent1"/>
+          </a:lnRef>
+          <a:fillRef idx="3">
+            <a:schemeClr val="accent1"/>
+          </a:fillRef>
+          <a:effectRef idx="2">
+            <a:schemeClr val="accent1"/>
+          </a:effectRef>
+          <a:fontRef idx="minor">
+            <a:schemeClr val="lt1"/>
+          </a:fontRef>
+        </p:style>
+        <p:txBody>
+          <a:bodyPr rtlCol="0" anchor="ctr" lIns="0" rIns="0" tIns="0" bIns="0"/>
+          <a:lstStyle/>
+          <a:p>
+            <a:pPr algn="ctr"/>
+            <a:r>
+              <a:rPr sz="2200" b="1">
+                <a:solidFill>
+                  <a:srgbClr val="FFFFFF"/>
+                </a:solidFill>
+                <a:latin typeface="Calibri"/>
+              </a:rPr>
+              <a:t>4</a:t>
+            </a:r>
+          </a:p>
+        </p:txBody>
+      </p:sp>
+      <p:sp>
+        <p:nvSpPr>
+          <p:cNvPr id="15" name="TextBox 14"/>
+          <p:cNvSpPr txBox="1"/>
+          <p:nvPr/>
+        </p:nvSpPr>
+        <p:spPr>
+          <a:xfrm>
+            <a:off x="8942832" y="3319272"/>
+            <a:ext cx="2627376" cy="594360"/>
+          </a:xfrm>
+          <a:prstGeom prst="rect">
+            <a:avLst/>
+          </a:prstGeom>
+          <a:noFill/>
+        </p:spPr>
+        <p:txBody>
+          <a:bodyPr wrap="square" anchor="t" lIns="0" rIns="0" tIns="0" bIns="0">
+            <a:spAutoFit/>
+          </a:bodyPr>
+          <a:lstStyle/>
+          <a:p>
+            <a:pPr algn="ctr"/>
+            <a:r>
+              <a:rPr sz="1500" b="1">
+                <a:solidFill>
+                  <a:srgbClr val="2D2D2D"/>
+                </a:solidFill>
+                <a:latin typeface="Calibri"/>
+              </a:rPr>
+              <a:t>Despejar</a:t>
+            </a:r>
+          </a:p>
+        </p:txBody>
+      </p:sp>
+      <p:sp>
+        <p:nvSpPr>
+          <p:cNvPr id="16" name="TextBox 15"/>
+          <p:cNvSpPr txBox="1"/>
+          <p:nvPr/>
+        </p:nvSpPr>
+        <p:spPr>
+          <a:xfrm>
+            <a:off x="8942832" y="3931920"/>
+            <a:ext cx="2627376" cy="1554480"/>
+          </a:xfrm>
+          <a:prstGeom prst="rect">
+            <a:avLst/>
+          </a:prstGeom>
+          <a:noFill/>
+        </p:spPr>
+        <p:txBody>
+          <a:bodyPr wrap="square" anchor="t" lIns="0" rIns="0" tIns="0" bIns="0">
+            <a:spAutoFit/>
+          </a:bodyPr>
+          <a:lstStyle/>
+          <a:p>
+            <a:pPr algn="ctr"/>
+            <a:r>
+              <a:rPr sz="1200" b="0">
+                <a:solidFill>
+                  <a:srgbClr val="6E6E6E"/>
+                </a:solidFill>
+                <a:latin typeface="Calibri"/>
+              </a:rPr>
+              <a:t>β = (XᵀX + λI)⁻¹Xᵀy</a:t>
+            </a:r>
+          </a:p>
+        </p:txBody>
+      </p:sp>
+      <p:sp>
+        <p:nvSpPr>
+          <p:cNvPr id="17" name="Rounded Rectangle 16"/>
+          <p:cNvSpPr/>
+          <p:nvPr/>
+        </p:nvSpPr>
+        <p:spPr>
+          <a:xfrm>
+            <a:off x="548640" y="5074920"/>
+            <a:ext cx="11091672" cy="329184"/>
+          </a:xfrm>
+          <a:prstGeom prst="roundRect">
+            <a:avLst/>
+          </a:prstGeom>
+          <a:solidFill>
+            <a:srgbClr val="FCEDEE"/>
+          </a:solidFill>
+          <a:ln w="12700">
+            <a:solidFill>
+              <a:srgbClr val="E4002B"/>
+            </a:solidFill>
+          </a:ln>
+          <a:effectLst/>
+        </p:spPr>
+        <p:style>
+          <a:lnRef idx="1">
+            <a:schemeClr val="accent1"/>
+          </a:lnRef>
+          <a:fillRef idx="3">
+            <a:schemeClr val="accent1"/>
+          </a:fillRef>
+          <a:effectRef idx="2">
+            <a:schemeClr val="accent1"/>
+          </a:effectRef>
+          <a:fontRef idx="minor">
+            <a:schemeClr val="lt1"/>
+          </a:fontRef>
+        </p:style>
+        <p:txBody>
+          <a:bodyPr rtlCol="0" anchor="ctr"/>
+          <a:lstStyle/>
+          <a:p>
+            <a:pPr algn="ctr"/>
+          </a:p>
+        </p:txBody>
+      </p:sp>
+      <p:pic>
+        <p:nvPicPr>
+          <p:cNvPr id="18" name="Picture 17" descr="book-open__E4002B.png"/>
+          <p:cNvPicPr>
+            <a:picLocks noChangeAspect="1"/>
+          </p:cNvPicPr>
+          <p:nvPr/>
+        </p:nvPicPr>
+        <p:blipFill>
+          <a:blip r:embed="rId2"/>
+          <a:stretch>
+            <a:fillRect/>
+          </a:stretch>
+        </p:blipFill>
+        <p:spPr>
+          <a:xfrm>
+            <a:off x="694944" y="5129784"/>
+            <a:ext cx="219456" cy="219456"/>
+          </a:xfrm>
+          <a:prstGeom prst="rect">
+            <a:avLst/>
+          </a:prstGeom>
+        </p:spPr>
+      </p:pic>
+      <p:sp>
+        <p:nvSpPr>
+          <p:cNvPr id="19" name="TextBox 18"/>
+          <p:cNvSpPr txBox="1"/>
+          <p:nvPr/>
+        </p:nvSpPr>
+        <p:spPr>
+          <a:xfrm>
+            <a:off x="1005840" y="5106924"/>
+            <a:ext cx="10524744" cy="274320"/>
+          </a:xfrm>
+          <a:prstGeom prst="rect">
+            <a:avLst/>
+          </a:prstGeom>
+          <a:noFill/>
+        </p:spPr>
+        <p:txBody>
+          <a:bodyPr wrap="square" lIns="0" rIns="0" tIns="0" bIns="0">
+            <a:spAutoFit/>
+          </a:bodyPr>
+          <a:lstStyle/>
+          <a:p>
             <a:pPr algn="l"/>
             <a:r>
-              <a:rPr sz="1700" b="0">
-                <a:solidFill>
-                  <a:srgbClr val="FCEDEE"/>
-                </a:solidFill>
-                <a:latin typeface="Calibri"/>
-              </a:rPr>
-              <a:t>Capítulo 5.3 — jueves, bloques A1 y A2</a:t>
+              <a:rPr sz="1200" b="1">
+                <a:solidFill>
+                  <a:srgbClr val="9B1B30"/>
+                </a:solidFill>
+                <a:latin typeface="Calibri"/>
+              </a:rPr>
+              <a:t>En el paper:  </a:t>
+            </a:r>
+            <a:r>
+              <a:rPr sz="1200" b="1">
+                <a:solidFill>
+                  <a:srgbClr val="2D2D2D"/>
+                </a:solidFill>
+                <a:latin typeface="Calibri"/>
+              </a:rPr>
+              <a:t>Hoerl &amp; Kennard (1970), Technometrics 12(1), ESL Sección 3.4.1, verificado contra sklearn en el cuaderno (celda 19)</a:t>
+            </a:r>
+          </a:p>
+        </p:txBody>
+      </p:sp>
+      <p:sp>
+        <p:nvSpPr>
+          <p:cNvPr id="20" name="Rounded Rectangle 19"/>
+          <p:cNvSpPr/>
+          <p:nvPr/>
+        </p:nvSpPr>
+        <p:spPr>
+          <a:xfrm>
+            <a:off x="8458200" y="301752"/>
+            <a:ext cx="3200400" cy="402336"/>
+          </a:xfrm>
+          <a:prstGeom prst="roundRect">
+            <a:avLst/>
+          </a:prstGeom>
+          <a:solidFill>
+            <a:srgbClr val="FCEDEE"/>
+          </a:solidFill>
+          <a:ln w="15875">
+            <a:solidFill>
+              <a:srgbClr val="E4002B"/>
+            </a:solidFill>
+          </a:ln>
+          <a:effectLst/>
+        </p:spPr>
+        <p:style>
+          <a:lnRef idx="1">
+            <a:schemeClr val="accent1"/>
+          </a:lnRef>
+          <a:fillRef idx="3">
+            <a:schemeClr val="accent1"/>
+          </a:fillRef>
+          <a:effectRef idx="2">
+            <a:schemeClr val="accent1"/>
+          </a:effectRef>
+          <a:fontRef idx="minor">
+            <a:schemeClr val="lt1"/>
+          </a:fontRef>
+        </p:style>
+        <p:txBody>
+          <a:bodyPr rtlCol="0" anchor="ctr" lIns="54864" rIns="54864" tIns="0" bIns="0"/>
+          <a:lstStyle/>
+          <a:p>
+            <a:pPr algn="ctr"/>
+            <a:r>
+              <a:rPr sz="1300" b="1">
+                <a:solidFill>
+                  <a:srgbClr val="9B1B30"/>
+                </a:solidFill>
+                <a:latin typeface="Calibri"/>
+              </a:rPr>
+              <a:t>▶  Notebook, Sección 3, 🧮 RIDGE, celda 14</a:t>
+            </a:r>
+          </a:p>
+        </p:txBody>
+      </p:sp>
+      <p:sp>
+        <p:nvSpPr>
+          <p:cNvPr id="21" name="Oval 20"/>
+          <p:cNvSpPr/>
+          <p:nvPr/>
+        </p:nvSpPr>
+        <p:spPr>
+          <a:xfrm>
+            <a:off x="548640" y="6473952"/>
+            <a:ext cx="100584" cy="100584"/>
+          </a:xfrm>
+          <a:prstGeom prst="ellipse">
+            <a:avLst/>
+          </a:prstGeom>
+          <a:solidFill>
+            <a:srgbClr val="E4002B"/>
+          </a:solidFill>
+          <a:ln>
+            <a:noFill/>
+          </a:ln>
+          <a:effectLst/>
+        </p:spPr>
+        <p:style>
+          <a:lnRef idx="1">
+            <a:schemeClr val="accent1"/>
+          </a:lnRef>
+          <a:fillRef idx="3">
+            <a:schemeClr val="accent1"/>
+          </a:fillRef>
+          <a:effectRef idx="2">
+            <a:schemeClr val="accent1"/>
+          </a:effectRef>
+          <a:fontRef idx="minor">
+            <a:schemeClr val="lt1"/>
+          </a:fontRef>
+        </p:style>
+        <p:txBody>
+          <a:bodyPr rtlCol="0" anchor="ctr"/>
+          <a:lstStyle/>
+          <a:p>
+            <a:pPr algn="ctr"/>
+          </a:p>
+        </p:txBody>
+      </p:sp>
+      <p:sp>
+        <p:nvSpPr>
+          <p:cNvPr id="22" name="TextBox 21"/>
+          <p:cNvSpPr txBox="1"/>
+          <p:nvPr/>
+        </p:nvSpPr>
+        <p:spPr>
+          <a:xfrm>
+            <a:off x="749808" y="6437376"/>
+            <a:ext cx="7772400" cy="274320"/>
+          </a:xfrm>
+          <a:prstGeom prst="rect">
+            <a:avLst/>
+          </a:prstGeom>
+          <a:noFill/>
+        </p:spPr>
+        <p:txBody>
+          <a:bodyPr wrap="square" anchor="t" lIns="0" rIns="0" tIns="0" bIns="0">
+            <a:spAutoFit/>
+          </a:bodyPr>
+          <a:lstStyle/>
+          <a:p>
+            <a:pPr algn="l"/>
+            <a:r>
+              <a:rPr sz="900" b="0">
+                <a:solidFill>
+                  <a:srgbClr val="6E6E6E"/>
+                </a:solidFill>
+                <a:latin typeface="Calibri"/>
+              </a:rPr>
+              <a:t>S05 — Herramientas para la Ciencia de Datos, UPC</a:t>
+            </a:r>
+          </a:p>
+        </p:txBody>
+      </p:sp>
+      <p:sp>
+        <p:nvSpPr>
+          <p:cNvPr id="23" name="TextBox 22"/>
+          <p:cNvSpPr txBox="1"/>
+          <p:nvPr/>
+        </p:nvSpPr>
+        <p:spPr>
+          <a:xfrm>
+            <a:off x="10180320" y="6437376"/>
+            <a:ext cx="1463040" cy="274320"/>
+          </a:xfrm>
+          <a:prstGeom prst="rect">
+            <a:avLst/>
+          </a:prstGeom>
+          <a:noFill/>
+        </p:spPr>
+        <p:txBody>
+          <a:bodyPr wrap="square" anchor="t" lIns="0" rIns="0" tIns="0" bIns="0">
+            <a:spAutoFit/>
+          </a:bodyPr>
+          <a:lstStyle/>
+          <a:p>
+            <a:pPr algn="r"/>
+            <a:r>
+              <a:rPr sz="900" b="0">
+                <a:solidFill>
+                  <a:srgbClr val="6E6E6E"/>
+                </a:solidFill>
+                <a:latin typeface="Calibri"/>
+              </a:rPr>
+              <a:t>10 / 22</a:t>
             </a:r>
           </a:p>
         </p:txBody>
@@ -5712,7 +6203,7 @@
                 </a:solidFill>
                 <a:latin typeface="Calibri"/>
               </a:rPr>
-              <a:t>DOS PENALIZACIONES, DOS COMPORTAMIENTOS — ISLR SECCIÓN 6.2</a:t>
+              <a:t>[PIZARRA] DEMOSTRACIÓN 2 DE 2 — SE DERIVA EN EL TABLERO</a:t>
             </a:r>
           </a:p>
         </p:txBody>
@@ -5747,27 +6238,27 @@
                 </a:solidFill>
                 <a:latin typeface="Calibri"/>
               </a:rPr>
-              <a:t>Ridge contrae todo; el LASSO además selecciona</a:t>
-            </a:r>
-          </a:p>
-        </p:txBody>
-      </p:sp>
-      <p:sp>
-        <p:nvSpPr>
-          <p:cNvPr id="4" name="Rounded Rectangle 3"/>
+              <a:t>LASSO: el soft-threshold anula toda señal menor que λ</a:t>
+            </a:r>
+          </a:p>
+        </p:txBody>
+      </p:sp>
+      <p:sp>
+        <p:nvSpPr>
+          <p:cNvPr id="4" name="Rectangle 3"/>
           <p:cNvSpPr/>
           <p:nvPr/>
         </p:nvSpPr>
         <p:spPr>
           <a:xfrm>
-            <a:off x="548640" y="1828800"/>
-            <a:ext cx="5285232" cy="3611880"/>
-          </a:xfrm>
-          <a:prstGeom prst="roundRect">
+            <a:off x="1935480" y="2802255"/>
+            <a:ext cx="8321040" cy="19050"/>
+          </a:xfrm>
+          <a:prstGeom prst="rect">
             <a:avLst/>
           </a:prstGeom>
           <a:solidFill>
-            <a:srgbClr val="FCEDEE"/>
+            <a:srgbClr val="F4F4F4"/>
           </a:solidFill>
           <a:ln>
             <a:noFill/>
@@ -5798,14 +6289,67 @@
       </p:sp>
       <p:sp>
         <p:nvSpPr>
-          <p:cNvPr id="5" name="TextBox 4"/>
+          <p:cNvPr id="5" name="Oval 4"/>
+          <p:cNvSpPr/>
+          <p:nvPr/>
+        </p:nvSpPr>
+        <p:spPr>
+          <a:xfrm>
+            <a:off x="1592580" y="2468880"/>
+            <a:ext cx="685800" cy="685800"/>
+          </a:xfrm>
+          <a:prstGeom prst="ellipse">
+            <a:avLst/>
+          </a:prstGeom>
+          <a:solidFill>
+            <a:srgbClr val="E4002B"/>
+          </a:solidFill>
+          <a:ln>
+            <a:noFill/>
+          </a:ln>
+          <a:effectLst/>
+        </p:spPr>
+        <p:style>
+          <a:lnRef idx="1">
+            <a:schemeClr val="accent1"/>
+          </a:lnRef>
+          <a:fillRef idx="3">
+            <a:schemeClr val="accent1"/>
+          </a:fillRef>
+          <a:effectRef idx="2">
+            <a:schemeClr val="accent1"/>
+          </a:effectRef>
+          <a:fontRef idx="minor">
+            <a:schemeClr val="lt1"/>
+          </a:fontRef>
+        </p:style>
+        <p:txBody>
+          <a:bodyPr rtlCol="0" anchor="ctr" lIns="0" rIns="0" tIns="0" bIns="0"/>
+          <a:lstStyle/>
+          <a:p>
+            <a:pPr algn="ctr"/>
+            <a:r>
+              <a:rPr sz="2200" b="1">
+                <a:solidFill>
+                  <a:srgbClr val="FFFFFF"/>
+                </a:solidFill>
+                <a:latin typeface="Calibri"/>
+              </a:rPr>
+              <a:t>1</a:t>
+            </a:r>
+          </a:p>
+        </p:txBody>
+      </p:sp>
+      <p:sp>
+        <p:nvSpPr>
+          <p:cNvPr id="6" name="TextBox 5"/>
           <p:cNvSpPr txBox="1"/>
           <p:nvPr/>
         </p:nvSpPr>
         <p:spPr>
           <a:xfrm>
-            <a:off x="841248" y="2048256"/>
-            <a:ext cx="4700016" cy="548640"/>
+            <a:off x="621792" y="3319272"/>
+            <a:ext cx="2627376" cy="594360"/>
           </a:xfrm>
           <a:prstGeom prst="rect">
             <a:avLst/>
@@ -5818,26 +6362,472 @@
           </a:bodyPr>
           <a:lstStyle/>
           <a:p>
-            <a:pPr algn="l">
-              <a:lnSpc>
-                <a:spcPct val="105000"/>
-              </a:lnSpc>
-            </a:pPr>
-            <a:r>
-              <a:rPr sz="1600" b="1">
-                <a:solidFill>
-                  <a:srgbClr val="9B1B30"/>
-                </a:solidFill>
-                <a:latin typeface="Calibri"/>
-              </a:rPr>
-              <a:t>Ridge (L2)</a:t>
-            </a:r>
+            <a:pPr algn="ctr"/>
+            <a:r>
+              <a:rPr sz="1500" b="1">
+                <a:solidFill>
+                  <a:srgbClr val="2D2D2D"/>
+                </a:solidFill>
+                <a:latin typeface="Calibri"/>
+              </a:rPr>
+              <a:t>Señal ρ</a:t>
+            </a:r>
+          </a:p>
+        </p:txBody>
+      </p:sp>
+      <p:sp>
+        <p:nvSpPr>
+          <p:cNvPr id="7" name="TextBox 6"/>
+          <p:cNvSpPr txBox="1"/>
+          <p:nvPr/>
+        </p:nvSpPr>
+        <p:spPr>
+          <a:xfrm>
+            <a:off x="621792" y="3931920"/>
+            <a:ext cx="2627376" cy="1554480"/>
+          </a:xfrm>
+          <a:prstGeom prst="rect">
+            <a:avLst/>
+          </a:prstGeom>
+          <a:noFill/>
+        </p:spPr>
+        <p:txBody>
+          <a:bodyPr wrap="square" anchor="t" lIns="0" rIns="0" tIns="0" bIns="0">
+            <a:spAutoFit/>
+          </a:bodyPr>
+          <a:lstStyle/>
+          <a:p>
+            <a:pPr algn="ctr"/>
+            <a:r>
+              <a:rPr sz="1200" b="0">
+                <a:solidFill>
+                  <a:srgbClr val="6E6E6E"/>
+                </a:solidFill>
+                <a:latin typeface="Calibri"/>
+              </a:rPr>
+              <a:t>ρ = xⱼᵀr₋ⱼ / n</a:t>
+            </a:r>
+          </a:p>
+        </p:txBody>
+      </p:sp>
+      <p:sp>
+        <p:nvSpPr>
+          <p:cNvPr id="8" name="Oval 7"/>
+          <p:cNvSpPr/>
+          <p:nvPr/>
+        </p:nvSpPr>
+        <p:spPr>
+          <a:xfrm>
+            <a:off x="4366260" y="2468880"/>
+            <a:ext cx="685800" cy="685800"/>
+          </a:xfrm>
+          <a:prstGeom prst="ellipse">
+            <a:avLst/>
+          </a:prstGeom>
+          <a:solidFill>
+            <a:srgbClr val="9B1B30"/>
+          </a:solidFill>
+          <a:ln>
+            <a:noFill/>
+          </a:ln>
+          <a:effectLst/>
+        </p:spPr>
+        <p:style>
+          <a:lnRef idx="1">
+            <a:schemeClr val="accent1"/>
+          </a:lnRef>
+          <a:fillRef idx="3">
+            <a:schemeClr val="accent1"/>
+          </a:fillRef>
+          <a:effectRef idx="2">
+            <a:schemeClr val="accent1"/>
+          </a:effectRef>
+          <a:fontRef idx="minor">
+            <a:schemeClr val="lt1"/>
+          </a:fontRef>
+        </p:style>
+        <p:txBody>
+          <a:bodyPr rtlCol="0" anchor="ctr" lIns="0" rIns="0" tIns="0" bIns="0"/>
+          <a:lstStyle/>
+          <a:p>
+            <a:pPr algn="ctr"/>
+            <a:r>
+              <a:rPr sz="2200" b="1">
+                <a:solidFill>
+                  <a:srgbClr val="FFFFFF"/>
+                </a:solidFill>
+                <a:latin typeface="Calibri"/>
+              </a:rPr>
+              <a:t>2</a:t>
+            </a:r>
+          </a:p>
+        </p:txBody>
+      </p:sp>
+      <p:sp>
+        <p:nvSpPr>
+          <p:cNvPr id="9" name="TextBox 8"/>
+          <p:cNvSpPr txBox="1"/>
+          <p:nvPr/>
+        </p:nvSpPr>
+        <p:spPr>
+          <a:xfrm>
+            <a:off x="3395472" y="3319272"/>
+            <a:ext cx="2627376" cy="594360"/>
+          </a:xfrm>
+          <a:prstGeom prst="rect">
+            <a:avLst/>
+          </a:prstGeom>
+          <a:noFill/>
+        </p:spPr>
+        <p:txBody>
+          <a:bodyPr wrap="square" anchor="t" lIns="0" rIns="0" tIns="0" bIns="0">
+            <a:spAutoFit/>
+          </a:bodyPr>
+          <a:lstStyle/>
+          <a:p>
+            <a:pPr algn="ctr"/>
+            <a:r>
+              <a:rPr sz="1500" b="1">
+                <a:solidFill>
+                  <a:srgbClr val="2D2D2D"/>
+                </a:solidFill>
+                <a:latin typeface="Calibri"/>
+              </a:rPr>
+              <a:t>Zona muerta</a:t>
+            </a:r>
+          </a:p>
+        </p:txBody>
+      </p:sp>
+      <p:sp>
+        <p:nvSpPr>
+          <p:cNvPr id="10" name="TextBox 9"/>
+          <p:cNvSpPr txBox="1"/>
+          <p:nvPr/>
+        </p:nvSpPr>
+        <p:spPr>
+          <a:xfrm>
+            <a:off x="3395472" y="3931920"/>
+            <a:ext cx="2627376" cy="1554480"/>
+          </a:xfrm>
+          <a:prstGeom prst="rect">
+            <a:avLst/>
+          </a:prstGeom>
+          <a:noFill/>
+        </p:spPr>
+        <p:txBody>
+          <a:bodyPr wrap="square" anchor="t" lIns="0" rIns="0" tIns="0" bIns="0">
+            <a:spAutoFit/>
+          </a:bodyPr>
+          <a:lstStyle/>
+          <a:p>
+            <a:pPr algn="ctr"/>
+            <a:r>
+              <a:rPr sz="1200" b="0">
+                <a:solidFill>
+                  <a:srgbClr val="6E6E6E"/>
+                </a:solidFill>
+                <a:latin typeface="Calibri"/>
+              </a:rPr>
+              <a:t>|ρ| ≤ λ ⇒ β = 0</a:t>
+            </a:r>
+          </a:p>
+        </p:txBody>
+      </p:sp>
+      <p:sp>
+        <p:nvSpPr>
+          <p:cNvPr id="11" name="Oval 10"/>
+          <p:cNvSpPr/>
+          <p:nvPr/>
+        </p:nvSpPr>
+        <p:spPr>
+          <a:xfrm>
+            <a:off x="7139940" y="2468880"/>
+            <a:ext cx="685800" cy="685800"/>
+          </a:xfrm>
+          <a:prstGeom prst="ellipse">
+            <a:avLst/>
+          </a:prstGeom>
+          <a:solidFill>
+            <a:srgbClr val="E4002B"/>
+          </a:solidFill>
+          <a:ln>
+            <a:noFill/>
+          </a:ln>
+          <a:effectLst/>
+        </p:spPr>
+        <p:style>
+          <a:lnRef idx="1">
+            <a:schemeClr val="accent1"/>
+          </a:lnRef>
+          <a:fillRef idx="3">
+            <a:schemeClr val="accent1"/>
+          </a:fillRef>
+          <a:effectRef idx="2">
+            <a:schemeClr val="accent1"/>
+          </a:effectRef>
+          <a:fontRef idx="minor">
+            <a:schemeClr val="lt1"/>
+          </a:fontRef>
+        </p:style>
+        <p:txBody>
+          <a:bodyPr rtlCol="0" anchor="ctr" lIns="0" rIns="0" tIns="0" bIns="0"/>
+          <a:lstStyle/>
+          <a:p>
+            <a:pPr algn="ctr"/>
+            <a:r>
+              <a:rPr sz="2200" b="1">
+                <a:solidFill>
+                  <a:srgbClr val="FFFFFF"/>
+                </a:solidFill>
+                <a:latin typeface="Calibri"/>
+              </a:rPr>
+              <a:t>3</a:t>
+            </a:r>
+          </a:p>
+        </p:txBody>
+      </p:sp>
+      <p:sp>
+        <p:nvSpPr>
+          <p:cNvPr id="12" name="TextBox 11"/>
+          <p:cNvSpPr txBox="1"/>
+          <p:nvPr/>
+        </p:nvSpPr>
+        <p:spPr>
+          <a:xfrm>
+            <a:off x="6169152" y="3319272"/>
+            <a:ext cx="2627376" cy="594360"/>
+          </a:xfrm>
+          <a:prstGeom prst="rect">
+            <a:avLst/>
+          </a:prstGeom>
+          <a:noFill/>
+        </p:spPr>
+        <p:txBody>
+          <a:bodyPr wrap="square" anchor="t" lIns="0" rIns="0" tIns="0" bIns="0">
+            <a:spAutoFit/>
+          </a:bodyPr>
+          <a:lstStyle/>
+          <a:p>
+            <a:pPr algn="ctr"/>
+            <a:r>
+              <a:rPr sz="1500" b="1">
+                <a:solidFill>
+                  <a:srgbClr val="2D2D2D"/>
+                </a:solidFill>
+                <a:latin typeface="Calibri"/>
+              </a:rPr>
+              <a:t>Restar λ</a:t>
+            </a:r>
+          </a:p>
+        </p:txBody>
+      </p:sp>
+      <p:sp>
+        <p:nvSpPr>
+          <p:cNvPr id="13" name="TextBox 12"/>
+          <p:cNvSpPr txBox="1"/>
+          <p:nvPr/>
+        </p:nvSpPr>
+        <p:spPr>
+          <a:xfrm>
+            <a:off x="6169152" y="3931920"/>
+            <a:ext cx="2627376" cy="1554480"/>
+          </a:xfrm>
+          <a:prstGeom prst="rect">
+            <a:avLst/>
+          </a:prstGeom>
+          <a:noFill/>
+        </p:spPr>
+        <p:txBody>
+          <a:bodyPr wrap="square" anchor="t" lIns="0" rIns="0" tIns="0" bIns="0">
+            <a:spAutoFit/>
+          </a:bodyPr>
+          <a:lstStyle/>
+          <a:p>
+            <a:pPr algn="ctr"/>
+            <a:r>
+              <a:rPr sz="1200" b="0">
+                <a:solidFill>
+                  <a:srgbClr val="6E6E6E"/>
+                </a:solidFill>
+                <a:latin typeface="Calibri"/>
+              </a:rPr>
+              <a:t>|ρ| &gt; λ ⇒ β = ρ ∓ λ</a:t>
+            </a:r>
+          </a:p>
+        </p:txBody>
+      </p:sp>
+      <p:sp>
+        <p:nvSpPr>
+          <p:cNvPr id="14" name="Oval 13"/>
+          <p:cNvSpPr/>
+          <p:nvPr/>
+        </p:nvSpPr>
+        <p:spPr>
+          <a:xfrm>
+            <a:off x="9913620" y="2468880"/>
+            <a:ext cx="685800" cy="685800"/>
+          </a:xfrm>
+          <a:prstGeom prst="ellipse">
+            <a:avLst/>
+          </a:prstGeom>
+          <a:solidFill>
+            <a:srgbClr val="9B1B30"/>
+          </a:solidFill>
+          <a:ln>
+            <a:noFill/>
+          </a:ln>
+          <a:effectLst/>
+        </p:spPr>
+        <p:style>
+          <a:lnRef idx="1">
+            <a:schemeClr val="accent1"/>
+          </a:lnRef>
+          <a:fillRef idx="3">
+            <a:schemeClr val="accent1"/>
+          </a:fillRef>
+          <a:effectRef idx="2">
+            <a:schemeClr val="accent1"/>
+          </a:effectRef>
+          <a:fontRef idx="minor">
+            <a:schemeClr val="lt1"/>
+          </a:fontRef>
+        </p:style>
+        <p:txBody>
+          <a:bodyPr rtlCol="0" anchor="ctr" lIns="0" rIns="0" tIns="0" bIns="0"/>
+          <a:lstStyle/>
+          <a:p>
+            <a:pPr algn="ctr"/>
+            <a:r>
+              <a:rPr sz="2200" b="1">
+                <a:solidFill>
+                  <a:srgbClr val="FFFFFF"/>
+                </a:solidFill>
+                <a:latin typeface="Calibri"/>
+              </a:rPr>
+              <a:t>4</a:t>
+            </a:r>
+          </a:p>
+        </p:txBody>
+      </p:sp>
+      <p:sp>
+        <p:nvSpPr>
+          <p:cNvPr id="15" name="TextBox 14"/>
+          <p:cNvSpPr txBox="1"/>
+          <p:nvPr/>
+        </p:nvSpPr>
+        <p:spPr>
+          <a:xfrm>
+            <a:off x="8942832" y="3319272"/>
+            <a:ext cx="2627376" cy="594360"/>
+          </a:xfrm>
+          <a:prstGeom prst="rect">
+            <a:avLst/>
+          </a:prstGeom>
+          <a:noFill/>
+        </p:spPr>
+        <p:txBody>
+          <a:bodyPr wrap="square" anchor="t" lIns="0" rIns="0" tIns="0" bIns="0">
+            <a:spAutoFit/>
+          </a:bodyPr>
+          <a:lstStyle/>
+          <a:p>
+            <a:pPr algn="ctr"/>
+            <a:r>
+              <a:rPr sz="1500" b="1">
+                <a:solidFill>
+                  <a:srgbClr val="2D2D2D"/>
+                </a:solidFill>
+                <a:latin typeface="Calibri"/>
+              </a:rPr>
+              <a:t>Resultado</a:t>
+            </a:r>
+          </a:p>
+        </p:txBody>
+      </p:sp>
+      <p:sp>
+        <p:nvSpPr>
+          <p:cNvPr id="16" name="TextBox 15"/>
+          <p:cNvSpPr txBox="1"/>
+          <p:nvPr/>
+        </p:nvSpPr>
+        <p:spPr>
+          <a:xfrm>
+            <a:off x="8942832" y="3931920"/>
+            <a:ext cx="2627376" cy="1554480"/>
+          </a:xfrm>
+          <a:prstGeom prst="rect">
+            <a:avLst/>
+          </a:prstGeom>
+          <a:noFill/>
+        </p:spPr>
+        <p:txBody>
+          <a:bodyPr wrap="square" anchor="t" lIns="0" rIns="0" tIns="0" bIns="0">
+            <a:spAutoFit/>
+          </a:bodyPr>
+          <a:lstStyle/>
+          <a:p>
+            <a:pPr algn="ctr"/>
+            <a:r>
+              <a:rPr sz="1200" b="0">
+                <a:solidFill>
+                  <a:srgbClr val="6E6E6E"/>
+                </a:solidFill>
+                <a:latin typeface="Calibri"/>
+              </a:rPr>
+              <a:t>S(ρ,λ) = sgn(ρ)·(|ρ|−λ)₊</a:t>
+            </a:r>
+          </a:p>
+        </p:txBody>
+      </p:sp>
+      <p:sp>
+        <p:nvSpPr>
+          <p:cNvPr id="17" name="Rounded Rectangle 16"/>
+          <p:cNvSpPr/>
+          <p:nvPr/>
+        </p:nvSpPr>
+        <p:spPr>
+          <a:xfrm>
+            <a:off x="548640" y="5074920"/>
+            <a:ext cx="11091672" cy="329184"/>
+          </a:xfrm>
+          <a:prstGeom prst="roundRect">
+            <a:avLst/>
+          </a:prstGeom>
+          <a:solidFill>
+            <a:srgbClr val="FCEDEE"/>
+          </a:solidFill>
+          <a:ln w="12700">
+            <a:solidFill>
+              <a:srgbClr val="E4002B"/>
+            </a:solidFill>
+          </a:ln>
+          <a:effectLst/>
+        </p:spPr>
+        <p:style>
+          <a:lnRef idx="1">
+            <a:schemeClr val="accent1"/>
+          </a:lnRef>
+          <a:fillRef idx="3">
+            <a:schemeClr val="accent1"/>
+          </a:fillRef>
+          <a:effectRef idx="2">
+            <a:schemeClr val="accent1"/>
+          </a:effectRef>
+          <a:fontRef idx="minor">
+            <a:schemeClr val="lt1"/>
+          </a:fontRef>
+        </p:style>
+        <p:txBody>
+          <a:bodyPr rtlCol="0" anchor="ctr"/>
+          <a:lstStyle/>
+          <a:p>
+            <a:pPr algn="ctr"/>
           </a:p>
         </p:txBody>
       </p:sp>
       <p:pic>
         <p:nvPicPr>
-          <p:cNvPr id="6" name="Picture 5" descr="deck_ridge_encogimiento.png"/>
+          <p:cNvPr id="18" name="Picture 17" descr="book-open__E4002B.png"/>
           <p:cNvPicPr>
             <a:picLocks noChangeAspect="1"/>
           </p:cNvPicPr>
@@ -5851,8 +6841,8 @@
         </p:blipFill>
         <p:spPr>
           <a:xfrm>
-            <a:off x="1621063" y="2724912"/>
-            <a:ext cx="3140386" cy="1874519"/>
+            <a:off x="694944" y="5129784"/>
+            <a:ext cx="219456" cy="219456"/>
           </a:xfrm>
           <a:prstGeom prst="rect">
             <a:avLst/>
@@ -5861,14 +6851,14 @@
       </p:pic>
       <p:sp>
         <p:nvSpPr>
-          <p:cNvPr id="7" name="TextBox 6"/>
+          <p:cNvPr id="19" name="TextBox 18"/>
           <p:cNvSpPr txBox="1"/>
           <p:nvPr/>
         </p:nvSpPr>
         <p:spPr>
           <a:xfrm>
-            <a:off x="877824" y="4745735"/>
-            <a:ext cx="4626864" cy="512065"/>
+            <a:off x="1005840" y="5106924"/>
+            <a:ext cx="10524744" cy="274320"/>
           </a:xfrm>
           <a:prstGeom prst="rect">
             <a:avLst/>
@@ -5876,377 +6866,36 @@
           <a:noFill/>
         </p:spPr>
         <p:txBody>
-          <a:bodyPr wrap="square" lIns="0" tIns="0" bIns="0">
+          <a:bodyPr wrap="square" lIns="0" rIns="0" tIns="0" bIns="0">
             <a:spAutoFit/>
           </a:bodyPr>
           <a:lstStyle/>
           <a:p>
-            <a:pPr>
-              <a:lnSpc>
-                <a:spcPct val="105000"/>
-              </a:lnSpc>
-              <a:spcAft>
-                <a:spcPts val="700"/>
-              </a:spcAft>
-            </a:pPr>
-            <a:r>
-              <a:rPr sz="1300">
-                <a:solidFill>
-                  <a:srgbClr val="E4002B"/>
-                </a:solidFill>
-                <a:latin typeface="Calibri"/>
-              </a:rPr>
-              <a:t>▪  </a:t>
-            </a:r>
-            <a:r>
-              <a:rPr sz="1300">
+            <a:pPr algn="l"/>
+            <a:r>
+              <a:rPr sz="1200" b="1">
+                <a:solidFill>
+                  <a:srgbClr val="9B1B30"/>
+                </a:solidFill>
+                <a:latin typeface="Calibri"/>
+              </a:rPr>
+              <a:t>En el paper:  </a:t>
+            </a:r>
+            <a:r>
+              <a:rPr sz="1200" b="1">
                 <a:solidFill>
                   <a:srgbClr val="2D2D2D"/>
                 </a:solidFill>
                 <a:latin typeface="Calibri"/>
               </a:rPr>
-              <a:t>Penaliza Σβ²</a:t>
-            </a:r>
-          </a:p>
-          <a:p>
-            <a:pPr>
-              <a:lnSpc>
-                <a:spcPct val="105000"/>
-              </a:lnSpc>
-              <a:spcAft>
-                <a:spcPts val="700"/>
-              </a:spcAft>
-            </a:pPr>
-            <a:r>
-              <a:rPr sz="1300">
-                <a:solidFill>
-                  <a:srgbClr val="E4002B"/>
-                </a:solidFill>
-                <a:latin typeface="Calibri"/>
-              </a:rPr>
-              <a:t>▪  Contrae, nunca anula</a:t>
-            </a:r>
-            <a:r>
-              <a:rPr sz="1300">
-                <a:solidFill>
-                  <a:srgbClr val="2D2D2D"/>
-                </a:solidFill>
-                <a:latin typeface="Calibri"/>
-              </a:rPr>
-              <a:t/>
-            </a:r>
-          </a:p>
-          <a:p>
-            <a:pPr>
-              <a:lnSpc>
-                <a:spcPct val="105000"/>
-              </a:lnSpc>
-              <a:spcAft>
-                <a:spcPts val="700"/>
-              </a:spcAft>
-            </a:pPr>
-            <a:r>
-              <a:rPr sz="1300">
-                <a:solidFill>
-                  <a:srgbClr val="E4002B"/>
-                </a:solidFill>
-                <a:latin typeface="Calibri"/>
-              </a:rPr>
-              <a:t>▪  </a:t>
-            </a:r>
-            <a:r>
-              <a:rPr sz="1300">
-                <a:solidFill>
-                  <a:srgbClr val="2D2D2D"/>
-                </a:solidFill>
-                <a:latin typeface="Calibri"/>
-              </a:rPr>
-              <a:t>Cura la colinealidad</a:t>
-            </a:r>
-          </a:p>
-        </p:txBody>
-      </p:sp>
-      <p:sp>
-        <p:nvSpPr>
-          <p:cNvPr id="8" name="Rounded Rectangle 7"/>
-          <p:cNvSpPr/>
-          <p:nvPr/>
-        </p:nvSpPr>
-        <p:spPr>
-          <a:xfrm>
-            <a:off x="6355080" y="1828800"/>
-            <a:ext cx="5285232" cy="3611880"/>
-          </a:xfrm>
-          <a:prstGeom prst="roundRect">
-            <a:avLst/>
-          </a:prstGeom>
-          <a:solidFill>
-            <a:srgbClr val="FCEDEE"/>
-          </a:solidFill>
-          <a:ln>
-            <a:noFill/>
-          </a:ln>
-          <a:effectLst/>
-        </p:spPr>
-        <p:style>
-          <a:lnRef idx="1">
-            <a:schemeClr val="accent1"/>
-          </a:lnRef>
-          <a:fillRef idx="3">
-            <a:schemeClr val="accent1"/>
-          </a:fillRef>
-          <a:effectRef idx="2">
-            <a:schemeClr val="accent1"/>
-          </a:effectRef>
-          <a:fontRef idx="minor">
-            <a:schemeClr val="lt1"/>
-          </a:fontRef>
-        </p:style>
-        <p:txBody>
-          <a:bodyPr rtlCol="0" anchor="ctr"/>
-          <a:lstStyle/>
-          <a:p>
-            <a:pPr algn="ctr"/>
-          </a:p>
-        </p:txBody>
-      </p:sp>
-      <p:sp>
-        <p:nvSpPr>
-          <p:cNvPr id="9" name="TextBox 8"/>
-          <p:cNvSpPr txBox="1"/>
-          <p:nvPr/>
-        </p:nvSpPr>
-        <p:spPr>
-          <a:xfrm>
-            <a:off x="6647688" y="2048256"/>
-            <a:ext cx="4700016" cy="548640"/>
-          </a:xfrm>
-          <a:prstGeom prst="rect">
-            <a:avLst/>
-          </a:prstGeom>
-          <a:noFill/>
-        </p:spPr>
-        <p:txBody>
-          <a:bodyPr wrap="square" anchor="t" lIns="0" rIns="0" tIns="0" bIns="0">
-            <a:spAutoFit/>
-          </a:bodyPr>
-          <a:lstStyle/>
-          <a:p>
-            <a:pPr algn="l">
-              <a:lnSpc>
-                <a:spcPct val="105000"/>
-              </a:lnSpc>
-            </a:pPr>
-            <a:r>
-              <a:rPr sz="1600" b="1">
-                <a:solidFill>
-                  <a:srgbClr val="9B1B30"/>
-                </a:solidFill>
-                <a:latin typeface="Calibri"/>
-              </a:rPr>
-              <a:t>LASSO (L1)</a:t>
-            </a:r>
-          </a:p>
-        </p:txBody>
-      </p:sp>
-      <p:sp>
-        <p:nvSpPr>
-          <p:cNvPr id="10" name="TextBox 9"/>
-          <p:cNvSpPr txBox="1"/>
-          <p:nvPr/>
-        </p:nvSpPr>
-        <p:spPr>
-          <a:xfrm>
-            <a:off x="6684264" y="2724912"/>
-            <a:ext cx="4626864" cy="2532888"/>
-          </a:xfrm>
-          <a:prstGeom prst="rect">
-            <a:avLst/>
-          </a:prstGeom>
-          <a:noFill/>
-        </p:spPr>
-        <p:txBody>
-          <a:bodyPr wrap="square" lIns="0" tIns="0" bIns="0">
-            <a:spAutoFit/>
-          </a:bodyPr>
-          <a:lstStyle/>
-          <a:p>
-            <a:pPr>
-              <a:lnSpc>
-                <a:spcPct val="105000"/>
-              </a:lnSpc>
-              <a:spcAft>
-                <a:spcPts val="700"/>
-              </a:spcAft>
-            </a:pPr>
-            <a:r>
-              <a:rPr sz="1300">
-                <a:solidFill>
-                  <a:srgbClr val="E4002B"/>
-                </a:solidFill>
-                <a:latin typeface="Calibri"/>
-              </a:rPr>
-              <a:t>▪  </a:t>
-            </a:r>
-            <a:r>
-              <a:rPr sz="1300">
-                <a:solidFill>
-                  <a:srgbClr val="2D2D2D"/>
-                </a:solidFill>
-                <a:latin typeface="Calibri"/>
-              </a:rPr>
-              <a:t>Penaliza Σ|β|</a:t>
-            </a:r>
-          </a:p>
-          <a:p>
-            <a:pPr>
-              <a:lnSpc>
-                <a:spcPct val="105000"/>
-              </a:lnSpc>
-              <a:spcAft>
-                <a:spcPts val="700"/>
-              </a:spcAft>
-            </a:pPr>
-            <a:r>
-              <a:rPr sz="1300">
-                <a:solidFill>
-                  <a:srgbClr val="E4002B"/>
-                </a:solidFill>
-                <a:latin typeface="Calibri"/>
-              </a:rPr>
-              <a:t>▪  </a:t>
-            </a:r>
-            <a:r>
-              <a:rPr sz="1300">
-                <a:solidFill>
-                  <a:srgbClr val="2D2D2D"/>
-                </a:solidFill>
-                <a:latin typeface="Calibri"/>
-              </a:rPr>
-              <a:t>Anula: modelo ralo</a:t>
-            </a:r>
-          </a:p>
-          <a:p>
-            <a:pPr>
-              <a:lnSpc>
-                <a:spcPct val="105000"/>
-              </a:lnSpc>
-              <a:spcAft>
-                <a:spcPts val="700"/>
-              </a:spcAft>
-            </a:pPr>
-            <a:r>
-              <a:rPr sz="1300">
-                <a:solidFill>
-                  <a:srgbClr val="E4002B"/>
-                </a:solidFill>
-                <a:latin typeface="Calibri"/>
-              </a:rPr>
-              <a:t>▪  </a:t>
-            </a:r>
-            <a:r>
-              <a:rPr sz="1300">
-                <a:solidFill>
-                  <a:srgbClr val="2D2D2D"/>
-                </a:solidFill>
-                <a:latin typeface="Calibri"/>
-              </a:rPr>
-              <a:t>Selecciona solo</a:t>
-            </a:r>
-          </a:p>
-        </p:txBody>
-      </p:sp>
-      <p:sp>
-        <p:nvSpPr>
-          <p:cNvPr id="11" name="Oval 10"/>
-          <p:cNvSpPr/>
-          <p:nvPr/>
-        </p:nvSpPr>
-        <p:spPr>
-          <a:xfrm>
-            <a:off x="5897880" y="3406140"/>
-            <a:ext cx="457200" cy="457200"/>
-          </a:xfrm>
-          <a:prstGeom prst="ellipse">
-            <a:avLst/>
-          </a:prstGeom>
-          <a:solidFill>
-            <a:srgbClr val="E4002B"/>
-          </a:solidFill>
-          <a:ln>
-            <a:noFill/>
-          </a:ln>
-          <a:effectLst/>
-        </p:spPr>
-        <p:style>
-          <a:lnRef idx="1">
-            <a:schemeClr val="accent1"/>
-          </a:lnRef>
-          <a:fillRef idx="3">
-            <a:schemeClr val="accent1"/>
-          </a:fillRef>
-          <a:effectRef idx="2">
-            <a:schemeClr val="accent1"/>
-          </a:effectRef>
-          <a:fontRef idx="minor">
-            <a:schemeClr val="lt1"/>
-          </a:fontRef>
-        </p:style>
-        <p:txBody>
-          <a:bodyPr rtlCol="0" anchor="ctr" lIns="0" rIns="0" tIns="0" bIns="0"/>
-          <a:lstStyle/>
-          <a:p>
-            <a:pPr algn="ctr"/>
-            <a:r>
-              <a:rPr sz="1500" b="1">
-                <a:solidFill>
-                  <a:srgbClr val="FFFFFF"/>
-                </a:solidFill>
-                <a:latin typeface="Calibri"/>
-              </a:rPr>
-              <a:t>vs</a:t>
-            </a:r>
-          </a:p>
-        </p:txBody>
-      </p:sp>
-      <p:sp>
-        <p:nvSpPr>
-          <p:cNvPr id="12" name="TextBox 11"/>
-          <p:cNvSpPr txBox="1"/>
-          <p:nvPr/>
-        </p:nvSpPr>
-        <p:spPr>
-          <a:xfrm>
-            <a:off x="548640" y="5961888"/>
-            <a:ext cx="11094720" cy="292608"/>
-          </a:xfrm>
-          <a:prstGeom prst="rect">
-            <a:avLst/>
-          </a:prstGeom>
-          <a:noFill/>
-        </p:spPr>
-        <p:txBody>
-          <a:bodyPr wrap="square" anchor="t" lIns="0" rIns="0" tIns="0" bIns="0">
-            <a:spAutoFit/>
-          </a:bodyPr>
-          <a:lstStyle/>
-          <a:p>
-            <a:pPr algn="l"/>
-            <a:r>
-              <a:rPr sz="1000" b="0">
-                <a:solidFill>
-                  <a:srgbClr val="6E6E6E"/>
-                </a:solidFill>
-                <a:latin typeface="Calibri"/>
-              </a:rPr>
-              <a:t>figuras/S05_fig_ridge_encogimiento.png (venv). Hoerl &amp; Kennard (1970); Tibshirani (1996).</a:t>
-            </a:r>
-          </a:p>
-        </p:txBody>
-      </p:sp>
-      <p:sp>
-        <p:nvSpPr>
-          <p:cNvPr id="13" name="Rounded Rectangle 12"/>
+              <a:t>Tibshirani (1996), JRSS-B 58(1), descenso por coordenadas (glmnet), comprobado manualmente contra sklearn en el cuaderno (celda 27)</a:t>
+            </a:r>
+          </a:p>
+        </p:txBody>
+      </p:sp>
+      <p:sp>
+        <p:nvSpPr>
+          <p:cNvPr id="20" name="Rounded Rectangle 19"/>
           <p:cNvSpPr/>
           <p:nvPr/>
         </p:nvSpPr>
@@ -6294,14 +6943,14 @@
                 </a:solidFill>
                 <a:latin typeface="Calibri"/>
               </a:rPr>
-              <a:t>▶  Notebook, Sección 3, demo RIDGE, celda 16</a:t>
-            </a:r>
-          </a:p>
-        </p:txBody>
-      </p:sp>
-      <p:sp>
-        <p:nvSpPr>
-          <p:cNvPr id="14" name="Oval 13"/>
+              <a:t>▶  Notebook, Sección 3, 🧮 + 🖐️ LASSO, celda 25</a:t>
+            </a:r>
+          </a:p>
+        </p:txBody>
+      </p:sp>
+      <p:sp>
+        <p:nvSpPr>
+          <p:cNvPr id="21" name="Oval 20"/>
           <p:cNvSpPr/>
           <p:nvPr/>
         </p:nvSpPr>
@@ -6345,7 +6994,7 @@
       </p:sp>
       <p:sp>
         <p:nvSpPr>
-          <p:cNvPr id="15" name="TextBox 14"/>
+          <p:cNvPr id="22" name="TextBox 21"/>
           <p:cNvSpPr txBox="1"/>
           <p:nvPr/>
         </p:nvSpPr>
@@ -6380,7 +7029,7 @@
       </p:sp>
       <p:sp>
         <p:nvSpPr>
-          <p:cNvPr id="16" name="TextBox 15"/>
+          <p:cNvPr id="23" name="TextBox 22"/>
           <p:cNvSpPr txBox="1"/>
           <p:nvPr/>
         </p:nvSpPr>
@@ -6408,7 +7057,7 @@
                 </a:solidFill>
                 <a:latin typeface="Calibri"/>
               </a:rPr>
-              <a:t>11 / 26</a:t>
+              <a:t>11 / 22</a:t>
             </a:r>
           </a:p>
         </p:txBody>
@@ -6469,7 +7118,7 @@
                 </a:solidFill>
                 <a:latin typeface="Calibri"/>
               </a:rPr>
-              <a:t>[PIZARRA] DEMOSTRACIÓN 1 DE 2 — SE DERIVA EN EL TABLERO</a:t>
+              <a:t>POR QUÉ EL LASSO SELECCIONA Y EL RIDGE NO — GEOMETRÍA L1 VS L2</a:t>
             </a:r>
           </a:p>
         </p:txBody>
@@ -6504,596 +7153,14 @@
                 </a:solidFill>
                 <a:latin typeface="Calibri"/>
               </a:rPr>
-              <a:t>Ridge: sumar λI salva la matriz que el OLS no puede invertir</a:t>
-            </a:r>
-          </a:p>
-        </p:txBody>
-      </p:sp>
-      <p:sp>
-        <p:nvSpPr>
-          <p:cNvPr id="4" name="Rectangle 3"/>
-          <p:cNvSpPr/>
-          <p:nvPr/>
-        </p:nvSpPr>
-        <p:spPr>
-          <a:xfrm>
-            <a:off x="1935480" y="2802255"/>
-            <a:ext cx="8321040" cy="19050"/>
-          </a:xfrm>
-          <a:prstGeom prst="rect">
-            <a:avLst/>
-          </a:prstGeom>
-          <a:solidFill>
-            <a:srgbClr val="F4F4F4"/>
-          </a:solidFill>
-          <a:ln>
-            <a:noFill/>
-          </a:ln>
-          <a:effectLst/>
-        </p:spPr>
-        <p:style>
-          <a:lnRef idx="1">
-            <a:schemeClr val="accent1"/>
-          </a:lnRef>
-          <a:fillRef idx="3">
-            <a:schemeClr val="accent1"/>
-          </a:fillRef>
-          <a:effectRef idx="2">
-            <a:schemeClr val="accent1"/>
-          </a:effectRef>
-          <a:fontRef idx="minor">
-            <a:schemeClr val="lt1"/>
-          </a:fontRef>
-        </p:style>
-        <p:txBody>
-          <a:bodyPr rtlCol="0" anchor="ctr"/>
-          <a:lstStyle/>
-          <a:p>
-            <a:pPr algn="ctr"/>
-          </a:p>
-        </p:txBody>
-      </p:sp>
-      <p:sp>
-        <p:nvSpPr>
-          <p:cNvPr id="5" name="Oval 4"/>
-          <p:cNvSpPr/>
-          <p:nvPr/>
-        </p:nvSpPr>
-        <p:spPr>
-          <a:xfrm>
-            <a:off x="1592580" y="2468880"/>
-            <a:ext cx="685800" cy="685800"/>
-          </a:xfrm>
-          <a:prstGeom prst="ellipse">
-            <a:avLst/>
-          </a:prstGeom>
-          <a:solidFill>
-            <a:srgbClr val="E4002B"/>
-          </a:solidFill>
-          <a:ln>
-            <a:noFill/>
-          </a:ln>
-          <a:effectLst/>
-        </p:spPr>
-        <p:style>
-          <a:lnRef idx="1">
-            <a:schemeClr val="accent1"/>
-          </a:lnRef>
-          <a:fillRef idx="3">
-            <a:schemeClr val="accent1"/>
-          </a:fillRef>
-          <a:effectRef idx="2">
-            <a:schemeClr val="accent1"/>
-          </a:effectRef>
-          <a:fontRef idx="minor">
-            <a:schemeClr val="lt1"/>
-          </a:fontRef>
-        </p:style>
-        <p:txBody>
-          <a:bodyPr rtlCol="0" anchor="ctr" lIns="0" rIns="0" tIns="0" bIns="0"/>
-          <a:lstStyle/>
-          <a:p>
-            <a:pPr algn="ctr"/>
-            <a:r>
-              <a:rPr sz="2200" b="1">
-                <a:solidFill>
-                  <a:srgbClr val="FFFFFF"/>
-                </a:solidFill>
-                <a:latin typeface="Calibri"/>
-              </a:rPr>
-              <a:t>1</a:t>
-            </a:r>
-          </a:p>
-        </p:txBody>
-      </p:sp>
-      <p:sp>
-        <p:nvSpPr>
-          <p:cNvPr id="6" name="TextBox 5"/>
-          <p:cNvSpPr txBox="1"/>
-          <p:nvPr/>
-        </p:nvSpPr>
-        <p:spPr>
-          <a:xfrm>
-            <a:off x="621792" y="3319272"/>
-            <a:ext cx="2627376" cy="594360"/>
-          </a:xfrm>
-          <a:prstGeom prst="rect">
-            <a:avLst/>
-          </a:prstGeom>
-          <a:noFill/>
-        </p:spPr>
-        <p:txBody>
-          <a:bodyPr wrap="square" anchor="t" lIns="0" rIns="0" tIns="0" bIns="0">
-            <a:spAutoFit/>
-          </a:bodyPr>
-          <a:lstStyle/>
-          <a:p>
-            <a:pPr algn="ctr"/>
-            <a:r>
-              <a:rPr sz="1500" b="1">
-                <a:solidFill>
-                  <a:srgbClr val="2D2D2D"/>
-                </a:solidFill>
-                <a:latin typeface="Calibri"/>
-              </a:rPr>
-              <a:t>Objetivo</a:t>
-            </a:r>
-          </a:p>
-        </p:txBody>
-      </p:sp>
-      <p:sp>
-        <p:nvSpPr>
-          <p:cNvPr id="7" name="TextBox 6"/>
-          <p:cNvSpPr txBox="1"/>
-          <p:nvPr/>
-        </p:nvSpPr>
-        <p:spPr>
-          <a:xfrm>
-            <a:off x="621792" y="3931920"/>
-            <a:ext cx="2627376" cy="1554480"/>
-          </a:xfrm>
-          <a:prstGeom prst="rect">
-            <a:avLst/>
-          </a:prstGeom>
-          <a:noFill/>
-        </p:spPr>
-        <p:txBody>
-          <a:bodyPr wrap="square" anchor="t" lIns="0" rIns="0" tIns="0" bIns="0">
-            <a:spAutoFit/>
-          </a:bodyPr>
-          <a:lstStyle/>
-          <a:p>
-            <a:pPr algn="ctr"/>
-            <a:r>
-              <a:rPr sz="1200" b="0">
-                <a:solidFill>
-                  <a:srgbClr val="6E6E6E"/>
-                </a:solidFill>
-                <a:latin typeface="Calibri"/>
-              </a:rPr>
-              <a:t>J(β) = RSS + λ·Σβ²</a:t>
-            </a:r>
-          </a:p>
-        </p:txBody>
-      </p:sp>
-      <p:sp>
-        <p:nvSpPr>
-          <p:cNvPr id="8" name="Oval 7"/>
-          <p:cNvSpPr/>
-          <p:nvPr/>
-        </p:nvSpPr>
-        <p:spPr>
-          <a:xfrm>
-            <a:off x="4366260" y="2468880"/>
-            <a:ext cx="685800" cy="685800"/>
-          </a:xfrm>
-          <a:prstGeom prst="ellipse">
-            <a:avLst/>
-          </a:prstGeom>
-          <a:solidFill>
-            <a:srgbClr val="9B1B30"/>
-          </a:solidFill>
-          <a:ln>
-            <a:noFill/>
-          </a:ln>
-          <a:effectLst/>
-        </p:spPr>
-        <p:style>
-          <a:lnRef idx="1">
-            <a:schemeClr val="accent1"/>
-          </a:lnRef>
-          <a:fillRef idx="3">
-            <a:schemeClr val="accent1"/>
-          </a:fillRef>
-          <a:effectRef idx="2">
-            <a:schemeClr val="accent1"/>
-          </a:effectRef>
-          <a:fontRef idx="minor">
-            <a:schemeClr val="lt1"/>
-          </a:fontRef>
-        </p:style>
-        <p:txBody>
-          <a:bodyPr rtlCol="0" anchor="ctr" lIns="0" rIns="0" tIns="0" bIns="0"/>
-          <a:lstStyle/>
-          <a:p>
-            <a:pPr algn="ctr"/>
-            <a:r>
-              <a:rPr sz="2200" b="1">
-                <a:solidFill>
-                  <a:srgbClr val="FFFFFF"/>
-                </a:solidFill>
-                <a:latin typeface="Calibri"/>
-              </a:rPr>
-              <a:t>2</a:t>
-            </a:r>
-          </a:p>
-        </p:txBody>
-      </p:sp>
-      <p:sp>
-        <p:nvSpPr>
-          <p:cNvPr id="9" name="TextBox 8"/>
-          <p:cNvSpPr txBox="1"/>
-          <p:nvPr/>
-        </p:nvSpPr>
-        <p:spPr>
-          <a:xfrm>
-            <a:off x="3395472" y="3319272"/>
-            <a:ext cx="2627376" cy="594360"/>
-          </a:xfrm>
-          <a:prstGeom prst="rect">
-            <a:avLst/>
-          </a:prstGeom>
-          <a:noFill/>
-        </p:spPr>
-        <p:txBody>
-          <a:bodyPr wrap="square" anchor="t" lIns="0" rIns="0" tIns="0" bIns="0">
-            <a:spAutoFit/>
-          </a:bodyPr>
-          <a:lstStyle/>
-          <a:p>
-            <a:pPr algn="ctr"/>
-            <a:r>
-              <a:rPr sz="1500" b="1">
-                <a:solidFill>
-                  <a:srgbClr val="2D2D2D"/>
-                </a:solidFill>
-                <a:latin typeface="Calibri"/>
-              </a:rPr>
-              <a:t>Derivar</a:t>
-            </a:r>
-          </a:p>
-        </p:txBody>
-      </p:sp>
-      <p:sp>
-        <p:nvSpPr>
-          <p:cNvPr id="10" name="TextBox 9"/>
-          <p:cNvSpPr txBox="1"/>
-          <p:nvPr/>
-        </p:nvSpPr>
-        <p:spPr>
-          <a:xfrm>
-            <a:off x="3395472" y="3931920"/>
-            <a:ext cx="2627376" cy="1554480"/>
-          </a:xfrm>
-          <a:prstGeom prst="rect">
-            <a:avLst/>
-          </a:prstGeom>
-          <a:noFill/>
-        </p:spPr>
-        <p:txBody>
-          <a:bodyPr wrap="square" anchor="t" lIns="0" rIns="0" tIns="0" bIns="0">
-            <a:spAutoFit/>
-          </a:bodyPr>
-          <a:lstStyle/>
-          <a:p>
-            <a:pPr algn="ctr"/>
-            <a:r>
-              <a:rPr sz="1200" b="0">
-                <a:solidFill>
-                  <a:srgbClr val="6E6E6E"/>
-                </a:solidFill>
-                <a:latin typeface="Calibri"/>
-              </a:rPr>
-              <a:t>∂J/∂β = −2Xᵀy + 2XᵀXβ + 2λβ</a:t>
-            </a:r>
-          </a:p>
-        </p:txBody>
-      </p:sp>
-      <p:sp>
-        <p:nvSpPr>
-          <p:cNvPr id="11" name="Oval 10"/>
-          <p:cNvSpPr/>
-          <p:nvPr/>
-        </p:nvSpPr>
-        <p:spPr>
-          <a:xfrm>
-            <a:off x="7139940" y="2468880"/>
-            <a:ext cx="685800" cy="685800"/>
-          </a:xfrm>
-          <a:prstGeom prst="ellipse">
-            <a:avLst/>
-          </a:prstGeom>
-          <a:solidFill>
-            <a:srgbClr val="E4002B"/>
-          </a:solidFill>
-          <a:ln>
-            <a:noFill/>
-          </a:ln>
-          <a:effectLst/>
-        </p:spPr>
-        <p:style>
-          <a:lnRef idx="1">
-            <a:schemeClr val="accent1"/>
-          </a:lnRef>
-          <a:fillRef idx="3">
-            <a:schemeClr val="accent1"/>
-          </a:fillRef>
-          <a:effectRef idx="2">
-            <a:schemeClr val="accent1"/>
-          </a:effectRef>
-          <a:fontRef idx="minor">
-            <a:schemeClr val="lt1"/>
-          </a:fontRef>
-        </p:style>
-        <p:txBody>
-          <a:bodyPr rtlCol="0" anchor="ctr" lIns="0" rIns="0" tIns="0" bIns="0"/>
-          <a:lstStyle/>
-          <a:p>
-            <a:pPr algn="ctr"/>
-            <a:r>
-              <a:rPr sz="2200" b="1">
-                <a:solidFill>
-                  <a:srgbClr val="FFFFFF"/>
-                </a:solidFill>
-                <a:latin typeface="Calibri"/>
-              </a:rPr>
-              <a:t>3</a:t>
-            </a:r>
-          </a:p>
-        </p:txBody>
-      </p:sp>
-      <p:sp>
-        <p:nvSpPr>
-          <p:cNvPr id="12" name="TextBox 11"/>
-          <p:cNvSpPr txBox="1"/>
-          <p:nvPr/>
-        </p:nvSpPr>
-        <p:spPr>
-          <a:xfrm>
-            <a:off x="6169152" y="3319272"/>
-            <a:ext cx="2627376" cy="594360"/>
-          </a:xfrm>
-          <a:prstGeom prst="rect">
-            <a:avLst/>
-          </a:prstGeom>
-          <a:noFill/>
-        </p:spPr>
-        <p:txBody>
-          <a:bodyPr wrap="square" anchor="t" lIns="0" rIns="0" tIns="0" bIns="0">
-            <a:spAutoFit/>
-          </a:bodyPr>
-          <a:lstStyle/>
-          <a:p>
-            <a:pPr algn="ctr"/>
-            <a:r>
-              <a:rPr sz="1500" b="1">
-                <a:solidFill>
-                  <a:srgbClr val="2D2D2D"/>
-                </a:solidFill>
-                <a:latin typeface="Calibri"/>
-              </a:rPr>
-              <a:t>Igualar a 0</a:t>
-            </a:r>
-          </a:p>
-        </p:txBody>
-      </p:sp>
-      <p:sp>
-        <p:nvSpPr>
-          <p:cNvPr id="13" name="TextBox 12"/>
-          <p:cNvSpPr txBox="1"/>
-          <p:nvPr/>
-        </p:nvSpPr>
-        <p:spPr>
-          <a:xfrm>
-            <a:off x="6169152" y="3931920"/>
-            <a:ext cx="2627376" cy="1554480"/>
-          </a:xfrm>
-          <a:prstGeom prst="rect">
-            <a:avLst/>
-          </a:prstGeom>
-          <a:noFill/>
-        </p:spPr>
-        <p:txBody>
-          <a:bodyPr wrap="square" anchor="t" lIns="0" rIns="0" tIns="0" bIns="0">
-            <a:spAutoFit/>
-          </a:bodyPr>
-          <a:lstStyle/>
-          <a:p>
-            <a:pPr algn="ctr"/>
-            <a:r>
-              <a:rPr sz="1200" b="0">
-                <a:solidFill>
-                  <a:srgbClr val="6E6E6E"/>
-                </a:solidFill>
-                <a:latin typeface="Calibri"/>
-              </a:rPr>
-              <a:t>(XᵀX + λI)·β = Xᵀy</a:t>
-            </a:r>
-          </a:p>
-        </p:txBody>
-      </p:sp>
-      <p:sp>
-        <p:nvSpPr>
-          <p:cNvPr id="14" name="Oval 13"/>
-          <p:cNvSpPr/>
-          <p:nvPr/>
-        </p:nvSpPr>
-        <p:spPr>
-          <a:xfrm>
-            <a:off x="9913620" y="2468880"/>
-            <a:ext cx="685800" cy="685800"/>
-          </a:xfrm>
-          <a:prstGeom prst="ellipse">
-            <a:avLst/>
-          </a:prstGeom>
-          <a:solidFill>
-            <a:srgbClr val="9B1B30"/>
-          </a:solidFill>
-          <a:ln>
-            <a:noFill/>
-          </a:ln>
-          <a:effectLst/>
-        </p:spPr>
-        <p:style>
-          <a:lnRef idx="1">
-            <a:schemeClr val="accent1"/>
-          </a:lnRef>
-          <a:fillRef idx="3">
-            <a:schemeClr val="accent1"/>
-          </a:fillRef>
-          <a:effectRef idx="2">
-            <a:schemeClr val="accent1"/>
-          </a:effectRef>
-          <a:fontRef idx="minor">
-            <a:schemeClr val="lt1"/>
-          </a:fontRef>
-        </p:style>
-        <p:txBody>
-          <a:bodyPr rtlCol="0" anchor="ctr" lIns="0" rIns="0" tIns="0" bIns="0"/>
-          <a:lstStyle/>
-          <a:p>
-            <a:pPr algn="ctr"/>
-            <a:r>
-              <a:rPr sz="2200" b="1">
-                <a:solidFill>
-                  <a:srgbClr val="FFFFFF"/>
-                </a:solidFill>
-                <a:latin typeface="Calibri"/>
-              </a:rPr>
-              <a:t>4</a:t>
-            </a:r>
-          </a:p>
-        </p:txBody>
-      </p:sp>
-      <p:sp>
-        <p:nvSpPr>
-          <p:cNvPr id="15" name="TextBox 14"/>
-          <p:cNvSpPr txBox="1"/>
-          <p:nvPr/>
-        </p:nvSpPr>
-        <p:spPr>
-          <a:xfrm>
-            <a:off x="8942832" y="3319272"/>
-            <a:ext cx="2627376" cy="594360"/>
-          </a:xfrm>
-          <a:prstGeom prst="rect">
-            <a:avLst/>
-          </a:prstGeom>
-          <a:noFill/>
-        </p:spPr>
-        <p:txBody>
-          <a:bodyPr wrap="square" anchor="t" lIns="0" rIns="0" tIns="0" bIns="0">
-            <a:spAutoFit/>
-          </a:bodyPr>
-          <a:lstStyle/>
-          <a:p>
-            <a:pPr algn="ctr"/>
-            <a:r>
-              <a:rPr sz="1500" b="1">
-                <a:solidFill>
-                  <a:srgbClr val="2D2D2D"/>
-                </a:solidFill>
-                <a:latin typeface="Calibri"/>
-              </a:rPr>
-              <a:t>Despejar</a:t>
-            </a:r>
-          </a:p>
-        </p:txBody>
-      </p:sp>
-      <p:sp>
-        <p:nvSpPr>
-          <p:cNvPr id="16" name="TextBox 15"/>
-          <p:cNvSpPr txBox="1"/>
-          <p:nvPr/>
-        </p:nvSpPr>
-        <p:spPr>
-          <a:xfrm>
-            <a:off x="8942832" y="3931920"/>
-            <a:ext cx="2627376" cy="1554480"/>
-          </a:xfrm>
-          <a:prstGeom prst="rect">
-            <a:avLst/>
-          </a:prstGeom>
-          <a:noFill/>
-        </p:spPr>
-        <p:txBody>
-          <a:bodyPr wrap="square" anchor="t" lIns="0" rIns="0" tIns="0" bIns="0">
-            <a:spAutoFit/>
-          </a:bodyPr>
-          <a:lstStyle/>
-          <a:p>
-            <a:pPr algn="ctr"/>
-            <a:r>
-              <a:rPr sz="1200" b="0">
-                <a:solidFill>
-                  <a:srgbClr val="6E6E6E"/>
-                </a:solidFill>
-                <a:latin typeface="Calibri"/>
-              </a:rPr>
-              <a:t>β = (XᵀX + λI)⁻¹Xᵀy</a:t>
-            </a:r>
-          </a:p>
-        </p:txBody>
-      </p:sp>
-      <p:sp>
-        <p:nvSpPr>
-          <p:cNvPr id="17" name="Rounded Rectangle 16"/>
-          <p:cNvSpPr/>
-          <p:nvPr/>
-        </p:nvSpPr>
-        <p:spPr>
-          <a:xfrm>
-            <a:off x="548640" y="5074920"/>
-            <a:ext cx="11091672" cy="329184"/>
-          </a:xfrm>
-          <a:prstGeom prst="roundRect">
-            <a:avLst/>
-          </a:prstGeom>
-          <a:solidFill>
-            <a:srgbClr val="FCEDEE"/>
-          </a:solidFill>
-          <a:ln w="12700">
-            <a:solidFill>
-              <a:srgbClr val="E4002B"/>
-            </a:solidFill>
-          </a:ln>
-          <a:effectLst/>
-        </p:spPr>
-        <p:style>
-          <a:lnRef idx="1">
-            <a:schemeClr val="accent1"/>
-          </a:lnRef>
-          <a:fillRef idx="3">
-            <a:schemeClr val="accent1"/>
-          </a:fillRef>
-          <a:effectRef idx="2">
-            <a:schemeClr val="accent1"/>
-          </a:effectRef>
-          <a:fontRef idx="minor">
-            <a:schemeClr val="lt1"/>
-          </a:fontRef>
-        </p:style>
-        <p:txBody>
-          <a:bodyPr rtlCol="0" anchor="ctr"/>
-          <a:lstStyle/>
-          <a:p>
-            <a:pPr algn="ctr"/>
+              <a:t>El rombo del LASSO anula variables</a:t>
+            </a:r>
           </a:p>
         </p:txBody>
       </p:sp>
       <p:pic>
         <p:nvPicPr>
-          <p:cNvPr id="18" name="Picture 17" descr="book-open__E4002B.png"/>
+          <p:cNvPr id="4" name="Picture 3" descr="deck_geometria_L1_L2.png"/>
           <p:cNvPicPr>
             <a:picLocks noChangeAspect="1"/>
           </p:cNvPicPr>
@@ -7107,8 +7174,8 @@
         </p:blipFill>
         <p:spPr>
           <a:xfrm>
-            <a:off x="694944" y="5129784"/>
-            <a:ext cx="219456" cy="219456"/>
+            <a:off x="1280160" y="1783080"/>
+            <a:ext cx="8702166" cy="4206240"/>
           </a:xfrm>
           <a:prstGeom prst="rect">
             <a:avLst/>
@@ -7117,14 +7184,14 @@
       </p:pic>
       <p:sp>
         <p:nvSpPr>
-          <p:cNvPr id="19" name="TextBox 18"/>
+          <p:cNvPr id="5" name="TextBox 4"/>
           <p:cNvSpPr txBox="1"/>
           <p:nvPr/>
         </p:nvSpPr>
         <p:spPr>
           <a:xfrm>
-            <a:off x="1005840" y="5106924"/>
-            <a:ext cx="10524744" cy="274320"/>
+            <a:off x="548640" y="5961888"/>
+            <a:ext cx="11094720" cy="292608"/>
           </a:xfrm>
           <a:prstGeom prst="rect">
             <a:avLst/>
@@ -7132,36 +7199,27 @@
           <a:noFill/>
         </p:spPr>
         <p:txBody>
-          <a:bodyPr wrap="square" lIns="0" rIns="0" tIns="0" bIns="0">
+          <a:bodyPr wrap="square" anchor="t" lIns="0" rIns="0" tIns="0" bIns="0">
             <a:spAutoFit/>
           </a:bodyPr>
           <a:lstStyle/>
           <a:p>
             <a:pPr algn="l"/>
             <a:r>
-              <a:rPr sz="1200" b="1">
-                <a:solidFill>
-                  <a:srgbClr val="9B1B30"/>
-                </a:solidFill>
-                <a:latin typeface="Calibri"/>
-              </a:rPr>
-              <a:t>En el paper:  </a:t>
-            </a:r>
-            <a:r>
-              <a:rPr sz="1200" b="1">
-                <a:solidFill>
-                  <a:srgbClr val="2D2D2D"/>
-                </a:solidFill>
-                <a:latin typeface="Calibri"/>
-              </a:rPr>
-              <a:t>Hoerl &amp; Kennard (1970), Technometrics 12(1), ESL Sección 3.4.1, verificado contra sklearn en el cuaderno (celda 19)</a:t>
-            </a:r>
-          </a:p>
-        </p:txBody>
-      </p:sp>
-      <p:sp>
-        <p:nvSpPr>
-          <p:cNvPr id="20" name="Rounded Rectangle 19"/>
+              <a:rPr sz="1100" b="0">
+                <a:solidFill>
+                  <a:srgbClr val="6E6E6E"/>
+                </a:solidFill>
+                <a:latin typeface="Calibri"/>
+              </a:rPr>
+              <a:t>figuras/S05_fig_geometria_L1_L2.png (venv, cálculo directo). Fuente: ISLR Sección 6.2.2 y Figura 6.7; ESL Sección 3.4.2-3.4.3.</a:t>
+            </a:r>
+          </a:p>
+        </p:txBody>
+      </p:sp>
+      <p:sp>
+        <p:nvSpPr>
+          <p:cNvPr id="6" name="Rounded Rectangle 5"/>
           <p:cNvSpPr/>
           <p:nvPr/>
         </p:nvSpPr>
@@ -7209,14 +7267,14 @@
                 </a:solidFill>
                 <a:latin typeface="Calibri"/>
               </a:rPr>
-              <a:t>▶  Notebook, Sección 3, 🧮 RIDGE, celda 14</a:t>
-            </a:r>
-          </a:p>
-        </p:txBody>
-      </p:sp>
-      <p:sp>
-        <p:nvSpPr>
-          <p:cNvPr id="21" name="Oval 20"/>
+              <a:t>▶  Notebook, Sección 6.2, celda 124</a:t>
+            </a:r>
+          </a:p>
+        </p:txBody>
+      </p:sp>
+      <p:sp>
+        <p:nvSpPr>
+          <p:cNvPr id="7" name="Oval 6"/>
           <p:cNvSpPr/>
           <p:nvPr/>
         </p:nvSpPr>
@@ -7260,7 +7318,7 @@
       </p:sp>
       <p:sp>
         <p:nvSpPr>
-          <p:cNvPr id="22" name="TextBox 21"/>
+          <p:cNvPr id="8" name="TextBox 7"/>
           <p:cNvSpPr txBox="1"/>
           <p:nvPr/>
         </p:nvSpPr>
@@ -7295,7 +7353,7 @@
       </p:sp>
       <p:sp>
         <p:nvSpPr>
-          <p:cNvPr id="23" name="TextBox 22"/>
+          <p:cNvPr id="9" name="TextBox 8"/>
           <p:cNvSpPr txBox="1"/>
           <p:nvPr/>
         </p:nvSpPr>
@@ -7323,7 +7381,7 @@
                 </a:solidFill>
                 <a:latin typeface="Calibri"/>
               </a:rPr>
-              <a:t>12 / 26</a:t>
+              <a:t>12 / 22</a:t>
             </a:r>
           </a:p>
         </p:txBody>
@@ -7384,7 +7442,7 @@
                 </a:solidFill>
                 <a:latin typeface="Calibri"/>
               </a:rPr>
-              <a:t>[PIZARRA] DEMOSTRACIÓN 2 DE 2 — SE DERIVA EN EL TABLERO</a:t>
+              <a:t>ASÍ SE HACE — EL ERROR OPERATIVO NÚMERO UNO</a:t>
             </a:r>
           </a:p>
         </p:txBody>
@@ -7419,30 +7477,75 @@
                 </a:solidFill>
                 <a:latin typeface="Calibri"/>
               </a:rPr>
-              <a:t>LASSO: el soft-threshold anula toda señal menor que λ</a:t>
-            </a:r>
-          </a:p>
-        </p:txBody>
-      </p:sp>
-      <p:sp>
-        <p:nvSpPr>
-          <p:cNvPr id="4" name="Rectangle 3"/>
+              <a:t>Estandarizar es obligatorio antes de regularizar</a:t>
+            </a:r>
+          </a:p>
+        </p:txBody>
+      </p:sp>
+      <p:sp>
+        <p:nvSpPr>
+          <p:cNvPr id="4" name="TextBox 3"/>
+          <p:cNvSpPr txBox="1"/>
+          <p:nvPr/>
+        </p:nvSpPr>
+        <p:spPr>
+          <a:xfrm>
+            <a:off x="548640" y="1755648"/>
+            <a:ext cx="11094720" cy="457200"/>
+          </a:xfrm>
+          <a:prstGeom prst="rect">
+            <a:avLst/>
+          </a:prstGeom>
+          <a:noFill/>
+        </p:spPr>
+        <p:txBody>
+          <a:bodyPr wrap="square" lIns="0" tIns="0" bIns="0">
+            <a:spAutoFit/>
+          </a:bodyPr>
+          <a:lstStyle/>
+          <a:p>
+            <a:r>
+              <a:rPr sz="1400" b="1">
+                <a:solidFill>
+                  <a:srgbClr val="9B1B30"/>
+                </a:solidFill>
+                <a:latin typeface="Calibri"/>
+              </a:rPr>
+              <a:t>▸ Qué hace:  </a:t>
+            </a:r>
+            <a:r>
+              <a:rPr sz="1400">
+                <a:solidFill>
+                  <a:srgbClr val="2D2D2D"/>
+                </a:solidFill>
+                <a:latin typeface="Calibri"/>
+              </a:rPr>
+              <a:t>sin escalar, la penalización depende de las unidades y la selección se vuelve arbitraria.</a:t>
+            </a:r>
+          </a:p>
+        </p:txBody>
+      </p:sp>
+      <p:sp>
+        <p:nvSpPr>
+          <p:cNvPr id="5" name="Rounded Rectangle 4"/>
           <p:cNvSpPr/>
           <p:nvPr/>
         </p:nvSpPr>
         <p:spPr>
           <a:xfrm>
-            <a:off x="1935480" y="2802255"/>
-            <a:ext cx="8321040" cy="19050"/>
-          </a:xfrm>
-          <a:prstGeom prst="rect">
+            <a:off x="548640" y="2395728"/>
+            <a:ext cx="11094720" cy="1517904"/>
+          </a:xfrm>
+          <a:prstGeom prst="roundRect">
             <a:avLst/>
           </a:prstGeom>
           <a:solidFill>
             <a:srgbClr val="F4F4F4"/>
           </a:solidFill>
-          <a:ln>
-            <a:noFill/>
+          <a:ln w="9525">
+            <a:solidFill>
+              <a:srgbClr val="DDDDDD"/>
+            </a:solidFill>
           </a:ln>
           <a:effectLst/>
         </p:spPr>
@@ -7470,67 +7573,109 @@
       </p:sp>
       <p:sp>
         <p:nvSpPr>
-          <p:cNvPr id="5" name="Oval 4"/>
-          <p:cNvSpPr/>
-          <p:nvPr/>
-        </p:nvSpPr>
-        <p:spPr>
-          <a:xfrm>
-            <a:off x="1592580" y="2468880"/>
-            <a:ext cx="685800" cy="685800"/>
-          </a:xfrm>
-          <a:prstGeom prst="ellipse">
-            <a:avLst/>
-          </a:prstGeom>
-          <a:solidFill>
-            <a:srgbClr val="E4002B"/>
-          </a:solidFill>
-          <a:ln>
-            <a:noFill/>
-          </a:ln>
-          <a:effectLst/>
-        </p:spPr>
-        <p:style>
-          <a:lnRef idx="1">
-            <a:schemeClr val="accent1"/>
-          </a:lnRef>
-          <a:fillRef idx="3">
-            <a:schemeClr val="accent1"/>
-          </a:fillRef>
-          <a:effectRef idx="2">
-            <a:schemeClr val="accent1"/>
-          </a:effectRef>
-          <a:fontRef idx="minor">
-            <a:schemeClr val="lt1"/>
-          </a:fontRef>
-        </p:style>
-        <p:txBody>
-          <a:bodyPr rtlCol="0" anchor="ctr" lIns="0" rIns="0" tIns="0" bIns="0"/>
-          <a:lstStyle/>
-          <a:p>
-            <a:pPr algn="ctr"/>
-            <a:r>
-              <a:rPr sz="2200" b="1">
-                <a:solidFill>
-                  <a:srgbClr val="FFFFFF"/>
-                </a:solidFill>
-                <a:latin typeface="Calibri"/>
-              </a:rPr>
-              <a:t>1</a:t>
-            </a:r>
-          </a:p>
-        </p:txBody>
-      </p:sp>
-      <p:sp>
-        <p:nvSpPr>
           <p:cNvPr id="6" name="TextBox 5"/>
           <p:cNvSpPr txBox="1"/>
           <p:nvPr/>
         </p:nvSpPr>
         <p:spPr>
           <a:xfrm>
-            <a:off x="621792" y="3319272"/>
-            <a:ext cx="2627376" cy="594360"/>
+            <a:off x="804672" y="2542032"/>
+            <a:ext cx="10637520" cy="256032"/>
+          </a:xfrm>
+          <a:prstGeom prst="rect">
+            <a:avLst/>
+          </a:prstGeom>
+          <a:noFill/>
+        </p:spPr>
+        <p:txBody>
+          <a:bodyPr wrap="none" lIns="0" tIns="0" bIns="0">
+            <a:spAutoFit/>
+          </a:bodyPr>
+          <a:lstStyle/>
+          <a:p>
+            <a:r>
+              <a:rPr sz="1050" b="1">
+                <a:solidFill>
+                  <a:srgbClr val="9B1B30"/>
+                </a:solidFill>
+                <a:latin typeface="Calibri"/>
+              </a:rPr>
+              <a:t>CÓDIGO REAL DEL CUADERNO</a:t>
+            </a:r>
+          </a:p>
+        </p:txBody>
+      </p:sp>
+      <p:sp>
+        <p:nvSpPr>
+          <p:cNvPr id="7" name="TextBox 6"/>
+          <p:cNvSpPr txBox="1"/>
+          <p:nvPr/>
+        </p:nvSpPr>
+        <p:spPr>
+          <a:xfrm>
+            <a:off x="859536" y="2926080"/>
+            <a:ext cx="10472928" cy="914400"/>
+          </a:xfrm>
+          <a:prstGeom prst="rect">
+            <a:avLst/>
+          </a:prstGeom>
+          <a:noFill/>
+        </p:spPr>
+        <p:txBody>
+          <a:bodyPr wrap="square" lIns="0" tIns="0" bIns="0">
+            <a:spAutoFit/>
+          </a:bodyPr>
+          <a:lstStyle/>
+          <a:p>
+            <a:pPr>
+              <a:lnSpc>
+                <a:spcPct val="130000"/>
+              </a:lnSpc>
+              <a:spcAft>
+                <a:spcPts val="400"/>
+              </a:spcAft>
+            </a:pPr>
+            <a:r>
+              <a:rPr sz="1200">
+                <a:solidFill>
+                  <a:srgbClr val="2D2D2D"/>
+                </a:solidFill>
+                <a:latin typeface="Consolas"/>
+              </a:rPr>
+              <a:t>pipe = Pipeline([("escala", StandardScaler()), ("modelo", modelo)]).fit(Xtr, ytr)</a:t>
+            </a:r>
+          </a:p>
+          <a:p>
+            <a:pPr>
+              <a:lnSpc>
+                <a:spcPct val="130000"/>
+              </a:lnSpc>
+              <a:spcAft>
+                <a:spcPts val="400"/>
+              </a:spcAft>
+            </a:pPr>
+            <a:r>
+              <a:rPr sz="1200">
+                <a:solidFill>
+                  <a:srgbClr val="2D2D2D"/>
+                </a:solidFill>
+                <a:latin typeface="Consolas"/>
+              </a:rPr>
+              <a:t># el escalador aprende media/sigma SOLO del train -&gt; sin fuga</a:t>
+            </a:r>
+          </a:p>
+        </p:txBody>
+      </p:sp>
+      <p:sp>
+        <p:nvSpPr>
+          <p:cNvPr id="8" name="TextBox 7"/>
+          <p:cNvSpPr txBox="1"/>
+          <p:nvPr/>
+        </p:nvSpPr>
+        <p:spPr>
+          <a:xfrm>
+            <a:off x="548640" y="5961888"/>
+            <a:ext cx="11094720" cy="292608"/>
           </a:xfrm>
           <a:prstGeom prst="rect">
             <a:avLst/>
@@ -7543,540 +7688,22 @@
           </a:bodyPr>
           <a:lstStyle/>
           <a:p>
-            <a:pPr algn="ctr"/>
-            <a:r>
-              <a:rPr sz="1500" b="1">
-                <a:solidFill>
-                  <a:srgbClr val="2D2D2D"/>
-                </a:solidFill>
-                <a:latin typeface="Calibri"/>
-              </a:rPr>
-              <a:t>Señal ρ</a:t>
-            </a:r>
-          </a:p>
-        </p:txBody>
-      </p:sp>
-      <p:sp>
-        <p:nvSpPr>
-          <p:cNvPr id="7" name="TextBox 6"/>
-          <p:cNvSpPr txBox="1"/>
-          <p:nvPr/>
-        </p:nvSpPr>
-        <p:spPr>
-          <a:xfrm>
-            <a:off x="621792" y="3931920"/>
-            <a:ext cx="2627376" cy="1554480"/>
-          </a:xfrm>
-          <a:prstGeom prst="rect">
-            <a:avLst/>
-          </a:prstGeom>
-          <a:noFill/>
-        </p:spPr>
-        <p:txBody>
-          <a:bodyPr wrap="square" anchor="t" lIns="0" rIns="0" tIns="0" bIns="0">
-            <a:spAutoFit/>
-          </a:bodyPr>
-          <a:lstStyle/>
-          <a:p>
-            <a:pPr algn="ctr"/>
-            <a:r>
-              <a:rPr sz="1200" b="0">
+            <a:pPr algn="l"/>
+            <a:r>
+              <a:rPr sz="1000" b="0">
                 <a:solidFill>
                   <a:srgbClr val="6E6E6E"/>
                 </a:solidFill>
                 <a:latin typeface="Calibri"/>
               </a:rPr>
-              <a:t>ρ = xⱼᵀr₋ⱼ / n</a:t>
-            </a:r>
-          </a:p>
-        </p:txBody>
-      </p:sp>
-      <p:sp>
-        <p:nvSpPr>
-          <p:cNvPr id="8" name="Oval 7"/>
-          <p:cNvSpPr/>
-          <p:nvPr/>
-        </p:nvSpPr>
-        <p:spPr>
-          <a:xfrm>
-            <a:off x="4366260" y="2468880"/>
-            <a:ext cx="685800" cy="685800"/>
-          </a:xfrm>
-          <a:prstGeom prst="ellipse">
-            <a:avLst/>
-          </a:prstGeom>
-          <a:solidFill>
-            <a:srgbClr val="9B1B30"/>
-          </a:solidFill>
-          <a:ln>
-            <a:noFill/>
-          </a:ln>
-          <a:effectLst/>
-        </p:spPr>
-        <p:style>
-          <a:lnRef idx="1">
-            <a:schemeClr val="accent1"/>
-          </a:lnRef>
-          <a:fillRef idx="3">
-            <a:schemeClr val="accent1"/>
-          </a:fillRef>
-          <a:effectRef idx="2">
-            <a:schemeClr val="accent1"/>
-          </a:effectRef>
-          <a:fontRef idx="minor">
-            <a:schemeClr val="lt1"/>
-          </a:fontRef>
-        </p:style>
-        <p:txBody>
-          <a:bodyPr rtlCol="0" anchor="ctr" lIns="0" rIns="0" tIns="0" bIns="0"/>
-          <a:lstStyle/>
-          <a:p>
-            <a:pPr algn="ctr"/>
-            <a:r>
-              <a:rPr sz="2200" b="1">
-                <a:solidFill>
-                  <a:srgbClr val="FFFFFF"/>
-                </a:solidFill>
-                <a:latin typeface="Calibri"/>
-              </a:rPr>
-              <a:t>2</a:t>
-            </a:r>
-          </a:p>
-        </p:txBody>
-      </p:sp>
-      <p:sp>
-        <p:nvSpPr>
-          <p:cNvPr id="9" name="TextBox 8"/>
-          <p:cNvSpPr txBox="1"/>
-          <p:nvPr/>
-        </p:nvSpPr>
-        <p:spPr>
-          <a:xfrm>
-            <a:off x="3395472" y="3319272"/>
-            <a:ext cx="2627376" cy="594360"/>
-          </a:xfrm>
-          <a:prstGeom prst="rect">
-            <a:avLst/>
-          </a:prstGeom>
-          <a:noFill/>
-        </p:spPr>
-        <p:txBody>
-          <a:bodyPr wrap="square" anchor="t" lIns="0" rIns="0" tIns="0" bIns="0">
-            <a:spAutoFit/>
-          </a:bodyPr>
-          <a:lstStyle/>
-          <a:p>
-            <a:pPr algn="ctr"/>
-            <a:r>
-              <a:rPr sz="1500" b="1">
-                <a:solidFill>
-                  <a:srgbClr val="2D2D2D"/>
-                </a:solidFill>
-                <a:latin typeface="Calibri"/>
-              </a:rPr>
-              <a:t>Zona muerta</a:t>
-            </a:r>
-          </a:p>
-        </p:txBody>
-      </p:sp>
-      <p:sp>
-        <p:nvSpPr>
-          <p:cNvPr id="10" name="TextBox 9"/>
-          <p:cNvSpPr txBox="1"/>
-          <p:nvPr/>
-        </p:nvSpPr>
-        <p:spPr>
-          <a:xfrm>
-            <a:off x="3395472" y="3931920"/>
-            <a:ext cx="2627376" cy="1554480"/>
-          </a:xfrm>
-          <a:prstGeom prst="rect">
-            <a:avLst/>
-          </a:prstGeom>
-          <a:noFill/>
-        </p:spPr>
-        <p:txBody>
-          <a:bodyPr wrap="square" anchor="t" lIns="0" rIns="0" tIns="0" bIns="0">
-            <a:spAutoFit/>
-          </a:bodyPr>
-          <a:lstStyle/>
-          <a:p>
-            <a:pPr algn="ctr"/>
-            <a:r>
-              <a:rPr sz="1200" b="0">
-                <a:solidFill>
-                  <a:srgbClr val="6E6E6E"/>
-                </a:solidFill>
-                <a:latin typeface="Calibri"/>
-              </a:rPr>
-              <a:t>|ρ| ≤ λ ⇒ β = 0</a:t>
-            </a:r>
-          </a:p>
-        </p:txBody>
-      </p:sp>
-      <p:sp>
-        <p:nvSpPr>
-          <p:cNvPr id="11" name="Oval 10"/>
-          <p:cNvSpPr/>
-          <p:nvPr/>
-        </p:nvSpPr>
-        <p:spPr>
-          <a:xfrm>
-            <a:off x="7139940" y="2468880"/>
-            <a:ext cx="685800" cy="685800"/>
-          </a:xfrm>
-          <a:prstGeom prst="ellipse">
-            <a:avLst/>
-          </a:prstGeom>
-          <a:solidFill>
-            <a:srgbClr val="E4002B"/>
-          </a:solidFill>
-          <a:ln>
-            <a:noFill/>
-          </a:ln>
-          <a:effectLst/>
-        </p:spPr>
-        <p:style>
-          <a:lnRef idx="1">
-            <a:schemeClr val="accent1"/>
-          </a:lnRef>
-          <a:fillRef idx="3">
-            <a:schemeClr val="accent1"/>
-          </a:fillRef>
-          <a:effectRef idx="2">
-            <a:schemeClr val="accent1"/>
-          </a:effectRef>
-          <a:fontRef idx="minor">
-            <a:schemeClr val="lt1"/>
-          </a:fontRef>
-        </p:style>
-        <p:txBody>
-          <a:bodyPr rtlCol="0" anchor="ctr" lIns="0" rIns="0" tIns="0" bIns="0"/>
-          <a:lstStyle/>
-          <a:p>
-            <a:pPr algn="ctr"/>
-            <a:r>
-              <a:rPr sz="2200" b="1">
-                <a:solidFill>
-                  <a:srgbClr val="FFFFFF"/>
-                </a:solidFill>
-                <a:latin typeface="Calibri"/>
-              </a:rPr>
-              <a:t>3</a:t>
-            </a:r>
-          </a:p>
-        </p:txBody>
-      </p:sp>
-      <p:sp>
-        <p:nvSpPr>
-          <p:cNvPr id="12" name="TextBox 11"/>
-          <p:cNvSpPr txBox="1"/>
-          <p:nvPr/>
-        </p:nvSpPr>
-        <p:spPr>
-          <a:xfrm>
-            <a:off x="6169152" y="3319272"/>
-            <a:ext cx="2627376" cy="594360"/>
-          </a:xfrm>
-          <a:prstGeom prst="rect">
-            <a:avLst/>
-          </a:prstGeom>
-          <a:noFill/>
-        </p:spPr>
-        <p:txBody>
-          <a:bodyPr wrap="square" anchor="t" lIns="0" rIns="0" tIns="0" bIns="0">
-            <a:spAutoFit/>
-          </a:bodyPr>
-          <a:lstStyle/>
-          <a:p>
-            <a:pPr algn="ctr"/>
-            <a:r>
-              <a:rPr sz="1500" b="1">
-                <a:solidFill>
-                  <a:srgbClr val="2D2D2D"/>
-                </a:solidFill>
-                <a:latin typeface="Calibri"/>
-              </a:rPr>
-              <a:t>Restar λ</a:t>
-            </a:r>
-          </a:p>
-        </p:txBody>
-      </p:sp>
-      <p:sp>
-        <p:nvSpPr>
-          <p:cNvPr id="13" name="TextBox 12"/>
-          <p:cNvSpPr txBox="1"/>
-          <p:nvPr/>
-        </p:nvSpPr>
-        <p:spPr>
-          <a:xfrm>
-            <a:off x="6169152" y="3931920"/>
-            <a:ext cx="2627376" cy="1554480"/>
-          </a:xfrm>
-          <a:prstGeom prst="rect">
-            <a:avLst/>
-          </a:prstGeom>
-          <a:noFill/>
-        </p:spPr>
-        <p:txBody>
-          <a:bodyPr wrap="square" anchor="t" lIns="0" rIns="0" tIns="0" bIns="0">
-            <a:spAutoFit/>
-          </a:bodyPr>
-          <a:lstStyle/>
-          <a:p>
-            <a:pPr algn="ctr"/>
-            <a:r>
-              <a:rPr sz="1200" b="0">
-                <a:solidFill>
-                  <a:srgbClr val="6E6E6E"/>
-                </a:solidFill>
-                <a:latin typeface="Calibri"/>
-              </a:rPr>
-              <a:t>|ρ| &gt; λ ⇒ β = ρ ∓ λ</a:t>
-            </a:r>
-          </a:p>
-        </p:txBody>
-      </p:sp>
-      <p:sp>
-        <p:nvSpPr>
-          <p:cNvPr id="14" name="Oval 13"/>
-          <p:cNvSpPr/>
-          <p:nvPr/>
-        </p:nvSpPr>
-        <p:spPr>
-          <a:xfrm>
-            <a:off x="9913620" y="2468880"/>
-            <a:ext cx="685800" cy="685800"/>
-          </a:xfrm>
-          <a:prstGeom prst="ellipse">
-            <a:avLst/>
-          </a:prstGeom>
-          <a:solidFill>
-            <a:srgbClr val="9B1B30"/>
-          </a:solidFill>
-          <a:ln>
-            <a:noFill/>
-          </a:ln>
-          <a:effectLst/>
-        </p:spPr>
-        <p:style>
-          <a:lnRef idx="1">
-            <a:schemeClr val="accent1"/>
-          </a:lnRef>
-          <a:fillRef idx="3">
-            <a:schemeClr val="accent1"/>
-          </a:fillRef>
-          <a:effectRef idx="2">
-            <a:schemeClr val="accent1"/>
-          </a:effectRef>
-          <a:fontRef idx="minor">
-            <a:schemeClr val="lt1"/>
-          </a:fontRef>
-        </p:style>
-        <p:txBody>
-          <a:bodyPr rtlCol="0" anchor="ctr" lIns="0" rIns="0" tIns="0" bIns="0"/>
-          <a:lstStyle/>
-          <a:p>
-            <a:pPr algn="ctr"/>
-            <a:r>
-              <a:rPr sz="2200" b="1">
-                <a:solidFill>
-                  <a:srgbClr val="FFFFFF"/>
-                </a:solidFill>
-                <a:latin typeface="Calibri"/>
-              </a:rPr>
-              <a:t>4</a:t>
-            </a:r>
-          </a:p>
-        </p:txBody>
-      </p:sp>
-      <p:sp>
-        <p:nvSpPr>
-          <p:cNvPr id="15" name="TextBox 14"/>
-          <p:cNvSpPr txBox="1"/>
-          <p:nvPr/>
-        </p:nvSpPr>
-        <p:spPr>
-          <a:xfrm>
-            <a:off x="8942832" y="3319272"/>
-            <a:ext cx="2627376" cy="594360"/>
-          </a:xfrm>
-          <a:prstGeom prst="rect">
-            <a:avLst/>
-          </a:prstGeom>
-          <a:noFill/>
-        </p:spPr>
-        <p:txBody>
-          <a:bodyPr wrap="square" anchor="t" lIns="0" rIns="0" tIns="0" bIns="0">
-            <a:spAutoFit/>
-          </a:bodyPr>
-          <a:lstStyle/>
-          <a:p>
-            <a:pPr algn="ctr"/>
-            <a:r>
-              <a:rPr sz="1500" b="1">
-                <a:solidFill>
-                  <a:srgbClr val="2D2D2D"/>
-                </a:solidFill>
-                <a:latin typeface="Calibri"/>
-              </a:rPr>
-              <a:t>Resultado</a:t>
-            </a:r>
-          </a:p>
-        </p:txBody>
-      </p:sp>
-      <p:sp>
-        <p:nvSpPr>
-          <p:cNvPr id="16" name="TextBox 15"/>
-          <p:cNvSpPr txBox="1"/>
-          <p:nvPr/>
-        </p:nvSpPr>
-        <p:spPr>
-          <a:xfrm>
-            <a:off x="8942832" y="3931920"/>
-            <a:ext cx="2627376" cy="1554480"/>
-          </a:xfrm>
-          <a:prstGeom prst="rect">
-            <a:avLst/>
-          </a:prstGeom>
-          <a:noFill/>
-        </p:spPr>
-        <p:txBody>
-          <a:bodyPr wrap="square" anchor="t" lIns="0" rIns="0" tIns="0" bIns="0">
-            <a:spAutoFit/>
-          </a:bodyPr>
-          <a:lstStyle/>
-          <a:p>
-            <a:pPr algn="ctr"/>
-            <a:r>
-              <a:rPr sz="1200" b="0">
-                <a:solidFill>
-                  <a:srgbClr val="6E6E6E"/>
-                </a:solidFill>
-                <a:latin typeface="Calibri"/>
-              </a:rPr>
-              <a:t>S(ρ,λ) = sgn(ρ)·(|ρ|−λ)₊</a:t>
-            </a:r>
-          </a:p>
-        </p:txBody>
-      </p:sp>
-      <p:sp>
-        <p:nvSpPr>
-          <p:cNvPr id="17" name="Rounded Rectangle 16"/>
-          <p:cNvSpPr/>
-          <p:nvPr/>
-        </p:nvSpPr>
-        <p:spPr>
-          <a:xfrm>
-            <a:off x="548640" y="5074920"/>
-            <a:ext cx="11091672" cy="329184"/>
-          </a:xfrm>
-          <a:prstGeom prst="roundRect">
-            <a:avLst/>
-          </a:prstGeom>
-          <a:solidFill>
-            <a:srgbClr val="FCEDEE"/>
-          </a:solidFill>
-          <a:ln w="12700">
-            <a:solidFill>
-              <a:srgbClr val="E4002B"/>
-            </a:solidFill>
-          </a:ln>
-          <a:effectLst/>
-        </p:spPr>
-        <p:style>
-          <a:lnRef idx="1">
-            <a:schemeClr val="accent1"/>
-          </a:lnRef>
-          <a:fillRef idx="3">
-            <a:schemeClr val="accent1"/>
-          </a:fillRef>
-          <a:effectRef idx="2">
-            <a:schemeClr val="accent1"/>
-          </a:effectRef>
-          <a:fontRef idx="minor">
-            <a:schemeClr val="lt1"/>
-          </a:fontRef>
-        </p:style>
-        <p:txBody>
-          <a:bodyPr rtlCol="0" anchor="ctr"/>
-          <a:lstStyle/>
-          <a:p>
-            <a:pPr algn="ctr"/>
-          </a:p>
-        </p:txBody>
-      </p:sp>
-      <p:pic>
-        <p:nvPicPr>
-          <p:cNvPr id="18" name="Picture 17" descr="book-open__E4002B.png"/>
-          <p:cNvPicPr>
-            <a:picLocks noChangeAspect="1"/>
-          </p:cNvPicPr>
-          <p:nvPr/>
-        </p:nvPicPr>
-        <p:blipFill>
-          <a:blip r:embed="rId2"/>
-          <a:stretch>
-            <a:fillRect/>
-          </a:stretch>
-        </p:blipFill>
-        <p:spPr>
-          <a:xfrm>
-            <a:off x="694944" y="5129784"/>
-            <a:ext cx="219456" cy="219456"/>
-          </a:xfrm>
-          <a:prstGeom prst="rect">
-            <a:avLst/>
-          </a:prstGeom>
-        </p:spPr>
-      </p:pic>
-      <p:sp>
-        <p:nvSpPr>
-          <p:cNvPr id="19" name="TextBox 18"/>
-          <p:cNvSpPr txBox="1"/>
-          <p:nvPr/>
-        </p:nvSpPr>
-        <p:spPr>
-          <a:xfrm>
-            <a:off x="1005840" y="5106924"/>
-            <a:ext cx="10524744" cy="274320"/>
-          </a:xfrm>
-          <a:prstGeom prst="rect">
-            <a:avLst/>
-          </a:prstGeom>
-          <a:noFill/>
-        </p:spPr>
-        <p:txBody>
-          <a:bodyPr wrap="square" lIns="0" rIns="0" tIns="0" bIns="0">
-            <a:spAutoFit/>
-          </a:bodyPr>
-          <a:lstStyle/>
-          <a:p>
-            <a:pPr algn="l"/>
-            <a:r>
-              <a:rPr sz="1200" b="1">
-                <a:solidFill>
-                  <a:srgbClr val="9B1B30"/>
-                </a:solidFill>
-                <a:latin typeface="Calibri"/>
-              </a:rPr>
-              <a:t>En el paper:  Tibshirani (1996), JRSS-B 58(1), descenso por coordenadas (glmnet), comprobado manualmente contra sklearn en el cuaderno (celda 27)</a:t>
-            </a:r>
-            <a:r>
-              <a:rPr sz="1200" b="1">
-                <a:solidFill>
-                  <a:srgbClr val="2D2D2D"/>
-                </a:solidFill>
-                <a:latin typeface="Calibri"/>
-              </a:rPr>
-              <a:t/>
-            </a:r>
-          </a:p>
-        </p:txBody>
-      </p:sp>
-      <p:sp>
-        <p:nvSpPr>
-          <p:cNvPr id="20" name="Rounded Rectangle 19"/>
+              <a:t>notebook celda 101 (pipeline de negocio: escalado ajustado solo en train).</a:t>
+            </a:r>
+          </a:p>
+        </p:txBody>
+      </p:sp>
+      <p:sp>
+        <p:nvSpPr>
+          <p:cNvPr id="9" name="Rounded Rectangle 8"/>
           <p:cNvSpPr/>
           <p:nvPr/>
         </p:nvSpPr>
@@ -8124,14 +7751,14 @@
                 </a:solidFill>
                 <a:latin typeface="Calibri"/>
               </a:rPr>
-              <a:t>▶  Notebook, Sección 3, 🧮 + 🖐️ LASSO, celda 25</a:t>
-            </a:r>
-          </a:p>
-        </p:txBody>
-      </p:sp>
-      <p:sp>
-        <p:nvSpPr>
-          <p:cNvPr id="21" name="Oval 20"/>
+              <a:t>▶  Entregable, Communities and Crime</a:t>
+            </a:r>
+          </a:p>
+        </p:txBody>
+      </p:sp>
+      <p:sp>
+        <p:nvSpPr>
+          <p:cNvPr id="10" name="Oval 9"/>
           <p:cNvSpPr/>
           <p:nvPr/>
         </p:nvSpPr>
@@ -8175,7 +7802,7 @@
       </p:sp>
       <p:sp>
         <p:nvSpPr>
-          <p:cNvPr id="22" name="TextBox 21"/>
+          <p:cNvPr id="11" name="TextBox 10"/>
           <p:cNvSpPr txBox="1"/>
           <p:nvPr/>
         </p:nvSpPr>
@@ -8210,7 +7837,7 @@
       </p:sp>
       <p:sp>
         <p:nvSpPr>
-          <p:cNvPr id="23" name="TextBox 22"/>
+          <p:cNvPr id="12" name="TextBox 11"/>
           <p:cNvSpPr txBox="1"/>
           <p:nvPr/>
         </p:nvSpPr>
@@ -8238,7 +7865,7 @@
                 </a:solidFill>
                 <a:latin typeface="Calibri"/>
               </a:rPr>
-              <a:t>13 / 26</a:t>
+              <a:t>13 / 22</a:t>
             </a:r>
           </a:p>
         </p:txBody>
@@ -8257,7 +7884,7 @@
     <p:bg>
       <p:bgPr>
         <a:solidFill>
-          <a:srgbClr val="FFFFFF"/>
+          <a:srgbClr val="9B1B30"/>
         </a:solidFill>
         <a:effectLst/>
       </p:bgPr>
@@ -8271,14 +7898,67 @@
       <p:grpSpPr/>
       <p:sp>
         <p:nvSpPr>
-          <p:cNvPr id="2" name="TextBox 1"/>
+          <p:cNvPr id="2" name="Oval 1"/>
+          <p:cNvSpPr/>
+          <p:nvPr/>
+        </p:nvSpPr>
+        <p:spPr>
+          <a:xfrm>
+            <a:off x="914400" y="2103120"/>
+            <a:ext cx="2377440" cy="2377440"/>
+          </a:xfrm>
+          <a:prstGeom prst="ellipse">
+            <a:avLst/>
+          </a:prstGeom>
+          <a:solidFill>
+            <a:srgbClr val="FFFFFF"/>
+          </a:solidFill>
+          <a:ln>
+            <a:noFill/>
+          </a:ln>
+          <a:effectLst/>
+        </p:spPr>
+        <p:style>
+          <a:lnRef idx="1">
+            <a:schemeClr val="accent1"/>
+          </a:lnRef>
+          <a:fillRef idx="3">
+            <a:schemeClr val="accent1"/>
+          </a:fillRef>
+          <a:effectRef idx="2">
+            <a:schemeClr val="accent1"/>
+          </a:effectRef>
+          <a:fontRef idx="minor">
+            <a:schemeClr val="lt1"/>
+          </a:fontRef>
+        </p:style>
+        <p:txBody>
+          <a:bodyPr rtlCol="0" anchor="ctr" lIns="0" rIns="0" tIns="0" bIns="0"/>
+          <a:lstStyle/>
+          <a:p>
+            <a:pPr algn="ctr"/>
+            <a:r>
+              <a:rPr sz="10000" b="1">
+                <a:solidFill>
+                  <a:srgbClr val="9B1B30"/>
+                </a:solidFill>
+                <a:latin typeface="Calibri"/>
+              </a:rPr>
+              <a:t>3</a:t>
+            </a:r>
+          </a:p>
+        </p:txBody>
+      </p:sp>
+      <p:sp>
+        <p:nvSpPr>
+          <p:cNvPr id="3" name="TextBox 2"/>
           <p:cNvSpPr txBox="1"/>
           <p:nvPr/>
         </p:nvSpPr>
         <p:spPr>
           <a:xfrm>
-            <a:off x="548640" y="411480"/>
-            <a:ext cx="11094720" cy="292608"/>
+            <a:off x="3931920" y="2651760"/>
+            <a:ext cx="7589520" cy="1371600"/>
           </a:xfrm>
           <a:prstGeom prst="rect">
             <a:avLst/>
@@ -8293,27 +7973,27 @@
           <a:p>
             <a:pPr algn="l"/>
             <a:r>
-              <a:rPr sz="1300" b="1">
-                <a:solidFill>
-                  <a:srgbClr val="9B1B30"/>
-                </a:solidFill>
-                <a:latin typeface="Calibri"/>
-              </a:rPr>
-              <a:t>POR QUÉ EL LASSO SELECCIONA Y EL RIDGE NO — GEOMETRÍA L1 VS L2</a:t>
-            </a:r>
-          </a:p>
-        </p:txBody>
-      </p:sp>
-      <p:sp>
-        <p:nvSpPr>
-          <p:cNvPr id="3" name="TextBox 2"/>
+              <a:rPr sz="4000" b="1">
+                <a:solidFill>
+                  <a:srgbClr val="FFFFFF"/>
+                </a:solidFill>
+                <a:latin typeface="Calibri"/>
+              </a:rPr>
+              <a:t>Elegir con criterio</a:t>
+            </a:r>
+          </a:p>
+        </p:txBody>
+      </p:sp>
+      <p:sp>
+        <p:nvSpPr>
+          <p:cNvPr id="4" name="TextBox 3"/>
           <p:cNvSpPr txBox="1"/>
           <p:nvPr/>
         </p:nvSpPr>
         <p:spPr>
           <a:xfrm>
-            <a:off x="548640" y="731520"/>
-            <a:ext cx="11094720" cy="777240"/>
+            <a:off x="3931920" y="3977639"/>
+            <a:ext cx="7589520" cy="914400"/>
           </a:xfrm>
           <a:prstGeom prst="rect">
             <a:avLst/>
@@ -8328,20 +8008,20 @@
           <a:p>
             <a:pPr algn="l"/>
             <a:r>
-              <a:rPr sz="4000" b="1">
-                <a:solidFill>
-                  <a:srgbClr val="2D2D2D"/>
-                </a:solidFill>
-                <a:latin typeface="Calibri"/>
-              </a:rPr>
-              <a:t>El rombo del LASSO anula variables</a:t>
+              <a:rPr sz="1700" b="0">
+                <a:solidFill>
+                  <a:srgbClr val="FCEDEE"/>
+                </a:solidFill>
+                <a:latin typeface="Calibri"/>
+              </a:rPr>
+              <a:t>λ por validación cruzada, Elastic Net y alta dimensión</a:t>
             </a:r>
           </a:p>
         </p:txBody>
       </p:sp>
       <p:pic>
         <p:nvPicPr>
-          <p:cNvPr id="4" name="Picture 3" descr="deck_geometria_L1_L2.png"/>
+          <p:cNvPr id="5" name="Picture 4" descr="target__FFFFFF.png"/>
           <p:cNvPicPr>
             <a:picLocks noChangeAspect="1"/>
           </p:cNvPicPr>
@@ -8355,218 +8035,14 @@
         </p:blipFill>
         <p:spPr>
           <a:xfrm>
-            <a:off x="1280160" y="1783080"/>
-            <a:ext cx="8702166" cy="4206240"/>
+            <a:off x="10195560" y="640080"/>
+            <a:ext cx="1051560" cy="1051560"/>
           </a:xfrm>
           <a:prstGeom prst="rect">
             <a:avLst/>
           </a:prstGeom>
         </p:spPr>
       </p:pic>
-      <p:sp>
-        <p:nvSpPr>
-          <p:cNvPr id="5" name="TextBox 4"/>
-          <p:cNvSpPr txBox="1"/>
-          <p:nvPr/>
-        </p:nvSpPr>
-        <p:spPr>
-          <a:xfrm>
-            <a:off x="548640" y="5961888"/>
-            <a:ext cx="11094720" cy="292608"/>
-          </a:xfrm>
-          <a:prstGeom prst="rect">
-            <a:avLst/>
-          </a:prstGeom>
-          <a:noFill/>
-        </p:spPr>
-        <p:txBody>
-          <a:bodyPr wrap="square" anchor="t" lIns="0" rIns="0" tIns="0" bIns="0">
-            <a:spAutoFit/>
-          </a:bodyPr>
-          <a:lstStyle/>
-          <a:p>
-            <a:pPr algn="l"/>
-            <a:r>
-              <a:rPr sz="1100" b="0">
-                <a:solidFill>
-                  <a:srgbClr val="6E6E6E"/>
-                </a:solidFill>
-                <a:latin typeface="Calibri"/>
-              </a:rPr>
-              <a:t>figuras/S05_fig_geometria_L1_L2.png (venv, cálculo directo). Fuente: ISLR Sección 6.2.2 y Figura 6.7; ESL Sección 3.4.2-3.4.3.</a:t>
-            </a:r>
-          </a:p>
-        </p:txBody>
-      </p:sp>
-      <p:sp>
-        <p:nvSpPr>
-          <p:cNvPr id="6" name="Rounded Rectangle 5"/>
-          <p:cNvSpPr/>
-          <p:nvPr/>
-        </p:nvSpPr>
-        <p:spPr>
-          <a:xfrm>
-            <a:off x="8458200" y="301752"/>
-            <a:ext cx="3200400" cy="402336"/>
-          </a:xfrm>
-          <a:prstGeom prst="roundRect">
-            <a:avLst/>
-          </a:prstGeom>
-          <a:solidFill>
-            <a:srgbClr val="FCEDEE"/>
-          </a:solidFill>
-          <a:ln w="15875">
-            <a:solidFill>
-              <a:srgbClr val="E4002B"/>
-            </a:solidFill>
-          </a:ln>
-          <a:effectLst/>
-        </p:spPr>
-        <p:style>
-          <a:lnRef idx="1">
-            <a:schemeClr val="accent1"/>
-          </a:lnRef>
-          <a:fillRef idx="3">
-            <a:schemeClr val="accent1"/>
-          </a:fillRef>
-          <a:effectRef idx="2">
-            <a:schemeClr val="accent1"/>
-          </a:effectRef>
-          <a:fontRef idx="minor">
-            <a:schemeClr val="lt1"/>
-          </a:fontRef>
-        </p:style>
-        <p:txBody>
-          <a:bodyPr rtlCol="0" anchor="ctr" lIns="54864" rIns="54864" tIns="0" bIns="0"/>
-          <a:lstStyle/>
-          <a:p>
-            <a:pPr algn="ctr"/>
-            <a:r>
-              <a:rPr sz="1300" b="1">
-                <a:solidFill>
-                  <a:srgbClr val="9B1B30"/>
-                </a:solidFill>
-                <a:latin typeface="Calibri"/>
-              </a:rPr>
-              <a:t>▶  Notebook, Sección 6.2, celda 124</a:t>
-            </a:r>
-          </a:p>
-        </p:txBody>
-      </p:sp>
-      <p:sp>
-        <p:nvSpPr>
-          <p:cNvPr id="7" name="Oval 6"/>
-          <p:cNvSpPr/>
-          <p:nvPr/>
-        </p:nvSpPr>
-        <p:spPr>
-          <a:xfrm>
-            <a:off x="548640" y="6473952"/>
-            <a:ext cx="100584" cy="100584"/>
-          </a:xfrm>
-          <a:prstGeom prst="ellipse">
-            <a:avLst/>
-          </a:prstGeom>
-          <a:solidFill>
-            <a:srgbClr val="E4002B"/>
-          </a:solidFill>
-          <a:ln>
-            <a:noFill/>
-          </a:ln>
-          <a:effectLst/>
-        </p:spPr>
-        <p:style>
-          <a:lnRef idx="1">
-            <a:schemeClr val="accent1"/>
-          </a:lnRef>
-          <a:fillRef idx="3">
-            <a:schemeClr val="accent1"/>
-          </a:fillRef>
-          <a:effectRef idx="2">
-            <a:schemeClr val="accent1"/>
-          </a:effectRef>
-          <a:fontRef idx="minor">
-            <a:schemeClr val="lt1"/>
-          </a:fontRef>
-        </p:style>
-        <p:txBody>
-          <a:bodyPr rtlCol="0" anchor="ctr"/>
-          <a:lstStyle/>
-          <a:p>
-            <a:pPr algn="ctr"/>
-          </a:p>
-        </p:txBody>
-      </p:sp>
-      <p:sp>
-        <p:nvSpPr>
-          <p:cNvPr id="8" name="TextBox 7"/>
-          <p:cNvSpPr txBox="1"/>
-          <p:nvPr/>
-        </p:nvSpPr>
-        <p:spPr>
-          <a:xfrm>
-            <a:off x="749808" y="6437376"/>
-            <a:ext cx="7772400" cy="274320"/>
-          </a:xfrm>
-          <a:prstGeom prst="rect">
-            <a:avLst/>
-          </a:prstGeom>
-          <a:noFill/>
-        </p:spPr>
-        <p:txBody>
-          <a:bodyPr wrap="square" anchor="t" lIns="0" rIns="0" tIns="0" bIns="0">
-            <a:spAutoFit/>
-          </a:bodyPr>
-          <a:lstStyle/>
-          <a:p>
-            <a:pPr algn="l"/>
-            <a:r>
-              <a:rPr sz="900" b="0">
-                <a:solidFill>
-                  <a:srgbClr val="6E6E6E"/>
-                </a:solidFill>
-                <a:latin typeface="Calibri"/>
-              </a:rPr>
-              <a:t>S05 — Herramientas para la Ciencia de Datos, UPC</a:t>
-            </a:r>
-          </a:p>
-        </p:txBody>
-      </p:sp>
-      <p:sp>
-        <p:nvSpPr>
-          <p:cNvPr id="9" name="TextBox 8"/>
-          <p:cNvSpPr txBox="1"/>
-          <p:nvPr/>
-        </p:nvSpPr>
-        <p:spPr>
-          <a:xfrm>
-            <a:off x="10180320" y="6437376"/>
-            <a:ext cx="1463040" cy="274320"/>
-          </a:xfrm>
-          <a:prstGeom prst="rect">
-            <a:avLst/>
-          </a:prstGeom>
-          <a:noFill/>
-        </p:spPr>
-        <p:txBody>
-          <a:bodyPr wrap="square" anchor="t" lIns="0" rIns="0" tIns="0" bIns="0">
-            <a:spAutoFit/>
-          </a:bodyPr>
-          <a:lstStyle/>
-          <a:p>
-            <a:pPr algn="r"/>
-            <a:r>
-              <a:rPr sz="900" b="0">
-                <a:solidFill>
-                  <a:srgbClr val="6E6E6E"/>
-                </a:solidFill>
-                <a:latin typeface="Calibri"/>
-              </a:rPr>
-              <a:t>14 / 26</a:t>
-            </a:r>
-          </a:p>
-        </p:txBody>
-      </p:sp>
     </p:spTree>
   </p:cSld>
   <p:clrMapOvr>
@@ -8623,7 +8099,7 @@
                 </a:solidFill>
                 <a:latin typeface="Calibri"/>
               </a:rPr>
-              <a:t>ASÍ SE HACE — EL ERROR OPERATIVO NÚMERO UNO</a:t>
+              <a:t>ASÍ SE HACE — ELEGIR Λ POR VALIDACIÓN CRUZADA</a:t>
             </a:r>
           </a:p>
         </p:txBody>
@@ -8658,7 +8134,7 @@
                 </a:solidFill>
                 <a:latin typeface="Calibri"/>
               </a:rPr>
-              <a:t>Estandarizar es obligatorio antes de regularizar</a:t>
+              <a:t>La validación cruzada, no la intuición, elige la fuerza λ</a:t>
             </a:r>
           </a:p>
         </p:txBody>
@@ -8692,7 +8168,7 @@
                 </a:solidFill>
                 <a:latin typeface="Calibri"/>
               </a:rPr>
-              <a:t>▸ Qué hace:  sin escalar, la penalización depende de las unidades y la selección se vuelve arbitraria.</a:t>
+              <a:t>▸ Qué hace:  </a:t>
             </a:r>
             <a:r>
               <a:rPr sz="1400">
@@ -8701,7 +8177,7 @@
                 </a:solidFill>
                 <a:latin typeface="Calibri"/>
               </a:rPr>
-              <a:t/>
+              <a:t>prueba valores de λ por validación cruzada con los pliegues barajados y elige el de menor error.</a:t>
             </a:r>
           </a:p>
         </p:txBody>
@@ -8715,7 +8191,7 @@
         <p:spPr>
           <a:xfrm>
             <a:off x="548640" y="2395728"/>
-            <a:ext cx="11094720" cy="1517904"/>
+            <a:ext cx="11094720" cy="1883664"/>
           </a:xfrm>
           <a:prstGeom prst="roundRect">
             <a:avLst/>
@@ -8795,7 +8271,7 @@
         <p:spPr>
           <a:xfrm>
             <a:off x="859536" y="2926080"/>
-            <a:ext cx="10472928" cy="914400"/>
+            <a:ext cx="10472928" cy="1280160"/>
           </a:xfrm>
           <a:prstGeom prst="rect">
             <a:avLst/>
@@ -8823,7 +8299,7 @@
                 </a:solidFill>
                 <a:latin typeface="Consolas"/>
               </a:rPr>
-              <a:t>pipe = Pipeline([("escala", StandardScaler()), ("modelo", modelo)]).fit(Xtr, ytr)</a:t>
+              <a:t>cv_barajada = KFold(n_splits=10, shuffle=True, random_state=42)   # &lt;- shuffle, no cv=10</a:t>
             </a:r>
           </a:p>
           <a:p>
@@ -8842,7 +8318,26 @@
                 </a:solidFill>
                 <a:latin typeface="Consolas"/>
               </a:rPr>
-              <a:t># el escalador aprende media/sigma SOLO del train -&gt; sin fuga</a:t>
+              <a:t>lasso_cv = LassoCV(cv=cv_barajada, max_iter=200000).fit(X_train_s, y_train)</a:t>
+            </a:r>
+          </a:p>
+          <a:p>
+            <a:pPr>
+              <a:lnSpc>
+                <a:spcPct val="130000"/>
+              </a:lnSpc>
+              <a:spcAft>
+                <a:spcPts val="400"/>
+              </a:spcAft>
+            </a:pPr>
+            <a:r>
+              <a:rPr sz="1200">
+                <a:solidFill>
+                  <a:srgbClr val="2D2D2D"/>
+                </a:solidFill>
+                <a:latin typeface="Consolas"/>
+              </a:rPr>
+              <a:t># λ_min (desempeño) vs λ_1se (parsimonia); la réplica ESL fija el λ del borde ralo</a:t>
             </a:r>
           </a:p>
         </p:txBody>
@@ -8877,7 +8372,7 @@
                 </a:solidFill>
                 <a:latin typeface="Calibri"/>
               </a:rPr>
-              <a:t>notebook celda 101 (pipeline de negocio: escalado ajustado solo en train).</a:t>
+              <a:t>notebook celda 72 (Paso 5, λ_min y λ_1se con pliegues barajados) y celda 78 (Paso 5b, λ operativo 0,2203). Fuente: DEFINICIONES Secciones 8 y 10; ISLR Sección 6.2.3; sklearn LassoCV.</a:t>
             </a:r>
           </a:p>
         </p:txBody>
@@ -8932,7 +8427,7 @@
                 </a:solidFill>
                 <a:latin typeface="Calibri"/>
               </a:rPr>
-              <a:t>▶  Notebook, Sección 5, Paso 2, celda 101</a:t>
+              <a:t>▶  Notebook, Sección 4, Paso 5, celda 72</a:t>
             </a:r>
           </a:p>
         </p:txBody>
@@ -9046,7 +8541,7 @@
                 </a:solidFill>
                 <a:latin typeface="Calibri"/>
               </a:rPr>
-              <a:t>15 / 26</a:t>
+              <a:t>15 / 22</a:t>
             </a:r>
           </a:p>
         </p:txBody>
@@ -9737,7 +9232,7 @@
                 </a:solidFill>
                 <a:latin typeface="Calibri"/>
               </a:rPr>
-              <a:t>16 / 26</a:t>
+              <a:t>16 / 22</a:t>
             </a:r>
           </a:p>
         </p:txBody>
@@ -9756,7 +9251,7 @@
     <p:bg>
       <p:bgPr>
         <a:solidFill>
-          <a:srgbClr val="9B1B30"/>
+          <a:srgbClr val="2D2D2D"/>
         </a:solidFill>
         <a:effectLst/>
       </p:bgPr>
@@ -9776,14 +9271,14 @@
         </p:nvSpPr>
         <p:spPr>
           <a:xfrm>
-            <a:off x="914400" y="2103120"/>
-            <a:ext cx="2377440" cy="2377440"/>
+            <a:off x="5638800" y="914400"/>
+            <a:ext cx="914400" cy="914400"/>
           </a:xfrm>
           <a:prstGeom prst="ellipse">
             <a:avLst/>
           </a:prstGeom>
           <a:solidFill>
-            <a:srgbClr val="FFFFFF"/>
+            <a:srgbClr val="E4002B"/>
           </a:solidFill>
           <a:ln>
             <a:noFill/>
@@ -9810,13 +9305,13 @@
           <a:p>
             <a:pPr algn="ctr"/>
             <a:r>
-              <a:rPr sz="10000" b="1">
-                <a:solidFill>
-                  <a:srgbClr val="9B1B30"/>
-                </a:solidFill>
-                <a:latin typeface="Calibri"/>
-              </a:rPr>
-              <a:t>4</a:t>
+              <a:rPr sz="4800" b="1">
+                <a:solidFill>
+                  <a:srgbClr val="FFFFFF"/>
+                </a:solidFill>
+                <a:latin typeface="Calibri"/>
+              </a:rPr>
+              <a:t>“</a:t>
             </a:r>
           </a:p>
         </p:txBody>
@@ -9829,8 +9324,8 @@
         </p:nvSpPr>
         <p:spPr>
           <a:xfrm>
-            <a:off x="3931920" y="2651760"/>
-            <a:ext cx="7589520" cy="1371600"/>
+            <a:off x="1645920" y="2377440"/>
+            <a:ext cx="8900160" cy="2377440"/>
           </a:xfrm>
           <a:prstGeom prst="rect">
             <a:avLst/>
@@ -9843,15 +9338,19 @@
           </a:bodyPr>
           <a:lstStyle/>
           <a:p>
-            <a:pPr algn="l"/>
-            <a:r>
-              <a:rPr sz="4000" b="1">
+            <a:pPr algn="ctr">
+              <a:lnSpc>
+                <a:spcPct val="125000"/>
+              </a:lnSpc>
+            </a:pPr>
+            <a:r>
+              <a:rPr sz="2600" b="0">
                 <a:solidFill>
                   <a:srgbClr val="FFFFFF"/>
                 </a:solidFill>
                 <a:latin typeface="Calibri"/>
               </a:rPr>
-              <a:t>¿Cómo se determina la intensidad de la penalización?</a:t>
+              <a:t>El «lasso» minimiza la suma de cuadrados de los residuales sujeta a que la suma de los valores absolutos de los coeficientes sea menor que una constante. Por la naturaleza de esa restricción, tiende a producir algunos coeficientes exactamente iguales a 0 y, por tanto, entrega modelos interpretables.</a:t>
             </a:r>
           </a:p>
         </p:txBody>
@@ -9864,8 +9363,8 @@
         </p:nvSpPr>
         <p:spPr>
           <a:xfrm>
-            <a:off x="3931920" y="3977639"/>
-            <a:ext cx="7589520" cy="914400"/>
+            <a:off x="1645920" y="5120640"/>
+            <a:ext cx="8900160" cy="548640"/>
           </a:xfrm>
           <a:prstGeom prst="rect">
             <a:avLst/>
@@ -9878,15 +9377,15 @@
           </a:bodyPr>
           <a:lstStyle/>
           <a:p>
-            <a:pPr algn="l"/>
-            <a:r>
-              <a:rPr sz="1700" b="0">
+            <a:pPr algn="ctr"/>
+            <a:r>
+              <a:rPr sz="1500" b="0">
                 <a:solidFill>
                   <a:srgbClr val="FCEDEE"/>
                 </a:solidFill>
                 <a:latin typeface="Calibri"/>
               </a:rPr>
-              <a:t>Capítulo 5.4 — jueves, bloques A1 y A2</a:t>
+              <a:t>— Robert Tibshirani, 1996 — resumen del artículo (p. 267)</a:t>
             </a:r>
           </a:p>
         </p:txBody>
@@ -9905,7 +9404,7 @@
     <p:bg>
       <p:bgPr>
         <a:solidFill>
-          <a:srgbClr val="9B1B30"/>
+          <a:srgbClr val="FFFFFF"/>
         </a:solidFill>
         <a:effectLst/>
       </p:bgPr>
@@ -9919,20 +9418,90 @@
       <p:grpSpPr/>
       <p:sp>
         <p:nvSpPr>
-          <p:cNvPr id="2" name="Oval 1"/>
+          <p:cNvPr id="2" name="TextBox 1"/>
+          <p:cNvSpPr txBox="1"/>
+          <p:nvPr/>
+        </p:nvSpPr>
+        <p:spPr>
+          <a:xfrm>
+            <a:off x="548640" y="411480"/>
+            <a:ext cx="11094720" cy="292608"/>
+          </a:xfrm>
+          <a:prstGeom prst="rect">
+            <a:avLst/>
+          </a:prstGeom>
+          <a:noFill/>
+        </p:spPr>
+        <p:txBody>
+          <a:bodyPr wrap="square" anchor="t" lIns="0" rIns="0" tIns="0" bIns="0">
+            <a:spAutoFit/>
+          </a:bodyPr>
+          <a:lstStyle/>
+          <a:p>
+            <a:pPr algn="l"/>
+            <a:r>
+              <a:rPr sz="1300" b="1">
+                <a:solidFill>
+                  <a:srgbClr val="9B1B30"/>
+                </a:solidFill>
+                <a:latin typeface="Calibri"/>
+              </a:rPr>
+              <a:t>QUÉ PREGUNTABA EL PAPER Y POR QUÉ USÓ LO QUE USÓ</a:t>
+            </a:r>
+          </a:p>
+        </p:txBody>
+      </p:sp>
+      <p:sp>
+        <p:nvSpPr>
+          <p:cNvPr id="3" name="TextBox 2"/>
+          <p:cNvSpPr txBox="1"/>
+          <p:nvPr/>
+        </p:nvSpPr>
+        <p:spPr>
+          <a:xfrm>
+            <a:off x="548640" y="731520"/>
+            <a:ext cx="11094720" cy="777240"/>
+          </a:xfrm>
+          <a:prstGeom prst="rect">
+            <a:avLst/>
+          </a:prstGeom>
+          <a:noFill/>
+        </p:spPr>
+        <p:txBody>
+          <a:bodyPr wrap="square" anchor="t" lIns="0" rIns="0" tIns="0" bIns="0">
+            <a:spAutoFit/>
+          </a:bodyPr>
+          <a:lstStyle/>
+          <a:p>
+            <a:pPr algn="l"/>
+            <a:r>
+              <a:rPr sz="4000" b="1">
+                <a:solidFill>
+                  <a:srgbClr val="2D2D2D"/>
+                </a:solidFill>
+                <a:latin typeface="Calibri"/>
+              </a:rPr>
+              <a:t>Ninguna alternativa de 1996 respondía las dos mitades</a:t>
+            </a:r>
+          </a:p>
+        </p:txBody>
+      </p:sp>
+      <p:sp>
+        <p:nvSpPr>
+          <p:cNvPr id="4" name="Rounded Rectangle 3"/>
           <p:cNvSpPr/>
           <p:nvPr/>
         </p:nvSpPr>
         <p:spPr>
           <a:xfrm>
-            <a:off x="914400" y="2103120"/>
-            <a:ext cx="2377440" cy="2377440"/>
-          </a:xfrm>
-          <a:prstGeom prst="ellipse">
+            <a:off x="548640" y="1874519"/>
+            <a:ext cx="3454400" cy="4114800"/>
+          </a:xfrm>
+          <a:prstGeom prst="roundRect">
             <a:avLst/>
           </a:prstGeom>
           <a:solidFill>
-            <a:srgbClr val="FFFFFF"/>
+            <a:srgbClr val="FCEDEE"/>
           </a:solidFill>
           <a:ln>
             <a:noFill/>
@@ -9954,32 +9523,76 @@
           </a:fontRef>
         </p:style>
         <p:txBody>
+          <a:bodyPr rtlCol="0" anchor="ctr"/>
+          <a:lstStyle/>
+          <a:p>
+            <a:pPr algn="ctr"/>
+          </a:p>
+        </p:txBody>
+      </p:sp>
+      <p:sp>
+        <p:nvSpPr>
+          <p:cNvPr id="5" name="Oval 4"/>
+          <p:cNvSpPr/>
+          <p:nvPr/>
+        </p:nvSpPr>
+        <p:spPr>
+          <a:xfrm>
+            <a:off x="777240" y="2103119"/>
+            <a:ext cx="640080" cy="640080"/>
+          </a:xfrm>
+          <a:prstGeom prst="ellipse">
+            <a:avLst/>
+          </a:prstGeom>
+          <a:solidFill>
+            <a:srgbClr val="E4002B"/>
+          </a:solidFill>
+          <a:ln>
+            <a:noFill/>
+          </a:ln>
+          <a:effectLst/>
+        </p:spPr>
+        <p:style>
+          <a:lnRef idx="1">
+            <a:schemeClr val="accent1"/>
+          </a:lnRef>
+          <a:fillRef idx="3">
+            <a:schemeClr val="accent1"/>
+          </a:fillRef>
+          <a:effectRef idx="2">
+            <a:schemeClr val="accent1"/>
+          </a:effectRef>
+          <a:fontRef idx="minor">
+            <a:schemeClr val="lt1"/>
+          </a:fontRef>
+        </p:style>
+        <p:txBody>
           <a:bodyPr rtlCol="0" anchor="ctr" lIns="0" rIns="0" tIns="0" bIns="0"/>
           <a:lstStyle/>
           <a:p>
             <a:pPr algn="ctr"/>
             <a:r>
-              <a:rPr sz="10000" b="1">
-                <a:solidFill>
-                  <a:srgbClr val="9B1B30"/>
-                </a:solidFill>
-                <a:latin typeface="Calibri"/>
-              </a:rPr>
-              <a:t>4</a:t>
-            </a:r>
-          </a:p>
-        </p:txBody>
-      </p:sp>
-      <p:sp>
-        <p:nvSpPr>
-          <p:cNvPr id="3" name="TextBox 2"/>
+              <a:rPr sz="2000" b="1">
+                <a:solidFill>
+                  <a:srgbClr val="FFFFFF"/>
+                </a:solidFill>
+                <a:latin typeface="Calibri"/>
+              </a:rPr>
+              <a:t>1</a:t>
+            </a:r>
+          </a:p>
+        </p:txBody>
+      </p:sp>
+      <p:sp>
+        <p:nvSpPr>
+          <p:cNvPr id="6" name="TextBox 5"/>
           <p:cNvSpPr txBox="1"/>
           <p:nvPr/>
         </p:nvSpPr>
         <p:spPr>
           <a:xfrm>
-            <a:off x="3931920" y="2651760"/>
-            <a:ext cx="7589520" cy="1371600"/>
+            <a:off x="777240" y="2926079"/>
+            <a:ext cx="2997200" cy="640080"/>
           </a:xfrm>
           <a:prstGeom prst="rect">
             <a:avLst/>
@@ -9994,27 +9607,27 @@
           <a:p>
             <a:pPr algn="l"/>
             <a:r>
-              <a:rPr sz="4000" b="1">
-                <a:solidFill>
-                  <a:srgbClr val="FFFFFF"/>
-                </a:solidFill>
-                <a:latin typeface="Calibri"/>
-              </a:rPr>
-              <a:t>¿Cómo se determina la intensidad de la penalización?</a:t>
-            </a:r>
-          </a:p>
-        </p:txBody>
-      </p:sp>
-      <p:sp>
-        <p:nvSpPr>
-          <p:cNvPr id="4" name="TextBox 3"/>
+              <a:rPr sz="1800" b="1">
+                <a:solidFill>
+                  <a:srgbClr val="9B1B30"/>
+                </a:solidFill>
+                <a:latin typeface="Calibri"/>
+              </a:rPr>
+              <a:t>Por qué no los subconjuntos</a:t>
+            </a:r>
+          </a:p>
+        </p:txBody>
+      </p:sp>
+      <p:sp>
+        <p:nvSpPr>
+          <p:cNvPr id="7" name="TextBox 6"/>
           <p:cNvSpPr txBox="1"/>
           <p:nvPr/>
         </p:nvSpPr>
         <p:spPr>
           <a:xfrm>
-            <a:off x="3931920" y="3977639"/>
-            <a:ext cx="7589520" cy="914400"/>
+            <a:off x="777240" y="3611879"/>
+            <a:ext cx="2997200" cy="1645920"/>
           </a:xfrm>
           <a:prstGeom prst="rect">
             <a:avLst/>
@@ -10027,43 +9640,618 @@
           </a:bodyPr>
           <a:lstStyle/>
           <a:p>
+            <a:pPr algn="l">
+              <a:lnSpc>
+                <a:spcPct val="115000"/>
+              </a:lnSpc>
+            </a:pPr>
+            <a:r>
+              <a:rPr sz="1300" b="0">
+                <a:solidFill>
+                  <a:srgbClr val="2D2D2D"/>
+                </a:solidFill>
+                <a:latin typeface="Calibri"/>
+              </a:rPr>
+              <a:t>Proceso DISCRETO: cada regresor se retiene o se descarta. Cambios pequeños en los datos producen modelos muy distintos.</a:t>
+            </a:r>
+          </a:p>
+        </p:txBody>
+      </p:sp>
+      <p:sp>
+        <p:nvSpPr>
+          <p:cNvPr id="8" name="TextBox 7"/>
+          <p:cNvSpPr txBox="1"/>
+          <p:nvPr/>
+        </p:nvSpPr>
+        <p:spPr>
+          <a:xfrm>
+            <a:off x="777240" y="5303519"/>
+            <a:ext cx="2997200" cy="502920"/>
+          </a:xfrm>
+          <a:prstGeom prst="rect">
+            <a:avLst/>
+          </a:prstGeom>
+          <a:noFill/>
+        </p:spPr>
+        <p:txBody>
+          <a:bodyPr wrap="square" anchor="t" lIns="0" rIns="0" tIns="0" bIns="0">
+            <a:spAutoFit/>
+          </a:bodyPr>
+          <a:lstStyle/>
+          <a:p>
             <a:pPr algn="l"/>
             <a:r>
-              <a:rPr sz="1700" b="0">
-                <a:solidFill>
-                  <a:srgbClr val="FCEDEE"/>
-                </a:solidFill>
-                <a:latin typeface="Calibri"/>
-              </a:rPr>
-              <a:t>¿Cómo se determina la intensidad de la penalización?</a:t>
-            </a:r>
-          </a:p>
-        </p:txBody>
-      </p:sp>
-      <p:pic>
-        <p:nvPicPr>
-          <p:cNvPr id="5" name="Picture 4" descr="target__FFFFFF.png"/>
-          <p:cNvPicPr>
-            <a:picLocks noChangeAspect="1"/>
-          </p:cNvPicPr>
-          <p:nvPr/>
-        </p:nvPicPr>
-        <p:blipFill>
-          <a:blip r:embed="rId2"/>
-          <a:stretch>
-            <a:fillRect/>
-          </a:stretch>
-        </p:blipFill>
-        <p:spPr>
-          <a:xfrm>
-            <a:off x="10195560" y="640080"/>
-            <a:ext cx="1051560" cy="1051560"/>
-          </a:xfrm>
-          <a:prstGeom prst="rect">
-            <a:avLst/>
-          </a:prstGeom>
-        </p:spPr>
-      </p:pic>
+              <a:rPr sz="1200" b="1">
+                <a:solidFill>
+                  <a:srgbClr val="9B1B30"/>
+                </a:solidFill>
+                <a:latin typeface="Calibri"/>
+              </a:rPr>
+              <a:t>Legible, pero de varianza alta</a:t>
+            </a:r>
+          </a:p>
+        </p:txBody>
+      </p:sp>
+      <p:sp>
+        <p:nvSpPr>
+          <p:cNvPr id="9" name="Rounded Rectangle 8"/>
+          <p:cNvSpPr/>
+          <p:nvPr/>
+        </p:nvSpPr>
+        <p:spPr>
+          <a:xfrm>
+            <a:off x="4368800" y="1874519"/>
+            <a:ext cx="3454400" cy="4114800"/>
+          </a:xfrm>
+          <a:prstGeom prst="roundRect">
+            <a:avLst/>
+          </a:prstGeom>
+          <a:solidFill>
+            <a:srgbClr val="FCEDEE"/>
+          </a:solidFill>
+          <a:ln>
+            <a:noFill/>
+          </a:ln>
+          <a:effectLst/>
+        </p:spPr>
+        <p:style>
+          <a:lnRef idx="1">
+            <a:schemeClr val="accent1"/>
+          </a:lnRef>
+          <a:fillRef idx="3">
+            <a:schemeClr val="accent1"/>
+          </a:fillRef>
+          <a:effectRef idx="2">
+            <a:schemeClr val="accent1"/>
+          </a:effectRef>
+          <a:fontRef idx="minor">
+            <a:schemeClr val="lt1"/>
+          </a:fontRef>
+        </p:style>
+        <p:txBody>
+          <a:bodyPr rtlCol="0" anchor="ctr"/>
+          <a:lstStyle/>
+          <a:p>
+            <a:pPr algn="ctr"/>
+          </a:p>
+        </p:txBody>
+      </p:sp>
+      <p:sp>
+        <p:nvSpPr>
+          <p:cNvPr id="10" name="Oval 9"/>
+          <p:cNvSpPr/>
+          <p:nvPr/>
+        </p:nvSpPr>
+        <p:spPr>
+          <a:xfrm>
+            <a:off x="4597400" y="2103119"/>
+            <a:ext cx="640080" cy="640080"/>
+          </a:xfrm>
+          <a:prstGeom prst="ellipse">
+            <a:avLst/>
+          </a:prstGeom>
+          <a:solidFill>
+            <a:srgbClr val="E4002B"/>
+          </a:solidFill>
+          <a:ln>
+            <a:noFill/>
+          </a:ln>
+          <a:effectLst/>
+        </p:spPr>
+        <p:style>
+          <a:lnRef idx="1">
+            <a:schemeClr val="accent1"/>
+          </a:lnRef>
+          <a:fillRef idx="3">
+            <a:schemeClr val="accent1"/>
+          </a:fillRef>
+          <a:effectRef idx="2">
+            <a:schemeClr val="accent1"/>
+          </a:effectRef>
+          <a:fontRef idx="minor">
+            <a:schemeClr val="lt1"/>
+          </a:fontRef>
+        </p:style>
+        <p:txBody>
+          <a:bodyPr rtlCol="0" anchor="ctr" lIns="0" rIns="0" tIns="0" bIns="0"/>
+          <a:lstStyle/>
+          <a:p>
+            <a:pPr algn="ctr"/>
+            <a:r>
+              <a:rPr sz="2000" b="1">
+                <a:solidFill>
+                  <a:srgbClr val="FFFFFF"/>
+                </a:solidFill>
+                <a:latin typeface="Calibri"/>
+              </a:rPr>
+              <a:t>2</a:t>
+            </a:r>
+          </a:p>
+        </p:txBody>
+      </p:sp>
+      <p:sp>
+        <p:nvSpPr>
+          <p:cNvPr id="11" name="TextBox 10"/>
+          <p:cNvSpPr txBox="1"/>
+          <p:nvPr/>
+        </p:nvSpPr>
+        <p:spPr>
+          <a:xfrm>
+            <a:off x="4597400" y="2926079"/>
+            <a:ext cx="2997200" cy="640080"/>
+          </a:xfrm>
+          <a:prstGeom prst="rect">
+            <a:avLst/>
+          </a:prstGeom>
+          <a:noFill/>
+        </p:spPr>
+        <p:txBody>
+          <a:bodyPr wrap="square" anchor="t" lIns="0" rIns="0" tIns="0" bIns="0">
+            <a:spAutoFit/>
+          </a:bodyPr>
+          <a:lstStyle/>
+          <a:p>
+            <a:pPr algn="l"/>
+            <a:r>
+              <a:rPr sz="1800" b="1">
+                <a:solidFill>
+                  <a:srgbClr val="9B1B30"/>
+                </a:solidFill>
+                <a:latin typeface="Calibri"/>
+              </a:rPr>
+              <a:t>Por qué no el Ridge</a:t>
+            </a:r>
+          </a:p>
+        </p:txBody>
+      </p:sp>
+      <p:sp>
+        <p:nvSpPr>
+          <p:cNvPr id="12" name="TextBox 11"/>
+          <p:cNvSpPr txBox="1"/>
+          <p:nvPr/>
+        </p:nvSpPr>
+        <p:spPr>
+          <a:xfrm>
+            <a:off x="4597400" y="3611879"/>
+            <a:ext cx="2997200" cy="1645920"/>
+          </a:xfrm>
+          <a:prstGeom prst="rect">
+            <a:avLst/>
+          </a:prstGeom>
+          <a:noFill/>
+        </p:spPr>
+        <p:txBody>
+          <a:bodyPr wrap="square" anchor="t" lIns="0" rIns="0" tIns="0" bIns="0">
+            <a:spAutoFit/>
+          </a:bodyPr>
+          <a:lstStyle/>
+          <a:p>
+            <a:pPr algn="l">
+              <a:lnSpc>
+                <a:spcPct val="115000"/>
+              </a:lnSpc>
+            </a:pPr>
+            <a:r>
+              <a:rPr sz="1300" b="0">
+                <a:solidFill>
+                  <a:srgbClr val="2D2D2D"/>
+                </a:solidFill>
+                <a:latin typeface="Calibri"/>
+              </a:rPr>
+              <a:t>Proceso CONTINUO: contrae y estabiliza, pero no lleva ningún coeficiente a cero exacto, así que no hay modelo que leer.</a:t>
+            </a:r>
+          </a:p>
+        </p:txBody>
+      </p:sp>
+      <p:sp>
+        <p:nvSpPr>
+          <p:cNvPr id="13" name="TextBox 12"/>
+          <p:cNvSpPr txBox="1"/>
+          <p:nvPr/>
+        </p:nvSpPr>
+        <p:spPr>
+          <a:xfrm>
+            <a:off x="4597400" y="5303519"/>
+            <a:ext cx="2997200" cy="502920"/>
+          </a:xfrm>
+          <a:prstGeom prst="rect">
+            <a:avLst/>
+          </a:prstGeom>
+          <a:noFill/>
+        </p:spPr>
+        <p:txBody>
+          <a:bodyPr wrap="square" anchor="t" lIns="0" rIns="0" tIns="0" bIns="0">
+            <a:spAutoFit/>
+          </a:bodyPr>
+          <a:lstStyle/>
+          <a:p>
+            <a:pPr algn="l"/>
+            <a:r>
+              <a:rPr sz="1200" b="1">
+                <a:solidFill>
+                  <a:srgbClr val="9B1B30"/>
+                </a:solidFill>
+                <a:latin typeface="Calibri"/>
+              </a:rPr>
+              <a:t>Estable, pero ilegible</a:t>
+            </a:r>
+          </a:p>
+        </p:txBody>
+      </p:sp>
+      <p:sp>
+        <p:nvSpPr>
+          <p:cNvPr id="14" name="Rounded Rectangle 13"/>
+          <p:cNvSpPr/>
+          <p:nvPr/>
+        </p:nvSpPr>
+        <p:spPr>
+          <a:xfrm>
+            <a:off x="8188960" y="1874519"/>
+            <a:ext cx="3454400" cy="4114800"/>
+          </a:xfrm>
+          <a:prstGeom prst="roundRect">
+            <a:avLst/>
+          </a:prstGeom>
+          <a:solidFill>
+            <a:srgbClr val="FCEDEE"/>
+          </a:solidFill>
+          <a:ln>
+            <a:noFill/>
+          </a:ln>
+          <a:effectLst/>
+        </p:spPr>
+        <p:style>
+          <a:lnRef idx="1">
+            <a:schemeClr val="accent1"/>
+          </a:lnRef>
+          <a:fillRef idx="3">
+            <a:schemeClr val="accent1"/>
+          </a:fillRef>
+          <a:effectRef idx="2">
+            <a:schemeClr val="accent1"/>
+          </a:effectRef>
+          <a:fontRef idx="minor">
+            <a:schemeClr val="lt1"/>
+          </a:fontRef>
+        </p:style>
+        <p:txBody>
+          <a:bodyPr rtlCol="0" anchor="ctr"/>
+          <a:lstStyle/>
+          <a:p>
+            <a:pPr algn="ctr"/>
+          </a:p>
+        </p:txBody>
+      </p:sp>
+      <p:sp>
+        <p:nvSpPr>
+          <p:cNvPr id="15" name="Oval 14"/>
+          <p:cNvSpPr/>
+          <p:nvPr/>
+        </p:nvSpPr>
+        <p:spPr>
+          <a:xfrm>
+            <a:off x="8417560" y="2103119"/>
+            <a:ext cx="640080" cy="640080"/>
+          </a:xfrm>
+          <a:prstGeom prst="ellipse">
+            <a:avLst/>
+          </a:prstGeom>
+          <a:solidFill>
+            <a:srgbClr val="E4002B"/>
+          </a:solidFill>
+          <a:ln>
+            <a:noFill/>
+          </a:ln>
+          <a:effectLst/>
+        </p:spPr>
+        <p:style>
+          <a:lnRef idx="1">
+            <a:schemeClr val="accent1"/>
+          </a:lnRef>
+          <a:fillRef idx="3">
+            <a:schemeClr val="accent1"/>
+          </a:fillRef>
+          <a:effectRef idx="2">
+            <a:schemeClr val="accent1"/>
+          </a:effectRef>
+          <a:fontRef idx="minor">
+            <a:schemeClr val="lt1"/>
+          </a:fontRef>
+        </p:style>
+        <p:txBody>
+          <a:bodyPr rtlCol="0" anchor="ctr" lIns="0" rIns="0" tIns="0" bIns="0"/>
+          <a:lstStyle/>
+          <a:p>
+            <a:pPr algn="ctr"/>
+            <a:r>
+              <a:rPr sz="2000" b="1">
+                <a:solidFill>
+                  <a:srgbClr val="FFFFFF"/>
+                </a:solidFill>
+                <a:latin typeface="Calibri"/>
+              </a:rPr>
+              <a:t>3</a:t>
+            </a:r>
+          </a:p>
+        </p:txBody>
+      </p:sp>
+      <p:sp>
+        <p:nvSpPr>
+          <p:cNvPr id="16" name="TextBox 15"/>
+          <p:cNvSpPr txBox="1"/>
+          <p:nvPr/>
+        </p:nvSpPr>
+        <p:spPr>
+          <a:xfrm>
+            <a:off x="8417560" y="2926079"/>
+            <a:ext cx="2997200" cy="640080"/>
+          </a:xfrm>
+          <a:prstGeom prst="rect">
+            <a:avLst/>
+          </a:prstGeom>
+          <a:noFill/>
+        </p:spPr>
+        <p:txBody>
+          <a:bodyPr wrap="square" anchor="t" lIns="0" rIns="0" tIns="0" bIns="0">
+            <a:spAutoFit/>
+          </a:bodyPr>
+          <a:lstStyle/>
+          <a:p>
+            <a:pPr algn="l"/>
+            <a:r>
+              <a:rPr sz="1800" b="1">
+                <a:solidFill>
+                  <a:srgbClr val="9B1B30"/>
+                </a:solidFill>
+                <a:latin typeface="Calibri"/>
+              </a:rPr>
+              <a:t>Por qué tampoco el garrote</a:t>
+            </a:r>
+          </a:p>
+        </p:txBody>
+      </p:sp>
+      <p:sp>
+        <p:nvSpPr>
+          <p:cNvPr id="17" name="TextBox 16"/>
+          <p:cNvSpPr txBox="1"/>
+          <p:nvPr/>
+        </p:nvSpPr>
+        <p:spPr>
+          <a:xfrm>
+            <a:off x="8417560" y="3611879"/>
+            <a:ext cx="2997200" cy="1645920"/>
+          </a:xfrm>
+          <a:prstGeom prst="rect">
+            <a:avLst/>
+          </a:prstGeom>
+          <a:noFill/>
+        </p:spPr>
+        <p:txBody>
+          <a:bodyPr wrap="square" anchor="t" lIns="0" rIns="0" tIns="0" bIns="0">
+            <a:spAutoFit/>
+          </a:bodyPr>
+          <a:lstStyle/>
+          <a:p>
+            <a:pPr algn="l">
+              <a:lnSpc>
+                <a:spcPct val="115000"/>
+              </a:lnSpc>
+            </a:pPr>
+            <a:r>
+              <a:rPr sz="1300" b="0">
+                <a:solidFill>
+                  <a:srgbClr val="2D2D2D"/>
+                </a:solidFill>
+                <a:latin typeface="Calibri"/>
+              </a:rPr>
+              <a:t>Breiman ya contraía Y anulaba en 1995, pero REESCALA los coeficientes del OLS: hereda su mal comportamiento donde más se quiere regularizar.</a:t>
+            </a:r>
+          </a:p>
+        </p:txBody>
+      </p:sp>
+      <p:sp>
+        <p:nvSpPr>
+          <p:cNvPr id="18" name="TextBox 17"/>
+          <p:cNvSpPr txBox="1"/>
+          <p:nvPr/>
+        </p:nvSpPr>
+        <p:spPr>
+          <a:xfrm>
+            <a:off x="8417560" y="5303519"/>
+            <a:ext cx="2997200" cy="502920"/>
+          </a:xfrm>
+          <a:prstGeom prst="rect">
+            <a:avLst/>
+          </a:prstGeom>
+          <a:noFill/>
+        </p:spPr>
+        <p:txBody>
+          <a:bodyPr wrap="square" anchor="t" lIns="0" rIns="0" tIns="0" bIns="0">
+            <a:spAutoFit/>
+          </a:bodyPr>
+          <a:lstStyle/>
+          <a:p>
+            <a:pPr algn="l"/>
+            <a:r>
+              <a:rPr sz="1200" b="1">
+                <a:solidFill>
+                  <a:srgbClr val="9B1B30"/>
+                </a:solidFill>
+                <a:latin typeface="Calibri"/>
+              </a:rPr>
+              <a:t>El LASSO no parte del OLS</a:t>
+            </a:r>
+          </a:p>
+        </p:txBody>
+      </p:sp>
+      <p:sp>
+        <p:nvSpPr>
+          <p:cNvPr id="19" name="TextBox 18"/>
+          <p:cNvSpPr txBox="1"/>
+          <p:nvPr/>
+        </p:nvSpPr>
+        <p:spPr>
+          <a:xfrm>
+            <a:off x="548640" y="5870448"/>
+            <a:ext cx="10607040" cy="292608"/>
+          </a:xfrm>
+          <a:prstGeom prst="rect">
+            <a:avLst/>
+          </a:prstGeom>
+          <a:noFill/>
+        </p:spPr>
+        <p:txBody>
+          <a:bodyPr wrap="square">
+            <a:spAutoFit/>
+          </a:bodyPr>
+          <a:lstStyle/>
+          <a:p>
+            <a:r>
+              <a:rPr sz="1000">
+                <a:solidFill>
+                  <a:srgbClr val="6E6E6E"/>
+                </a:solidFill>
+                <a:latin typeface="Calibri"/>
+              </a:rPr>
+              <a:t>Decisiones documentadas en el original: REPLICACION_PAPER «Sección 0.3» (Tibshirani 1996, Sección 1, pp. 267-268; Breiman 1995).</a:t>
+            </a:r>
+          </a:p>
+        </p:txBody>
+      </p:sp>
+      <p:sp>
+        <p:nvSpPr>
+          <p:cNvPr id="20" name="Oval 19"/>
+          <p:cNvSpPr/>
+          <p:nvPr/>
+        </p:nvSpPr>
+        <p:spPr>
+          <a:xfrm>
+            <a:off x="548640" y="6473952"/>
+            <a:ext cx="100584" cy="100584"/>
+          </a:xfrm>
+          <a:prstGeom prst="ellipse">
+            <a:avLst/>
+          </a:prstGeom>
+          <a:solidFill>
+            <a:srgbClr val="E4002B"/>
+          </a:solidFill>
+          <a:ln>
+            <a:noFill/>
+          </a:ln>
+          <a:effectLst/>
+        </p:spPr>
+        <p:style>
+          <a:lnRef idx="1">
+            <a:schemeClr val="accent1"/>
+          </a:lnRef>
+          <a:fillRef idx="3">
+            <a:schemeClr val="accent1"/>
+          </a:fillRef>
+          <a:effectRef idx="2">
+            <a:schemeClr val="accent1"/>
+          </a:effectRef>
+          <a:fontRef idx="minor">
+            <a:schemeClr val="lt1"/>
+          </a:fontRef>
+        </p:style>
+        <p:txBody>
+          <a:bodyPr rtlCol="0" anchor="ctr"/>
+          <a:lstStyle/>
+          <a:p>
+            <a:pPr algn="ctr"/>
+          </a:p>
+        </p:txBody>
+      </p:sp>
+      <p:sp>
+        <p:nvSpPr>
+          <p:cNvPr id="21" name="TextBox 20"/>
+          <p:cNvSpPr txBox="1"/>
+          <p:nvPr/>
+        </p:nvSpPr>
+        <p:spPr>
+          <a:xfrm>
+            <a:off x="749808" y="6437376"/>
+            <a:ext cx="7772400" cy="274320"/>
+          </a:xfrm>
+          <a:prstGeom prst="rect">
+            <a:avLst/>
+          </a:prstGeom>
+          <a:noFill/>
+        </p:spPr>
+        <p:txBody>
+          <a:bodyPr wrap="square" anchor="t" lIns="0" rIns="0" tIns="0" bIns="0">
+            <a:spAutoFit/>
+          </a:bodyPr>
+          <a:lstStyle/>
+          <a:p>
+            <a:pPr algn="l"/>
+            <a:r>
+              <a:rPr sz="900" b="0">
+                <a:solidFill>
+                  <a:srgbClr val="6E6E6E"/>
+                </a:solidFill>
+                <a:latin typeface="Calibri"/>
+              </a:rPr>
+              <a:t>S05 — Herramientas para la Ciencia de Datos, UPC</a:t>
+            </a:r>
+          </a:p>
+        </p:txBody>
+      </p:sp>
+      <p:sp>
+        <p:nvSpPr>
+          <p:cNvPr id="22" name="TextBox 21"/>
+          <p:cNvSpPr txBox="1"/>
+          <p:nvPr/>
+        </p:nvSpPr>
+        <p:spPr>
+          <a:xfrm>
+            <a:off x="10180320" y="6437376"/>
+            <a:ext cx="1463040" cy="274320"/>
+          </a:xfrm>
+          <a:prstGeom prst="rect">
+            <a:avLst/>
+          </a:prstGeom>
+          <a:noFill/>
+        </p:spPr>
+        <p:txBody>
+          <a:bodyPr wrap="square" anchor="t" lIns="0" rIns="0" tIns="0" bIns="0">
+            <a:spAutoFit/>
+          </a:bodyPr>
+          <a:lstStyle/>
+          <a:p>
+            <a:pPr algn="r"/>
+            <a:r>
+              <a:rPr sz="900" b="0">
+                <a:solidFill>
+                  <a:srgbClr val="6E6E6E"/>
+                </a:solidFill>
+                <a:latin typeface="Calibri"/>
+              </a:rPr>
+              <a:t>18 / 22</a:t>
+            </a:r>
+          </a:p>
+        </p:txBody>
+      </p:sp>
     </p:spTree>
   </p:cSld>
   <p:clrMapOvr>
@@ -10120,7 +10308,7 @@
                 </a:solidFill>
                 <a:latin typeface="Calibri"/>
               </a:rPr>
-              <a:t>ASÍ SE HACE — ELEGIR Λ POR VALIDACIÓN CRUZADA</a:t>
+              <a:t>CAMINO DEL LASSO — RÉPLICA PROSTATE</a:t>
             </a:r>
           </a:p>
         </p:txBody>
@@ -10155,75 +10343,54 @@
                 </a:solidFill>
                 <a:latin typeface="Calibri"/>
               </a:rPr>
-              <a:t>La validación cruzada, no la intuición, elige la fuerza λ</a:t>
-            </a:r>
-          </a:p>
-        </p:txBody>
-      </p:sp>
-      <p:sp>
-        <p:nvSpPr>
-          <p:cNvPr id="4" name="TextBox 3"/>
-          <p:cNvSpPr txBox="1"/>
-          <p:nvPr/>
-        </p:nvSpPr>
-        <p:spPr>
-          <a:xfrm>
-            <a:off x="548640" y="1755648"/>
-            <a:ext cx="11094720" cy="457200"/>
-          </a:xfrm>
-          <a:prstGeom prst="rect">
-            <a:avLst/>
-          </a:prstGeom>
-          <a:noFill/>
-        </p:spPr>
-        <p:txBody>
-          <a:bodyPr wrap="square" lIns="0" tIns="0" bIns="0">
-            <a:spAutoFit/>
-          </a:bodyPr>
-          <a:lstStyle/>
-          <a:p>
-            <a:r>
-              <a:rPr sz="1400" b="1">
-                <a:solidFill>
-                  <a:srgbClr val="9B1B30"/>
-                </a:solidFill>
-                <a:latin typeface="Calibri"/>
-              </a:rPr>
-              <a:t>▸ Qué hace:  </a:t>
-            </a:r>
-            <a:r>
-              <a:rPr sz="1400">
-                <a:solidFill>
-                  <a:srgbClr val="2D2D2D"/>
-                </a:solidFill>
-                <a:latin typeface="Calibri"/>
-              </a:rPr>
-              <a:t>prueba valores de λ por validación cruzada con los pliegues barajados y elige el de menor error.</a:t>
-            </a:r>
-          </a:p>
-        </p:txBody>
-      </p:sp>
-      <p:sp>
-        <p:nvSpPr>
-          <p:cNvPr id="5" name="Rounded Rectangle 4"/>
+              <a:t>lcavol resiste; cinco variables caen a cero</a:t>
+            </a:r>
+          </a:p>
+        </p:txBody>
+      </p:sp>
+      <p:pic>
+        <p:nvPicPr>
+          <p:cNvPr id="4" name="Picture 3" descr="deck_lasso_path.png"/>
+          <p:cNvPicPr>
+            <a:picLocks noChangeAspect="1"/>
+          </p:cNvPicPr>
+          <p:nvPr/>
+        </p:nvPicPr>
+        <p:blipFill>
+          <a:blip r:embed="rId2"/>
+          <a:stretch>
+            <a:fillRect/>
+          </a:stretch>
+        </p:blipFill>
+        <p:spPr>
+          <a:xfrm>
+            <a:off x="548640" y="1828800"/>
+            <a:ext cx="5484707" cy="3703320"/>
+          </a:xfrm>
+          <a:prstGeom prst="rect">
+            <a:avLst/>
+          </a:prstGeom>
+        </p:spPr>
+      </p:pic>
+      <p:sp>
+        <p:nvSpPr>
+          <p:cNvPr id="5" name="Oval 4"/>
           <p:cNvSpPr/>
           <p:nvPr/>
         </p:nvSpPr>
         <p:spPr>
           <a:xfrm>
-            <a:off x="548640" y="2395728"/>
-            <a:ext cx="11094720" cy="1883664"/>
-          </a:xfrm>
-          <a:prstGeom prst="roundRect">
+            <a:off x="7955279" y="2011680"/>
+            <a:ext cx="548640" cy="548640"/>
+          </a:xfrm>
+          <a:prstGeom prst="ellipse">
             <a:avLst/>
           </a:prstGeom>
           <a:solidFill>
-            <a:srgbClr val="F4F4F4"/>
+            <a:srgbClr val="E4002B"/>
           </a:solidFill>
-          <a:ln w="9525">
-            <a:solidFill>
-              <a:srgbClr val="DDDDDD"/>
-            </a:solidFill>
+          <a:ln>
+            <a:noFill/>
           </a:ln>
           <a:effectLst/>
         </p:spPr>
@@ -10249,40 +10416,30 @@
           </a:p>
         </p:txBody>
       </p:sp>
-      <p:sp>
-        <p:nvSpPr>
-          <p:cNvPr id="6" name="TextBox 5"/>
-          <p:cNvSpPr txBox="1"/>
-          <p:nvPr/>
-        </p:nvSpPr>
-        <p:spPr>
-          <a:xfrm>
-            <a:off x="804672" y="2542032"/>
-            <a:ext cx="10637520" cy="256032"/>
-          </a:xfrm>
-          <a:prstGeom prst="rect">
-            <a:avLst/>
-          </a:prstGeom>
-          <a:noFill/>
-        </p:spPr>
-        <p:txBody>
-          <a:bodyPr wrap="none" lIns="0" tIns="0" bIns="0">
-            <a:spAutoFit/>
-          </a:bodyPr>
-          <a:lstStyle/>
-          <a:p>
-            <a:r>
-              <a:rPr sz="1050" b="1">
-                <a:solidFill>
-                  <a:srgbClr val="9B1B30"/>
-                </a:solidFill>
-                <a:latin typeface="Calibri"/>
-              </a:rPr>
-              <a:t>CÓDIGO REAL DEL CUADERNO</a:t>
-            </a:r>
-          </a:p>
-        </p:txBody>
-      </p:sp>
+      <p:pic>
+        <p:nvPicPr>
+          <p:cNvPr id="6" name="Picture 5" descr="lightbulb__FFFFFF.png"/>
+          <p:cNvPicPr>
+            <a:picLocks noChangeAspect="1"/>
+          </p:cNvPicPr>
+          <p:nvPr/>
+        </p:nvPicPr>
+        <p:blipFill>
+          <a:blip r:embed="rId3"/>
+          <a:stretch>
+            <a:fillRect/>
+          </a:stretch>
+        </p:blipFill>
+        <p:spPr>
+          <a:xfrm>
+            <a:off x="8108898" y="2165299"/>
+            <a:ext cx="241402" cy="241402"/>
+          </a:xfrm>
+          <a:prstGeom prst="rect">
+            <a:avLst/>
+          </a:prstGeom>
+        </p:spPr>
+      </p:pic>
       <p:sp>
         <p:nvSpPr>
           <p:cNvPr id="7" name="TextBox 6"/>
@@ -10291,88 +10448,8 @@
         </p:nvSpPr>
         <p:spPr>
           <a:xfrm>
-            <a:off x="859536" y="2926080"/>
-            <a:ext cx="10472928" cy="1280160"/>
-          </a:xfrm>
-          <a:prstGeom prst="rect">
-            <a:avLst/>
-          </a:prstGeom>
-          <a:noFill/>
-        </p:spPr>
-        <p:txBody>
-          <a:bodyPr wrap="square" lIns="0" tIns="0" bIns="0">
-            <a:spAutoFit/>
-          </a:bodyPr>
-          <a:lstStyle/>
-          <a:p>
-            <a:pPr>
-              <a:lnSpc>
-                <a:spcPct val="130000"/>
-              </a:lnSpc>
-              <a:spcAft>
-                <a:spcPts val="400"/>
-              </a:spcAft>
-            </a:pPr>
-            <a:r>
-              <a:rPr sz="1200">
-                <a:solidFill>
-                  <a:srgbClr val="2D2D2D"/>
-                </a:solidFill>
-                <a:latin typeface="Consolas"/>
-              </a:rPr>
-              <a:t>cv_barajada = KFold(n_splits=10, shuffle=True, random_state=42)   # &lt;- shuffle, no cv=10</a:t>
-            </a:r>
-          </a:p>
-          <a:p>
-            <a:pPr>
-              <a:lnSpc>
-                <a:spcPct val="130000"/>
-              </a:lnSpc>
-              <a:spcAft>
-                <a:spcPts val="400"/>
-              </a:spcAft>
-            </a:pPr>
-            <a:r>
-              <a:rPr sz="1200">
-                <a:solidFill>
-                  <a:srgbClr val="2D2D2D"/>
-                </a:solidFill>
-                <a:latin typeface="Consolas"/>
-              </a:rPr>
-              <a:t>lasso_cv = LassoCV(cv=cv_barajada, max_iter=200000).fit(X_train_s, y_train)</a:t>
-            </a:r>
-          </a:p>
-          <a:p>
-            <a:pPr>
-              <a:lnSpc>
-                <a:spcPct val="130000"/>
-              </a:lnSpc>
-              <a:spcAft>
-                <a:spcPts val="400"/>
-              </a:spcAft>
-            </a:pPr>
-            <a:r>
-              <a:rPr sz="1200">
-                <a:solidFill>
-                  <a:srgbClr val="2D2D2D"/>
-                </a:solidFill>
-                <a:latin typeface="Consolas"/>
-              </a:rPr>
-              <a:t># λ_min (desempeño) vs λ_1se (parsimonia); la réplica ESL fija el λ del borde ralo</a:t>
-            </a:r>
-          </a:p>
-        </p:txBody>
-      </p:sp>
-      <p:sp>
-        <p:nvSpPr>
-          <p:cNvPr id="8" name="TextBox 7"/>
-          <p:cNvSpPr txBox="1"/>
-          <p:nvPr/>
-        </p:nvSpPr>
-        <p:spPr>
-          <a:xfrm>
-            <a:off x="548640" y="5961888"/>
-            <a:ext cx="11094720" cy="292608"/>
+            <a:off x="8686800" y="2057400"/>
+            <a:ext cx="2926080" cy="548640"/>
           </a:xfrm>
           <a:prstGeom prst="rect">
             <a:avLst/>
@@ -10387,20 +10464,94 @@
           <a:p>
             <a:pPr algn="l"/>
             <a:r>
+              <a:rPr sz="1500" b="1">
+                <a:solidFill>
+                  <a:srgbClr val="9B1B30"/>
+                </a:solidFill>
+                <a:latin typeface="Calibri"/>
+              </a:rPr>
+              <a:t>Lectura de negocio</a:t>
+            </a:r>
+          </a:p>
+        </p:txBody>
+      </p:sp>
+      <p:sp>
+        <p:nvSpPr>
+          <p:cNvPr id="8" name="TextBox 7"/>
+          <p:cNvSpPr txBox="1"/>
+          <p:nvPr/>
+        </p:nvSpPr>
+        <p:spPr>
+          <a:xfrm>
+            <a:off x="7955279" y="2880360"/>
+            <a:ext cx="3657600" cy="3108960"/>
+          </a:xfrm>
+          <a:prstGeom prst="rect">
+            <a:avLst/>
+          </a:prstGeom>
+          <a:noFill/>
+        </p:spPr>
+        <p:txBody>
+          <a:bodyPr wrap="square" anchor="t" lIns="0" rIns="0" tIns="0" bIns="0">
+            <a:spAutoFit/>
+          </a:bodyPr>
+          <a:lstStyle/>
+          <a:p>
+            <a:pPr algn="l">
+              <a:lnSpc>
+                <a:spcPct val="125000"/>
+              </a:lnSpc>
+            </a:pPr>
+            <a:r>
+              <a:rPr sz="1500" b="0">
+                <a:solidFill>
+                  <a:srgbClr val="2D2D2D"/>
+                </a:solidFill>
+                <a:latin typeface="Calibri"/>
+              </a:rPr>
+              <a:t>lcavol resiste hasta el final; 5 variables caen a 0. El LASSO deja 3: lcavol, lweight, svi. Coef. OLS de lcavol = 0,676.</a:t>
+            </a:r>
+          </a:p>
+        </p:txBody>
+      </p:sp>
+      <p:sp>
+        <p:nvSpPr>
+          <p:cNvPr id="9" name="TextBox 8"/>
+          <p:cNvSpPr txBox="1"/>
+          <p:nvPr/>
+        </p:nvSpPr>
+        <p:spPr>
+          <a:xfrm>
+            <a:off x="548640" y="5961888"/>
+            <a:ext cx="11094720" cy="292608"/>
+          </a:xfrm>
+          <a:prstGeom prst="rect">
+            <a:avLst/>
+          </a:prstGeom>
+          <a:noFill/>
+        </p:spPr>
+        <p:txBody>
+          <a:bodyPr wrap="square" anchor="t" lIns="0" rIns="0" tIns="0" bIns="0">
+            <a:spAutoFit/>
+          </a:bodyPr>
+          <a:lstStyle/>
+          <a:p>
+            <a:pPr algn="l"/>
+            <a:r>
               <a:rPr sz="1000" b="0">
                 <a:solidFill>
                   <a:srgbClr val="6E6E6E"/>
                 </a:solidFill>
                 <a:latin typeface="Calibri"/>
               </a:rPr>
-              <a:t>notebook celda 72 (Paso 5, λ_min y λ_1se con pliegues barajados) y celda 78 (Paso 5b, λ operativo 0,2203). Fuente: DEFINICIONES Secciones 8 y 10; ISLR Sección 6.2.3; sklearn LassoCV.</a:t>
-            </a:r>
-          </a:p>
-        </p:txBody>
-      </p:sp>
-      <p:sp>
-        <p:nvSpPr>
-          <p:cNvPr id="9" name="Rounded Rectangle 8"/>
+              <a:t>resultados/S05_resultados.xlsx!paths (venv, 101 λ × 8 predictores). Réplica de Tibshirani (1996) / ESL Tabla 3.3.</a:t>
+            </a:r>
+          </a:p>
+        </p:txBody>
+      </p:sp>
+      <p:sp>
+        <p:nvSpPr>
+          <p:cNvPr id="10" name="Rounded Rectangle 9"/>
           <p:cNvSpPr/>
           <p:nvPr/>
         </p:nvSpPr>
@@ -10448,14 +10599,14 @@
                 </a:solidFill>
                 <a:latin typeface="Calibri"/>
               </a:rPr>
-              <a:t>▶  Notebook, Sección 4, Paso 5, celda 72</a:t>
-            </a:r>
-          </a:p>
-        </p:txBody>
-      </p:sp>
-      <p:sp>
-        <p:nvSpPr>
-          <p:cNvPr id="10" name="Oval 9"/>
+              <a:t>▶  Notebook, Sección 6.2, celda 120</a:t>
+            </a:r>
+          </a:p>
+        </p:txBody>
+      </p:sp>
+      <p:sp>
+        <p:nvSpPr>
+          <p:cNvPr id="11" name="Oval 10"/>
           <p:cNvSpPr/>
           <p:nvPr/>
         </p:nvSpPr>
@@ -10499,7 +10650,7 @@
       </p:sp>
       <p:sp>
         <p:nvSpPr>
-          <p:cNvPr id="11" name="TextBox 10"/>
+          <p:cNvPr id="12" name="TextBox 11"/>
           <p:cNvSpPr txBox="1"/>
           <p:nvPr/>
         </p:nvSpPr>
@@ -10534,7 +10685,7 @@
       </p:sp>
       <p:sp>
         <p:nvSpPr>
-          <p:cNvPr id="12" name="TextBox 11"/>
+          <p:cNvPr id="13" name="TextBox 12"/>
           <p:cNvSpPr txBox="1"/>
           <p:nvPr/>
         </p:nvSpPr>
@@ -10562,7 +10713,7 @@
                 </a:solidFill>
                 <a:latin typeface="Calibri"/>
               </a:rPr>
-              <a:t>19 / 26</a:t>
+              <a:t>19 / 22</a:t>
             </a:r>
           </a:p>
         </p:txBody>
@@ -11286,7 +11437,7 @@
                 </a:solidFill>
                 <a:latin typeface="Calibri"/>
               </a:rPr>
-              <a:t>¿Cómo operan la contracción de RIDGE y la selección de LASSO?</a:t>
+              <a:t>¿Cómo operan el encogimiento de RIDGE y la selección de LASSO?</a:t>
             </a:r>
           </a:p>
         </p:txBody>
@@ -11711,7 +11862,7 @@
                 </a:solidFill>
                 <a:latin typeface="Calibri"/>
               </a:rPr>
-              <a:t>2 / 26</a:t>
+              <a:t>2 / 22</a:t>
             </a:r>
           </a:p>
         </p:txBody>
@@ -11725,308 +11876,6 @@
 </file>
 
 <file path=ppt/slides/slide20.xml><?xml version="1.0" encoding="utf-8"?>
-<p:sld xmlns:a="http://schemas.openxmlformats.org/drawingml/2006/main" xmlns:p="http://schemas.openxmlformats.org/presentationml/2006/main" xmlns:r="http://schemas.openxmlformats.org/officeDocument/2006/relationships">
-  <p:cSld>
-    <p:bg>
-      <p:bgPr>
-        <a:solidFill>
-          <a:srgbClr val="9B1B30"/>
-        </a:solidFill>
-        <a:effectLst/>
-      </p:bgPr>
-    </p:bg>
-    <p:spTree>
-      <p:nvGrpSpPr>
-        <p:cNvPr id="1" name=""/>
-        <p:cNvGrpSpPr/>
-        <p:nvPr/>
-      </p:nvGrpSpPr>
-      <p:grpSpPr/>
-      <p:sp>
-        <p:nvSpPr>
-          <p:cNvPr id="2" name="Oval 1"/>
-          <p:cNvSpPr/>
-          <p:nvPr/>
-        </p:nvSpPr>
-        <p:spPr>
-          <a:xfrm>
-            <a:off x="914400" y="2103120"/>
-            <a:ext cx="2377440" cy="2377440"/>
-          </a:xfrm>
-          <a:prstGeom prst="ellipse">
-            <a:avLst/>
-          </a:prstGeom>
-          <a:solidFill>
-            <a:srgbClr val="FFFFFF"/>
-          </a:solidFill>
-          <a:ln>
-            <a:noFill/>
-          </a:ln>
-          <a:effectLst/>
-        </p:spPr>
-        <p:style>
-          <a:lnRef idx="1">
-            <a:schemeClr val="accent1"/>
-          </a:lnRef>
-          <a:fillRef idx="3">
-            <a:schemeClr val="accent1"/>
-          </a:fillRef>
-          <a:effectRef idx="2">
-            <a:schemeClr val="accent1"/>
-          </a:effectRef>
-          <a:fontRef idx="minor">
-            <a:schemeClr val="lt1"/>
-          </a:fontRef>
-        </p:style>
-        <p:txBody>
-          <a:bodyPr rtlCol="0" anchor="ctr" lIns="0" rIns="0" tIns="0" bIns="0"/>
-          <a:lstStyle/>
-          <a:p>
-            <a:pPr algn="ctr"/>
-            <a:r>
-              <a:rPr sz="10000" b="1">
-                <a:solidFill>
-                  <a:srgbClr val="9B1B30"/>
-                </a:solidFill>
-                <a:latin typeface="Calibri"/>
-              </a:rPr>
-              <a:t>5</a:t>
-            </a:r>
-          </a:p>
-        </p:txBody>
-      </p:sp>
-      <p:sp>
-        <p:nvSpPr>
-          <p:cNvPr id="3" name="TextBox 2"/>
-          <p:cNvSpPr txBox="1"/>
-          <p:nvPr/>
-        </p:nvSpPr>
-        <p:spPr>
-          <a:xfrm>
-            <a:off x="3931920" y="2651760"/>
-            <a:ext cx="7589520" cy="1371600"/>
-          </a:xfrm>
-          <a:prstGeom prst="rect">
-            <a:avLst/>
-          </a:prstGeom>
-          <a:noFill/>
-        </p:spPr>
-        <p:txBody>
-          <a:bodyPr wrap="square" anchor="t" lIns="0" rIns="0" tIns="0" bIns="0">
-            <a:spAutoFit/>
-          </a:bodyPr>
-          <a:lstStyle/>
-          <a:p>
-            <a:pPr algn="l"/>
-            <a:r>
-              <a:rPr sz="4000" b="1">
-                <a:solidFill>
-                  <a:srgbClr val="FFFFFF"/>
-                </a:solidFill>
-                <a:latin typeface="Calibri"/>
-              </a:rPr>
-              <a:t>¿Se sostiene con datos reales? La réplica de Tibshirani (1996)</a:t>
-            </a:r>
-          </a:p>
-        </p:txBody>
-      </p:sp>
-      <p:sp>
-        <p:nvSpPr>
-          <p:cNvPr id="4" name="TextBox 3"/>
-          <p:cNvSpPr txBox="1"/>
-          <p:nvPr/>
-        </p:nvSpPr>
-        <p:spPr>
-          <a:xfrm>
-            <a:off x="3931920" y="3977639"/>
-            <a:ext cx="7589520" cy="914400"/>
-          </a:xfrm>
-          <a:prstGeom prst="rect">
-            <a:avLst/>
-          </a:prstGeom>
-          <a:noFill/>
-        </p:spPr>
-        <p:txBody>
-          <a:bodyPr wrap="square" anchor="t" lIns="0" rIns="0" tIns="0" bIns="0">
-            <a:spAutoFit/>
-          </a:bodyPr>
-          <a:lstStyle/>
-          <a:p>
-            <a:pPr algn="l"/>
-            <a:r>
-              <a:rPr sz="1700" b="0">
-                <a:solidFill>
-                  <a:srgbClr val="FCEDEE"/>
-                </a:solidFill>
-                <a:latin typeface="Calibri"/>
-              </a:rPr>
-              <a:t>Capítulo 5.5 — jueves, bloques A1 y A2</a:t>
-            </a:r>
-          </a:p>
-        </p:txBody>
-      </p:sp>
-    </p:spTree>
-  </p:cSld>
-  <p:clrMapOvr>
-    <a:masterClrMapping/>
-  </p:clrMapOvr>
-</p:sld>
-</file>
-
-<file path=ppt/slides/slide21.xml><?xml version="1.0" encoding="utf-8"?>
-<p:sld xmlns:a="http://schemas.openxmlformats.org/drawingml/2006/main" xmlns:p="http://schemas.openxmlformats.org/presentationml/2006/main" xmlns:r="http://schemas.openxmlformats.org/officeDocument/2006/relationships">
-  <p:cSld>
-    <p:bg>
-      <p:bgPr>
-        <a:solidFill>
-          <a:srgbClr val="2D2D2D"/>
-        </a:solidFill>
-        <a:effectLst/>
-      </p:bgPr>
-    </p:bg>
-    <p:spTree>
-      <p:nvGrpSpPr>
-        <p:cNvPr id="1" name=""/>
-        <p:cNvGrpSpPr/>
-        <p:nvPr/>
-      </p:nvGrpSpPr>
-      <p:grpSpPr/>
-      <p:sp>
-        <p:nvSpPr>
-          <p:cNvPr id="2" name="Oval 1"/>
-          <p:cNvSpPr/>
-          <p:nvPr/>
-        </p:nvSpPr>
-        <p:spPr>
-          <a:xfrm>
-            <a:off x="5638800" y="914400"/>
-            <a:ext cx="914400" cy="914400"/>
-          </a:xfrm>
-          <a:prstGeom prst="ellipse">
-            <a:avLst/>
-          </a:prstGeom>
-          <a:solidFill>
-            <a:srgbClr val="E4002B"/>
-          </a:solidFill>
-          <a:ln>
-            <a:noFill/>
-          </a:ln>
-          <a:effectLst/>
-        </p:spPr>
-        <p:style>
-          <a:lnRef idx="1">
-            <a:schemeClr val="accent1"/>
-          </a:lnRef>
-          <a:fillRef idx="3">
-            <a:schemeClr val="accent1"/>
-          </a:fillRef>
-          <a:effectRef idx="2">
-            <a:schemeClr val="accent1"/>
-          </a:effectRef>
-          <a:fontRef idx="minor">
-            <a:schemeClr val="lt1"/>
-          </a:fontRef>
-        </p:style>
-        <p:txBody>
-          <a:bodyPr rtlCol="0" anchor="ctr" lIns="0" rIns="0" tIns="0" bIns="0"/>
-          <a:lstStyle/>
-          <a:p>
-            <a:pPr algn="ctr"/>
-            <a:r>
-              <a:rPr sz="4800" b="1">
-                <a:solidFill>
-                  <a:srgbClr val="FFFFFF"/>
-                </a:solidFill>
-                <a:latin typeface="Calibri"/>
-              </a:rPr>
-              <a:t>“</a:t>
-            </a:r>
-          </a:p>
-        </p:txBody>
-      </p:sp>
-      <p:sp>
-        <p:nvSpPr>
-          <p:cNvPr id="3" name="TextBox 2"/>
-          <p:cNvSpPr txBox="1"/>
-          <p:nvPr/>
-        </p:nvSpPr>
-        <p:spPr>
-          <a:xfrm>
-            <a:off x="1645920" y="2377440"/>
-            <a:ext cx="8900160" cy="2377440"/>
-          </a:xfrm>
-          <a:prstGeom prst="rect">
-            <a:avLst/>
-          </a:prstGeom>
-          <a:noFill/>
-        </p:spPr>
-        <p:txBody>
-          <a:bodyPr wrap="square" anchor="t" lIns="0" rIns="0" tIns="0" bIns="0">
-            <a:spAutoFit/>
-          </a:bodyPr>
-          <a:lstStyle/>
-          <a:p>
-            <a:pPr algn="ctr">
-              <a:lnSpc>
-                <a:spcPct val="125000"/>
-              </a:lnSpc>
-            </a:pPr>
-            <a:r>
-              <a:rPr sz="2600" b="0">
-                <a:solidFill>
-                  <a:srgbClr val="FFFFFF"/>
-                </a:solidFill>
-                <a:latin typeface="Calibri"/>
-              </a:rPr>
-              <a:t>El «lasso» minimiza la suma de cuadrados de los residuales sujeta a que la suma de los valores absolutos de los coeficientes sea menor que una constante. Por la naturaleza de esa restricción, tiende a producir algunos coeficientes exactamente iguales a 0 y, por tanto, entrega modelos interpretables.</a:t>
-            </a:r>
-          </a:p>
-        </p:txBody>
-      </p:sp>
-      <p:sp>
-        <p:nvSpPr>
-          <p:cNvPr id="4" name="TextBox 3"/>
-          <p:cNvSpPr txBox="1"/>
-          <p:nvPr/>
-        </p:nvSpPr>
-        <p:spPr>
-          <a:xfrm>
-            <a:off x="1645920" y="5120640"/>
-            <a:ext cx="8900160" cy="548640"/>
-          </a:xfrm>
-          <a:prstGeom prst="rect">
-            <a:avLst/>
-          </a:prstGeom>
-          <a:noFill/>
-        </p:spPr>
-        <p:txBody>
-          <a:bodyPr wrap="square" anchor="t" lIns="0" rIns="0" tIns="0" bIns="0">
-            <a:spAutoFit/>
-          </a:bodyPr>
-          <a:lstStyle/>
-          <a:p>
-            <a:pPr algn="ctr"/>
-            <a:r>
-              <a:rPr sz="1500" b="0">
-                <a:solidFill>
-                  <a:srgbClr val="FCEDEE"/>
-                </a:solidFill>
-                <a:latin typeface="Calibri"/>
-              </a:rPr>
-              <a:t>— Robert Tibshirani, 1996 — resumen del artículo (p. 267)</a:t>
-            </a:r>
-          </a:p>
-        </p:txBody>
-      </p:sp>
-    </p:spTree>
-  </p:cSld>
-  <p:clrMapOvr>
-    <a:masterClrMapping/>
-  </p:clrMapOvr>
-</p:sld>
-</file>
-
-<file path=ppt/slides/slide22.xml><?xml version="1.0" encoding="utf-8"?>
 <p:sld xmlns:a="http://schemas.openxmlformats.org/drawingml/2006/main" xmlns:p="http://schemas.openxmlformats.org/presentationml/2006/main" xmlns:r="http://schemas.openxmlformats.org/officeDocument/2006/relationships">
   <p:cSld>
     <p:bg>
@@ -12074,7 +11923,7 @@
                 </a:solidFill>
                 <a:latin typeface="Calibri"/>
               </a:rPr>
-              <a:t>QUÉ PREGUNTABA EL PAPER Y POR QUÉ USÓ LO QUE USÓ</a:t>
+              <a:t>ERROR DE PRUEBA EN PROSTATE — DENTRO DE ~1 SE</a:t>
             </a:r>
           </a:p>
         </p:txBody>
@@ -12109,55 +11958,35 @@
                 </a:solidFill>
                 <a:latin typeface="Calibri"/>
               </a:rPr>
-              <a:t>Ninguna alternativa de 1996 respondía las dos mitades</a:t>
-            </a:r>
-          </a:p>
-        </p:txBody>
-      </p:sp>
-      <p:sp>
-        <p:nvSpPr>
-          <p:cNvPr id="4" name="Rounded Rectangle 3"/>
-          <p:cNvSpPr/>
-          <p:nvPr/>
-        </p:nvSpPr>
-        <p:spPr>
-          <a:xfrm>
-            <a:off x="548640" y="1874519"/>
-            <a:ext cx="3454400" cy="4114800"/>
-          </a:xfrm>
-          <a:prstGeom prst="roundRect">
-            <a:avLst/>
-          </a:prstGeom>
-          <a:solidFill>
-            <a:srgbClr val="FCEDEE"/>
-          </a:solidFill>
-          <a:ln>
-            <a:noFill/>
-          </a:ln>
-          <a:effectLst/>
-        </p:spPr>
-        <p:style>
-          <a:lnRef idx="1">
-            <a:schemeClr val="accent1"/>
-          </a:lnRef>
-          <a:fillRef idx="3">
-            <a:schemeClr val="accent1"/>
-          </a:fillRef>
-          <a:effectRef idx="2">
-            <a:schemeClr val="accent1"/>
-          </a:effectRef>
-          <a:fontRef idx="minor">
-            <a:schemeClr val="lt1"/>
-          </a:fontRef>
-        </p:style>
-        <p:txBody>
-          <a:bodyPr rtlCol="0" anchor="ctr"/>
-          <a:lstStyle/>
-          <a:p>
-            <a:pPr algn="ctr"/>
-          </a:p>
-        </p:txBody>
-      </p:sp>
+              <a:t>Mismo error, menos variables: 0,485 vs 0,521</a:t>
+            </a:r>
+          </a:p>
+        </p:txBody>
+      </p:sp>
+      <p:pic>
+        <p:nvPicPr>
+          <p:cNvPr id="4" name="Picture 3" descr="deck_mse_prostate.png"/>
+          <p:cNvPicPr>
+            <a:picLocks noChangeAspect="1"/>
+          </p:cNvPicPr>
+          <p:nvPr/>
+        </p:nvPicPr>
+        <p:blipFill>
+          <a:blip r:embed="rId2"/>
+          <a:stretch>
+            <a:fillRect/>
+          </a:stretch>
+        </p:blipFill>
+        <p:spPr>
+          <a:xfrm>
+            <a:off x="548640" y="1828800"/>
+            <a:ext cx="5758566" cy="3703320"/>
+          </a:xfrm>
+          <a:prstGeom prst="rect">
+            <a:avLst/>
+          </a:prstGeom>
+        </p:spPr>
+      </p:pic>
       <p:sp>
         <p:nvSpPr>
           <p:cNvPr id="5" name="Oval 4"/>
@@ -12166,8 +11995,8 @@
         </p:nvSpPr>
         <p:spPr>
           <a:xfrm>
-            <a:off x="777240" y="2103119"/>
-            <a:ext cx="640080" cy="640080"/>
+            <a:off x="7955279" y="2011680"/>
+            <a:ext cx="548640" cy="548640"/>
           </a:xfrm>
           <a:prstGeom prst="ellipse">
             <a:avLst/>
@@ -12195,848 +12024,6 @@
           </a:fontRef>
         </p:style>
         <p:txBody>
-          <a:bodyPr rtlCol="0" anchor="ctr" lIns="0" rIns="0" tIns="0" bIns="0"/>
-          <a:lstStyle/>
-          <a:p>
-            <a:pPr algn="ctr"/>
-            <a:r>
-              <a:rPr sz="2000" b="1">
-                <a:solidFill>
-                  <a:srgbClr val="FFFFFF"/>
-                </a:solidFill>
-                <a:latin typeface="Calibri"/>
-              </a:rPr>
-              <a:t>1</a:t>
-            </a:r>
-          </a:p>
-        </p:txBody>
-      </p:sp>
-      <p:sp>
-        <p:nvSpPr>
-          <p:cNvPr id="6" name="TextBox 5"/>
-          <p:cNvSpPr txBox="1"/>
-          <p:nvPr/>
-        </p:nvSpPr>
-        <p:spPr>
-          <a:xfrm>
-            <a:off x="777240" y="2926079"/>
-            <a:ext cx="2997200" cy="640080"/>
-          </a:xfrm>
-          <a:prstGeom prst="rect">
-            <a:avLst/>
-          </a:prstGeom>
-          <a:noFill/>
-        </p:spPr>
-        <p:txBody>
-          <a:bodyPr wrap="square" anchor="t" lIns="0" rIns="0" tIns="0" bIns="0">
-            <a:spAutoFit/>
-          </a:bodyPr>
-          <a:lstStyle/>
-          <a:p>
-            <a:pPr algn="l"/>
-            <a:r>
-              <a:rPr sz="1800" b="1">
-                <a:solidFill>
-                  <a:srgbClr val="9B1B30"/>
-                </a:solidFill>
-                <a:latin typeface="Calibri"/>
-              </a:rPr>
-              <a:t>Por qué no los subconjuntos</a:t>
-            </a:r>
-          </a:p>
-        </p:txBody>
-      </p:sp>
-      <p:sp>
-        <p:nvSpPr>
-          <p:cNvPr id="7" name="TextBox 6"/>
-          <p:cNvSpPr txBox="1"/>
-          <p:nvPr/>
-        </p:nvSpPr>
-        <p:spPr>
-          <a:xfrm>
-            <a:off x="777240" y="3611879"/>
-            <a:ext cx="2997200" cy="1645920"/>
-          </a:xfrm>
-          <a:prstGeom prst="rect">
-            <a:avLst/>
-          </a:prstGeom>
-          <a:noFill/>
-        </p:spPr>
-        <p:txBody>
-          <a:bodyPr wrap="square" anchor="t" lIns="0" rIns="0" tIns="0" bIns="0">
-            <a:spAutoFit/>
-          </a:bodyPr>
-          <a:lstStyle/>
-          <a:p>
-            <a:pPr algn="l">
-              <a:lnSpc>
-                <a:spcPct val="115000"/>
-              </a:lnSpc>
-            </a:pPr>
-            <a:r>
-              <a:rPr sz="1300" b="0">
-                <a:solidFill>
-                  <a:srgbClr val="2D2D2D"/>
-                </a:solidFill>
-                <a:latin typeface="Calibri"/>
-              </a:rPr>
-              <a:t>Proceso DISCRETO: cada regresor se retiene o se descarta. Cambios pequeños en los datos producen modelos muy distintos.</a:t>
-            </a:r>
-          </a:p>
-        </p:txBody>
-      </p:sp>
-      <p:sp>
-        <p:nvSpPr>
-          <p:cNvPr id="8" name="TextBox 7"/>
-          <p:cNvSpPr txBox="1"/>
-          <p:nvPr/>
-        </p:nvSpPr>
-        <p:spPr>
-          <a:xfrm>
-            <a:off x="777240" y="5303519"/>
-            <a:ext cx="2997200" cy="502920"/>
-          </a:xfrm>
-          <a:prstGeom prst="rect">
-            <a:avLst/>
-          </a:prstGeom>
-          <a:noFill/>
-        </p:spPr>
-        <p:txBody>
-          <a:bodyPr wrap="square" anchor="t" lIns="0" rIns="0" tIns="0" bIns="0">
-            <a:spAutoFit/>
-          </a:bodyPr>
-          <a:lstStyle/>
-          <a:p>
-            <a:pPr algn="l"/>
-            <a:r>
-              <a:rPr sz="1200" b="1">
-                <a:solidFill>
-                  <a:srgbClr val="9B1B30"/>
-                </a:solidFill>
-                <a:latin typeface="Calibri"/>
-              </a:rPr>
-              <a:t>Legible, pero de varianza alta</a:t>
-            </a:r>
-          </a:p>
-        </p:txBody>
-      </p:sp>
-      <p:sp>
-        <p:nvSpPr>
-          <p:cNvPr id="9" name="Rounded Rectangle 8"/>
-          <p:cNvSpPr/>
-          <p:nvPr/>
-        </p:nvSpPr>
-        <p:spPr>
-          <a:xfrm>
-            <a:off x="4368800" y="1874519"/>
-            <a:ext cx="3454400" cy="4114800"/>
-          </a:xfrm>
-          <a:prstGeom prst="roundRect">
-            <a:avLst/>
-          </a:prstGeom>
-          <a:solidFill>
-            <a:srgbClr val="FCEDEE"/>
-          </a:solidFill>
-          <a:ln>
-            <a:noFill/>
-          </a:ln>
-          <a:effectLst/>
-        </p:spPr>
-        <p:style>
-          <a:lnRef idx="1">
-            <a:schemeClr val="accent1"/>
-          </a:lnRef>
-          <a:fillRef idx="3">
-            <a:schemeClr val="accent1"/>
-          </a:fillRef>
-          <a:effectRef idx="2">
-            <a:schemeClr val="accent1"/>
-          </a:effectRef>
-          <a:fontRef idx="minor">
-            <a:schemeClr val="lt1"/>
-          </a:fontRef>
-        </p:style>
-        <p:txBody>
-          <a:bodyPr rtlCol="0" anchor="ctr"/>
-          <a:lstStyle/>
-          <a:p>
-            <a:pPr algn="ctr"/>
-          </a:p>
-        </p:txBody>
-      </p:sp>
-      <p:sp>
-        <p:nvSpPr>
-          <p:cNvPr id="10" name="Oval 9"/>
-          <p:cNvSpPr/>
-          <p:nvPr/>
-        </p:nvSpPr>
-        <p:spPr>
-          <a:xfrm>
-            <a:off x="4597400" y="2103119"/>
-            <a:ext cx="640080" cy="640080"/>
-          </a:xfrm>
-          <a:prstGeom prst="ellipse">
-            <a:avLst/>
-          </a:prstGeom>
-          <a:solidFill>
-            <a:srgbClr val="E4002B"/>
-          </a:solidFill>
-          <a:ln>
-            <a:noFill/>
-          </a:ln>
-          <a:effectLst/>
-        </p:spPr>
-        <p:style>
-          <a:lnRef idx="1">
-            <a:schemeClr val="accent1"/>
-          </a:lnRef>
-          <a:fillRef idx="3">
-            <a:schemeClr val="accent1"/>
-          </a:fillRef>
-          <a:effectRef idx="2">
-            <a:schemeClr val="accent1"/>
-          </a:effectRef>
-          <a:fontRef idx="minor">
-            <a:schemeClr val="lt1"/>
-          </a:fontRef>
-        </p:style>
-        <p:txBody>
-          <a:bodyPr rtlCol="0" anchor="ctr" lIns="0" rIns="0" tIns="0" bIns="0"/>
-          <a:lstStyle/>
-          <a:p>
-            <a:pPr algn="ctr"/>
-            <a:r>
-              <a:rPr sz="2000" b="1">
-                <a:solidFill>
-                  <a:srgbClr val="FFFFFF"/>
-                </a:solidFill>
-                <a:latin typeface="Calibri"/>
-              </a:rPr>
-              <a:t>2</a:t>
-            </a:r>
-          </a:p>
-        </p:txBody>
-      </p:sp>
-      <p:sp>
-        <p:nvSpPr>
-          <p:cNvPr id="11" name="TextBox 10"/>
-          <p:cNvSpPr txBox="1"/>
-          <p:nvPr/>
-        </p:nvSpPr>
-        <p:spPr>
-          <a:xfrm>
-            <a:off x="4597400" y="2926079"/>
-            <a:ext cx="2997200" cy="640080"/>
-          </a:xfrm>
-          <a:prstGeom prst="rect">
-            <a:avLst/>
-          </a:prstGeom>
-          <a:noFill/>
-        </p:spPr>
-        <p:txBody>
-          <a:bodyPr wrap="square" anchor="t" lIns="0" rIns="0" tIns="0" bIns="0">
-            <a:spAutoFit/>
-          </a:bodyPr>
-          <a:lstStyle/>
-          <a:p>
-            <a:pPr algn="l"/>
-            <a:r>
-              <a:rPr sz="1800" b="1">
-                <a:solidFill>
-                  <a:srgbClr val="9B1B30"/>
-                </a:solidFill>
-                <a:latin typeface="Calibri"/>
-              </a:rPr>
-              <a:t>Por qué no el Ridge</a:t>
-            </a:r>
-          </a:p>
-        </p:txBody>
-      </p:sp>
-      <p:sp>
-        <p:nvSpPr>
-          <p:cNvPr id="12" name="TextBox 11"/>
-          <p:cNvSpPr txBox="1"/>
-          <p:nvPr/>
-        </p:nvSpPr>
-        <p:spPr>
-          <a:xfrm>
-            <a:off x="4597400" y="3611879"/>
-            <a:ext cx="2997200" cy="1645920"/>
-          </a:xfrm>
-          <a:prstGeom prst="rect">
-            <a:avLst/>
-          </a:prstGeom>
-          <a:noFill/>
-        </p:spPr>
-        <p:txBody>
-          <a:bodyPr wrap="square" anchor="t" lIns="0" rIns="0" tIns="0" bIns="0">
-            <a:spAutoFit/>
-          </a:bodyPr>
-          <a:lstStyle/>
-          <a:p>
-            <a:pPr algn="l">
-              <a:lnSpc>
-                <a:spcPct val="115000"/>
-              </a:lnSpc>
-            </a:pPr>
-            <a:r>
-              <a:rPr sz="1300" b="0">
-                <a:solidFill>
-                  <a:srgbClr val="2D2D2D"/>
-                </a:solidFill>
-                <a:latin typeface="Calibri"/>
-              </a:rPr>
-              <a:t>Proceso CONTINUO: contrae y estabiliza, pero no lleva ningún coeficiente a cero exacto, así que no hay modelo que leer.</a:t>
-            </a:r>
-          </a:p>
-        </p:txBody>
-      </p:sp>
-      <p:sp>
-        <p:nvSpPr>
-          <p:cNvPr id="13" name="TextBox 12"/>
-          <p:cNvSpPr txBox="1"/>
-          <p:nvPr/>
-        </p:nvSpPr>
-        <p:spPr>
-          <a:xfrm>
-            <a:off x="4597400" y="5303519"/>
-            <a:ext cx="2997200" cy="502920"/>
-          </a:xfrm>
-          <a:prstGeom prst="rect">
-            <a:avLst/>
-          </a:prstGeom>
-          <a:noFill/>
-        </p:spPr>
-        <p:txBody>
-          <a:bodyPr wrap="square" anchor="t" lIns="0" rIns="0" tIns="0" bIns="0">
-            <a:spAutoFit/>
-          </a:bodyPr>
-          <a:lstStyle/>
-          <a:p>
-            <a:pPr algn="l"/>
-            <a:r>
-              <a:rPr sz="1200" b="1">
-                <a:solidFill>
-                  <a:srgbClr val="9B1B30"/>
-                </a:solidFill>
-                <a:latin typeface="Calibri"/>
-              </a:rPr>
-              <a:t>Estable, pero ilegible</a:t>
-            </a:r>
-          </a:p>
-        </p:txBody>
-      </p:sp>
-      <p:sp>
-        <p:nvSpPr>
-          <p:cNvPr id="14" name="Rounded Rectangle 13"/>
-          <p:cNvSpPr/>
-          <p:nvPr/>
-        </p:nvSpPr>
-        <p:spPr>
-          <a:xfrm>
-            <a:off x="8188960" y="1874519"/>
-            <a:ext cx="3454400" cy="4114800"/>
-          </a:xfrm>
-          <a:prstGeom prst="roundRect">
-            <a:avLst/>
-          </a:prstGeom>
-          <a:solidFill>
-            <a:srgbClr val="FCEDEE"/>
-          </a:solidFill>
-          <a:ln>
-            <a:noFill/>
-          </a:ln>
-          <a:effectLst/>
-        </p:spPr>
-        <p:style>
-          <a:lnRef idx="1">
-            <a:schemeClr val="accent1"/>
-          </a:lnRef>
-          <a:fillRef idx="3">
-            <a:schemeClr val="accent1"/>
-          </a:fillRef>
-          <a:effectRef idx="2">
-            <a:schemeClr val="accent1"/>
-          </a:effectRef>
-          <a:fontRef idx="minor">
-            <a:schemeClr val="lt1"/>
-          </a:fontRef>
-        </p:style>
-        <p:txBody>
-          <a:bodyPr rtlCol="0" anchor="ctr"/>
-          <a:lstStyle/>
-          <a:p>
-            <a:pPr algn="ctr"/>
-          </a:p>
-        </p:txBody>
-      </p:sp>
-      <p:sp>
-        <p:nvSpPr>
-          <p:cNvPr id="15" name="Oval 14"/>
-          <p:cNvSpPr/>
-          <p:nvPr/>
-        </p:nvSpPr>
-        <p:spPr>
-          <a:xfrm>
-            <a:off x="8417560" y="2103119"/>
-            <a:ext cx="640080" cy="640080"/>
-          </a:xfrm>
-          <a:prstGeom prst="ellipse">
-            <a:avLst/>
-          </a:prstGeom>
-          <a:solidFill>
-            <a:srgbClr val="E4002B"/>
-          </a:solidFill>
-          <a:ln>
-            <a:noFill/>
-          </a:ln>
-          <a:effectLst/>
-        </p:spPr>
-        <p:style>
-          <a:lnRef idx="1">
-            <a:schemeClr val="accent1"/>
-          </a:lnRef>
-          <a:fillRef idx="3">
-            <a:schemeClr val="accent1"/>
-          </a:fillRef>
-          <a:effectRef idx="2">
-            <a:schemeClr val="accent1"/>
-          </a:effectRef>
-          <a:fontRef idx="minor">
-            <a:schemeClr val="lt1"/>
-          </a:fontRef>
-        </p:style>
-        <p:txBody>
-          <a:bodyPr rtlCol="0" anchor="ctr" lIns="0" rIns="0" tIns="0" bIns="0"/>
-          <a:lstStyle/>
-          <a:p>
-            <a:pPr algn="ctr"/>
-            <a:r>
-              <a:rPr sz="2000" b="1">
-                <a:solidFill>
-                  <a:srgbClr val="FFFFFF"/>
-                </a:solidFill>
-                <a:latin typeface="Calibri"/>
-              </a:rPr>
-              <a:t>3</a:t>
-            </a:r>
-          </a:p>
-        </p:txBody>
-      </p:sp>
-      <p:sp>
-        <p:nvSpPr>
-          <p:cNvPr id="16" name="TextBox 15"/>
-          <p:cNvSpPr txBox="1"/>
-          <p:nvPr/>
-        </p:nvSpPr>
-        <p:spPr>
-          <a:xfrm>
-            <a:off x="8417560" y="2926079"/>
-            <a:ext cx="2997200" cy="640080"/>
-          </a:xfrm>
-          <a:prstGeom prst="rect">
-            <a:avLst/>
-          </a:prstGeom>
-          <a:noFill/>
-        </p:spPr>
-        <p:txBody>
-          <a:bodyPr wrap="square" anchor="t" lIns="0" rIns="0" tIns="0" bIns="0">
-            <a:spAutoFit/>
-          </a:bodyPr>
-          <a:lstStyle/>
-          <a:p>
-            <a:pPr algn="l"/>
-            <a:r>
-              <a:rPr sz="1800" b="1">
-                <a:solidFill>
-                  <a:srgbClr val="9B1B30"/>
-                </a:solidFill>
-                <a:latin typeface="Calibri"/>
-              </a:rPr>
-              <a:t>Por qué tampoco el garrote</a:t>
-            </a:r>
-          </a:p>
-        </p:txBody>
-      </p:sp>
-      <p:sp>
-        <p:nvSpPr>
-          <p:cNvPr id="17" name="TextBox 16"/>
-          <p:cNvSpPr txBox="1"/>
-          <p:nvPr/>
-        </p:nvSpPr>
-        <p:spPr>
-          <a:xfrm>
-            <a:off x="8417560" y="3611879"/>
-            <a:ext cx="2997200" cy="1645920"/>
-          </a:xfrm>
-          <a:prstGeom prst="rect">
-            <a:avLst/>
-          </a:prstGeom>
-          <a:noFill/>
-        </p:spPr>
-        <p:txBody>
-          <a:bodyPr wrap="square" anchor="t" lIns="0" rIns="0" tIns="0" bIns="0">
-            <a:spAutoFit/>
-          </a:bodyPr>
-          <a:lstStyle/>
-          <a:p>
-            <a:pPr algn="l">
-              <a:lnSpc>
-                <a:spcPct val="115000"/>
-              </a:lnSpc>
-            </a:pPr>
-            <a:r>
-              <a:rPr sz="1300" b="0">
-                <a:solidFill>
-                  <a:srgbClr val="2D2D2D"/>
-                </a:solidFill>
-                <a:latin typeface="Calibri"/>
-              </a:rPr>
-              <a:t>Breiman ya contraía Y anulaba en 1995, pero REESCALA los coeficientes del OLS: hereda su mal comportamiento donde más se quiere regularizar.</a:t>
-            </a:r>
-          </a:p>
-        </p:txBody>
-      </p:sp>
-      <p:sp>
-        <p:nvSpPr>
-          <p:cNvPr id="18" name="TextBox 17"/>
-          <p:cNvSpPr txBox="1"/>
-          <p:nvPr/>
-        </p:nvSpPr>
-        <p:spPr>
-          <a:xfrm>
-            <a:off x="8417560" y="5303519"/>
-            <a:ext cx="2997200" cy="502920"/>
-          </a:xfrm>
-          <a:prstGeom prst="rect">
-            <a:avLst/>
-          </a:prstGeom>
-          <a:noFill/>
-        </p:spPr>
-        <p:txBody>
-          <a:bodyPr wrap="square" anchor="t" lIns="0" rIns="0" tIns="0" bIns="0">
-            <a:spAutoFit/>
-          </a:bodyPr>
-          <a:lstStyle/>
-          <a:p>
-            <a:pPr algn="l"/>
-            <a:r>
-              <a:rPr sz="1200" b="1">
-                <a:solidFill>
-                  <a:srgbClr val="9B1B30"/>
-                </a:solidFill>
-                <a:latin typeface="Calibri"/>
-              </a:rPr>
-              <a:t>El LASSO no parte del OLS</a:t>
-            </a:r>
-          </a:p>
-        </p:txBody>
-      </p:sp>
-      <p:sp>
-        <p:nvSpPr>
-          <p:cNvPr id="19" name="TextBox 18"/>
-          <p:cNvSpPr txBox="1"/>
-          <p:nvPr/>
-        </p:nvSpPr>
-        <p:spPr>
-          <a:xfrm>
-            <a:off x="548640" y="5870448"/>
-            <a:ext cx="10607040" cy="292608"/>
-          </a:xfrm>
-          <a:prstGeom prst="rect">
-            <a:avLst/>
-          </a:prstGeom>
-          <a:noFill/>
-        </p:spPr>
-        <p:txBody>
-          <a:bodyPr wrap="square">
-            <a:spAutoFit/>
-          </a:bodyPr>
-          <a:lstStyle/>
-          <a:p>
-            <a:r>
-              <a:rPr sz="1000">
-                <a:solidFill>
-                  <a:srgbClr val="6E6E6E"/>
-                </a:solidFill>
-                <a:latin typeface="Calibri"/>
-              </a:rPr>
-              <a:t>Decisiones documentadas en el original: REPLICACION_PAPER «Sección 0.3» (Tibshirani 1996, Sección 1, pp. 267-268; Breiman 1995).</a:t>
-            </a:r>
-          </a:p>
-        </p:txBody>
-      </p:sp>
-      <p:sp>
-        <p:nvSpPr>
-          <p:cNvPr id="20" name="Oval 19"/>
-          <p:cNvSpPr/>
-          <p:nvPr/>
-        </p:nvSpPr>
-        <p:spPr>
-          <a:xfrm>
-            <a:off x="548640" y="6473952"/>
-            <a:ext cx="100584" cy="100584"/>
-          </a:xfrm>
-          <a:prstGeom prst="ellipse">
-            <a:avLst/>
-          </a:prstGeom>
-          <a:solidFill>
-            <a:srgbClr val="E4002B"/>
-          </a:solidFill>
-          <a:ln>
-            <a:noFill/>
-          </a:ln>
-          <a:effectLst/>
-        </p:spPr>
-        <p:style>
-          <a:lnRef idx="1">
-            <a:schemeClr val="accent1"/>
-          </a:lnRef>
-          <a:fillRef idx="3">
-            <a:schemeClr val="accent1"/>
-          </a:fillRef>
-          <a:effectRef idx="2">
-            <a:schemeClr val="accent1"/>
-          </a:effectRef>
-          <a:fontRef idx="minor">
-            <a:schemeClr val="lt1"/>
-          </a:fontRef>
-        </p:style>
-        <p:txBody>
-          <a:bodyPr rtlCol="0" anchor="ctr"/>
-          <a:lstStyle/>
-          <a:p>
-            <a:pPr algn="ctr"/>
-          </a:p>
-        </p:txBody>
-      </p:sp>
-      <p:sp>
-        <p:nvSpPr>
-          <p:cNvPr id="21" name="TextBox 20"/>
-          <p:cNvSpPr txBox="1"/>
-          <p:nvPr/>
-        </p:nvSpPr>
-        <p:spPr>
-          <a:xfrm>
-            <a:off x="749808" y="6437376"/>
-            <a:ext cx="7772400" cy="274320"/>
-          </a:xfrm>
-          <a:prstGeom prst="rect">
-            <a:avLst/>
-          </a:prstGeom>
-          <a:noFill/>
-        </p:spPr>
-        <p:txBody>
-          <a:bodyPr wrap="square" anchor="t" lIns="0" rIns="0" tIns="0" bIns="0">
-            <a:spAutoFit/>
-          </a:bodyPr>
-          <a:lstStyle/>
-          <a:p>
-            <a:pPr algn="l"/>
-            <a:r>
-              <a:rPr sz="900" b="0">
-                <a:solidFill>
-                  <a:srgbClr val="6E6E6E"/>
-                </a:solidFill>
-                <a:latin typeface="Calibri"/>
-              </a:rPr>
-              <a:t>S05 — Herramientas para la Ciencia de Datos, UPC</a:t>
-            </a:r>
-          </a:p>
-        </p:txBody>
-      </p:sp>
-      <p:sp>
-        <p:nvSpPr>
-          <p:cNvPr id="22" name="TextBox 21"/>
-          <p:cNvSpPr txBox="1"/>
-          <p:nvPr/>
-        </p:nvSpPr>
-        <p:spPr>
-          <a:xfrm>
-            <a:off x="10180320" y="6437376"/>
-            <a:ext cx="1463040" cy="274320"/>
-          </a:xfrm>
-          <a:prstGeom prst="rect">
-            <a:avLst/>
-          </a:prstGeom>
-          <a:noFill/>
-        </p:spPr>
-        <p:txBody>
-          <a:bodyPr wrap="square" anchor="t" lIns="0" rIns="0" tIns="0" bIns="0">
-            <a:spAutoFit/>
-          </a:bodyPr>
-          <a:lstStyle/>
-          <a:p>
-            <a:pPr algn="r"/>
-            <a:r>
-              <a:rPr sz="900" b="0">
-                <a:solidFill>
-                  <a:srgbClr val="6E6E6E"/>
-                </a:solidFill>
-                <a:latin typeface="Calibri"/>
-              </a:rPr>
-              <a:t>22 / 26</a:t>
-            </a:r>
-          </a:p>
-        </p:txBody>
-      </p:sp>
-    </p:spTree>
-  </p:cSld>
-  <p:clrMapOvr>
-    <a:masterClrMapping/>
-  </p:clrMapOvr>
-</p:sld>
-</file>
-
-<file path=ppt/slides/slide23.xml><?xml version="1.0" encoding="utf-8"?>
-<p:sld xmlns:a="http://schemas.openxmlformats.org/drawingml/2006/main" xmlns:p="http://schemas.openxmlformats.org/presentationml/2006/main" xmlns:r="http://schemas.openxmlformats.org/officeDocument/2006/relationships">
-  <p:cSld>
-    <p:bg>
-      <p:bgPr>
-        <a:solidFill>
-          <a:srgbClr val="FFFFFF"/>
-        </a:solidFill>
-        <a:effectLst/>
-      </p:bgPr>
-    </p:bg>
-    <p:spTree>
-      <p:nvGrpSpPr>
-        <p:cNvPr id="1" name=""/>
-        <p:cNvGrpSpPr/>
-        <p:nvPr/>
-      </p:nvGrpSpPr>
-      <p:grpSpPr/>
-      <p:sp>
-        <p:nvSpPr>
-          <p:cNvPr id="2" name="TextBox 1"/>
-          <p:cNvSpPr txBox="1"/>
-          <p:nvPr/>
-        </p:nvSpPr>
-        <p:spPr>
-          <a:xfrm>
-            <a:off x="548640" y="411480"/>
-            <a:ext cx="11094720" cy="292608"/>
-          </a:xfrm>
-          <a:prstGeom prst="rect">
-            <a:avLst/>
-          </a:prstGeom>
-          <a:noFill/>
-        </p:spPr>
-        <p:txBody>
-          <a:bodyPr wrap="square" anchor="t" lIns="0" rIns="0" tIns="0" bIns="0">
-            <a:spAutoFit/>
-          </a:bodyPr>
-          <a:lstStyle/>
-          <a:p>
-            <a:pPr algn="l"/>
-            <a:r>
-              <a:rPr sz="1300" b="1">
-                <a:solidFill>
-                  <a:srgbClr val="9B1B30"/>
-                </a:solidFill>
-                <a:latin typeface="Calibri"/>
-              </a:rPr>
-              <a:t>CAMINO DEL LASSO — RÉPLICA PROSTATE</a:t>
-            </a:r>
-          </a:p>
-        </p:txBody>
-      </p:sp>
-      <p:sp>
-        <p:nvSpPr>
-          <p:cNvPr id="3" name="TextBox 2"/>
-          <p:cNvSpPr txBox="1"/>
-          <p:nvPr/>
-        </p:nvSpPr>
-        <p:spPr>
-          <a:xfrm>
-            <a:off x="548640" y="731520"/>
-            <a:ext cx="11094720" cy="777240"/>
-          </a:xfrm>
-          <a:prstGeom prst="rect">
-            <a:avLst/>
-          </a:prstGeom>
-          <a:noFill/>
-        </p:spPr>
-        <p:txBody>
-          <a:bodyPr wrap="square" anchor="t" lIns="0" rIns="0" tIns="0" bIns="0">
-            <a:spAutoFit/>
-          </a:bodyPr>
-          <a:lstStyle/>
-          <a:p>
-            <a:pPr algn="l"/>
-            <a:r>
-              <a:rPr sz="4000" b="1">
-                <a:solidFill>
-                  <a:srgbClr val="2D2D2D"/>
-                </a:solidFill>
-                <a:latin typeface="Calibri"/>
-              </a:rPr>
-              <a:t>lcavol resiste; cinco variables caen a cero</a:t>
-            </a:r>
-          </a:p>
-        </p:txBody>
-      </p:sp>
-      <p:pic>
-        <p:nvPicPr>
-          <p:cNvPr id="4" name="Picture 3" descr="deck_lasso_path.png"/>
-          <p:cNvPicPr>
-            <a:picLocks noChangeAspect="1"/>
-          </p:cNvPicPr>
-          <p:nvPr/>
-        </p:nvPicPr>
-        <p:blipFill>
-          <a:blip r:embed="rId2"/>
-          <a:stretch>
-            <a:fillRect/>
-          </a:stretch>
-        </p:blipFill>
-        <p:spPr>
-          <a:xfrm>
-            <a:off x="548640" y="1828800"/>
-            <a:ext cx="5484707" cy="3703320"/>
-          </a:xfrm>
-          <a:prstGeom prst="rect">
-            <a:avLst/>
-          </a:prstGeom>
-        </p:spPr>
-      </p:pic>
-      <p:sp>
-        <p:nvSpPr>
-          <p:cNvPr id="5" name="Oval 4"/>
-          <p:cNvSpPr/>
-          <p:nvPr/>
-        </p:nvSpPr>
-        <p:spPr>
-          <a:xfrm>
-            <a:off x="7955279" y="2011680"/>
-            <a:ext cx="548640" cy="548640"/>
-          </a:xfrm>
-          <a:prstGeom prst="ellipse">
-            <a:avLst/>
-          </a:prstGeom>
-          <a:solidFill>
-            <a:srgbClr val="E4002B"/>
-          </a:solidFill>
-          <a:ln>
-            <a:noFill/>
-          </a:ln>
-          <a:effectLst/>
-        </p:spPr>
-        <p:style>
-          <a:lnRef idx="1">
-            <a:schemeClr val="accent1"/>
-          </a:lnRef>
-          <a:fillRef idx="3">
-            <a:schemeClr val="accent1"/>
-          </a:fillRef>
-          <a:effectRef idx="2">
-            <a:schemeClr val="accent1"/>
-          </a:effectRef>
-          <a:fontRef idx="minor">
-            <a:schemeClr val="lt1"/>
-          </a:fontRef>
-        </p:style>
-        <p:txBody>
           <a:bodyPr rtlCol="0" anchor="ctr"/>
           <a:lstStyle/>
           <a:p>
@@ -13137,7 +12124,7 @@
                 </a:solidFill>
                 <a:latin typeface="Calibri"/>
               </a:rPr>
-              <a:t>lcavol resiste hasta el final; 5 variables caen a 0. El LASSO deja 3: lcavol, lweight, svi. Coef. OLS de lcavol = 0,676.</a:t>
+              <a:t>El LASSO iguala el error del OLS, 0,485, con λ 0,2203 y solo 3 variables: dentro del ruido, prevalece la parsimonia.</a:t>
             </a:r>
           </a:p>
         </p:txBody>
@@ -13172,7 +12159,7 @@
                 </a:solidFill>
                 <a:latin typeface="Calibri"/>
               </a:rPr>
-              <a:t>resultados/S05_resultados.xlsx!paths (venv, 101 λ × 8 predictores). Réplica de Tibshirani (1996) / ESL Tabla 3.3.</a:t>
+              <a:t>resultados/S05_resultados.xlsx!comparacion_modelos (venv, MSE de prueba n=30). Reemplaza el array cableado del piloto.</a:t>
             </a:r>
           </a:p>
         </p:txBody>
@@ -13227,7 +12214,7 @@
                 </a:solidFill>
                 <a:latin typeface="Calibri"/>
               </a:rPr>
-              <a:t>▶  Notebook, Sección 6.2, celda 120</a:t>
+              <a:t>▶  Notebook, Sección 6.2, celda 118</a:t>
             </a:r>
           </a:p>
         </p:txBody>
@@ -13341,7 +12328,7 @@
                 </a:solidFill>
                 <a:latin typeface="Calibri"/>
               </a:rPr>
-              <a:t>23 / 26</a:t>
+              <a:t>20 / 22</a:t>
             </a:r>
           </a:p>
         </p:txBody>
@@ -13354,473 +12341,7 @@
 </p:sld>
 </file>
 
-<file path=ppt/slides/slide24.xml><?xml version="1.0" encoding="utf-8"?>
-<p:sld xmlns:a="http://schemas.openxmlformats.org/drawingml/2006/main" xmlns:p="http://schemas.openxmlformats.org/presentationml/2006/main" xmlns:r="http://schemas.openxmlformats.org/officeDocument/2006/relationships">
-  <p:cSld>
-    <p:bg>
-      <p:bgPr>
-        <a:solidFill>
-          <a:srgbClr val="FFFFFF"/>
-        </a:solidFill>
-        <a:effectLst/>
-      </p:bgPr>
-    </p:bg>
-    <p:spTree>
-      <p:nvGrpSpPr>
-        <p:cNvPr id="1" name=""/>
-        <p:cNvGrpSpPr/>
-        <p:nvPr/>
-      </p:nvGrpSpPr>
-      <p:grpSpPr/>
-      <p:sp>
-        <p:nvSpPr>
-          <p:cNvPr id="2" name="TextBox 1"/>
-          <p:cNvSpPr txBox="1"/>
-          <p:nvPr/>
-        </p:nvSpPr>
-        <p:spPr>
-          <a:xfrm>
-            <a:off x="548640" y="411480"/>
-            <a:ext cx="11094720" cy="292608"/>
-          </a:xfrm>
-          <a:prstGeom prst="rect">
-            <a:avLst/>
-          </a:prstGeom>
-          <a:noFill/>
-        </p:spPr>
-        <p:txBody>
-          <a:bodyPr wrap="square" anchor="t" lIns="0" rIns="0" tIns="0" bIns="0">
-            <a:spAutoFit/>
-          </a:bodyPr>
-          <a:lstStyle/>
-          <a:p>
-            <a:pPr algn="l"/>
-            <a:r>
-              <a:rPr sz="1300" b="1">
-                <a:solidFill>
-                  <a:srgbClr val="9B1B30"/>
-                </a:solidFill>
-                <a:latin typeface="Calibri"/>
-              </a:rPr>
-              <a:t>ERROR DE PRUEBA EN PROSTATE — DENTRO DE ~1 SE</a:t>
-            </a:r>
-          </a:p>
-        </p:txBody>
-      </p:sp>
-      <p:sp>
-        <p:nvSpPr>
-          <p:cNvPr id="3" name="TextBox 2"/>
-          <p:cNvSpPr txBox="1"/>
-          <p:nvPr/>
-        </p:nvSpPr>
-        <p:spPr>
-          <a:xfrm>
-            <a:off x="548640" y="731520"/>
-            <a:ext cx="11094720" cy="777240"/>
-          </a:xfrm>
-          <a:prstGeom prst="rect">
-            <a:avLst/>
-          </a:prstGeom>
-          <a:noFill/>
-        </p:spPr>
-        <p:txBody>
-          <a:bodyPr wrap="square" anchor="t" lIns="0" rIns="0" tIns="0" bIns="0">
-            <a:spAutoFit/>
-          </a:bodyPr>
-          <a:lstStyle/>
-          <a:p>
-            <a:pPr algn="l"/>
-            <a:r>
-              <a:rPr sz="4000" b="1">
-                <a:solidFill>
-                  <a:srgbClr val="2D2D2D"/>
-                </a:solidFill>
-                <a:latin typeface="Calibri"/>
-              </a:rPr>
-              <a:t>Mismo error, menos variables: 0,485 vs 0,521</a:t>
-            </a:r>
-          </a:p>
-        </p:txBody>
-      </p:sp>
-      <p:pic>
-        <p:nvPicPr>
-          <p:cNvPr id="4" name="Picture 3" descr="deck_mse_prostate.png"/>
-          <p:cNvPicPr>
-            <a:picLocks noChangeAspect="1"/>
-          </p:cNvPicPr>
-          <p:nvPr/>
-        </p:nvPicPr>
-        <p:blipFill>
-          <a:blip r:embed="rId2"/>
-          <a:stretch>
-            <a:fillRect/>
-          </a:stretch>
-        </p:blipFill>
-        <p:spPr>
-          <a:xfrm>
-            <a:off x="548640" y="1828800"/>
-            <a:ext cx="5758566" cy="3703320"/>
-          </a:xfrm>
-          <a:prstGeom prst="rect">
-            <a:avLst/>
-          </a:prstGeom>
-        </p:spPr>
-      </p:pic>
-      <p:sp>
-        <p:nvSpPr>
-          <p:cNvPr id="5" name="Oval 4"/>
-          <p:cNvSpPr/>
-          <p:nvPr/>
-        </p:nvSpPr>
-        <p:spPr>
-          <a:xfrm>
-            <a:off x="7955279" y="2011680"/>
-            <a:ext cx="548640" cy="548640"/>
-          </a:xfrm>
-          <a:prstGeom prst="ellipse">
-            <a:avLst/>
-          </a:prstGeom>
-          <a:solidFill>
-            <a:srgbClr val="E4002B"/>
-          </a:solidFill>
-          <a:ln>
-            <a:noFill/>
-          </a:ln>
-          <a:effectLst/>
-        </p:spPr>
-        <p:style>
-          <a:lnRef idx="1">
-            <a:schemeClr val="accent1"/>
-          </a:lnRef>
-          <a:fillRef idx="3">
-            <a:schemeClr val="accent1"/>
-          </a:fillRef>
-          <a:effectRef idx="2">
-            <a:schemeClr val="accent1"/>
-          </a:effectRef>
-          <a:fontRef idx="minor">
-            <a:schemeClr val="lt1"/>
-          </a:fontRef>
-        </p:style>
-        <p:txBody>
-          <a:bodyPr rtlCol="0" anchor="ctr"/>
-          <a:lstStyle/>
-          <a:p>
-            <a:pPr algn="ctr"/>
-          </a:p>
-        </p:txBody>
-      </p:sp>
-      <p:pic>
-        <p:nvPicPr>
-          <p:cNvPr id="6" name="Picture 5" descr="lightbulb__FFFFFF.png"/>
-          <p:cNvPicPr>
-            <a:picLocks noChangeAspect="1"/>
-          </p:cNvPicPr>
-          <p:nvPr/>
-        </p:nvPicPr>
-        <p:blipFill>
-          <a:blip r:embed="rId3"/>
-          <a:stretch>
-            <a:fillRect/>
-          </a:stretch>
-        </p:blipFill>
-        <p:spPr>
-          <a:xfrm>
-            <a:off x="8108898" y="2165299"/>
-            <a:ext cx="241402" cy="241402"/>
-          </a:xfrm>
-          <a:prstGeom prst="rect">
-            <a:avLst/>
-          </a:prstGeom>
-        </p:spPr>
-      </p:pic>
-      <p:sp>
-        <p:nvSpPr>
-          <p:cNvPr id="7" name="TextBox 6"/>
-          <p:cNvSpPr txBox="1"/>
-          <p:nvPr/>
-        </p:nvSpPr>
-        <p:spPr>
-          <a:xfrm>
-            <a:off x="8686800" y="2057400"/>
-            <a:ext cx="2926080" cy="548640"/>
-          </a:xfrm>
-          <a:prstGeom prst="rect">
-            <a:avLst/>
-          </a:prstGeom>
-          <a:noFill/>
-        </p:spPr>
-        <p:txBody>
-          <a:bodyPr wrap="square" anchor="t" lIns="0" rIns="0" tIns="0" bIns="0">
-            <a:spAutoFit/>
-          </a:bodyPr>
-          <a:lstStyle/>
-          <a:p>
-            <a:pPr algn="l"/>
-            <a:r>
-              <a:rPr sz="1500" b="1">
-                <a:solidFill>
-                  <a:srgbClr val="9B1B30"/>
-                </a:solidFill>
-                <a:latin typeface="Calibri"/>
-              </a:rPr>
-              <a:t>Lectura de negocio</a:t>
-            </a:r>
-          </a:p>
-        </p:txBody>
-      </p:sp>
-      <p:sp>
-        <p:nvSpPr>
-          <p:cNvPr id="8" name="TextBox 7"/>
-          <p:cNvSpPr txBox="1"/>
-          <p:nvPr/>
-        </p:nvSpPr>
-        <p:spPr>
-          <a:xfrm>
-            <a:off x="7955279" y="2880360"/>
-            <a:ext cx="3657600" cy="3108960"/>
-          </a:xfrm>
-          <a:prstGeom prst="rect">
-            <a:avLst/>
-          </a:prstGeom>
-          <a:noFill/>
-        </p:spPr>
-        <p:txBody>
-          <a:bodyPr wrap="square" anchor="t" lIns="0" rIns="0" tIns="0" bIns="0">
-            <a:spAutoFit/>
-          </a:bodyPr>
-          <a:lstStyle/>
-          <a:p>
-            <a:pPr algn="l">
-              <a:lnSpc>
-                <a:spcPct val="125000"/>
-              </a:lnSpc>
-            </a:pPr>
-            <a:r>
-              <a:rPr sz="1500" b="0">
-                <a:solidFill>
-                  <a:srgbClr val="2D2D2D"/>
-                </a:solidFill>
-                <a:latin typeface="Calibri"/>
-              </a:rPr>
-              <a:t>El LASSO iguala el error del OLS, 0,485, con λ 0,2203 y solo 3 variables: dentro del ruido, prevalece la parsimonia.</a:t>
-            </a:r>
-          </a:p>
-        </p:txBody>
-      </p:sp>
-      <p:sp>
-        <p:nvSpPr>
-          <p:cNvPr id="9" name="TextBox 8"/>
-          <p:cNvSpPr txBox="1"/>
-          <p:nvPr/>
-        </p:nvSpPr>
-        <p:spPr>
-          <a:xfrm>
-            <a:off x="548640" y="5961888"/>
-            <a:ext cx="11094720" cy="292608"/>
-          </a:xfrm>
-          <a:prstGeom prst="rect">
-            <a:avLst/>
-          </a:prstGeom>
-          <a:noFill/>
-        </p:spPr>
-        <p:txBody>
-          <a:bodyPr wrap="square" anchor="t" lIns="0" rIns="0" tIns="0" bIns="0">
-            <a:spAutoFit/>
-          </a:bodyPr>
-          <a:lstStyle/>
-          <a:p>
-            <a:pPr algn="l"/>
-            <a:r>
-              <a:rPr sz="1000" b="0">
-                <a:solidFill>
-                  <a:srgbClr val="6E6E6E"/>
-                </a:solidFill>
-                <a:latin typeface="Calibri"/>
-              </a:rPr>
-              <a:t>resultados/S05_resultados.xlsx!comparacion_modelos (venv, MSE de prueba n=30). Reemplaza el array cableado del piloto.</a:t>
-            </a:r>
-          </a:p>
-        </p:txBody>
-      </p:sp>
-      <p:sp>
-        <p:nvSpPr>
-          <p:cNvPr id="10" name="Rounded Rectangle 9"/>
-          <p:cNvSpPr/>
-          <p:nvPr/>
-        </p:nvSpPr>
-        <p:spPr>
-          <a:xfrm>
-            <a:off x="8458200" y="301752"/>
-            <a:ext cx="3200400" cy="402336"/>
-          </a:xfrm>
-          <a:prstGeom prst="roundRect">
-            <a:avLst/>
-          </a:prstGeom>
-          <a:solidFill>
-            <a:srgbClr val="FCEDEE"/>
-          </a:solidFill>
-          <a:ln w="15875">
-            <a:solidFill>
-              <a:srgbClr val="E4002B"/>
-            </a:solidFill>
-          </a:ln>
-          <a:effectLst/>
-        </p:spPr>
-        <p:style>
-          <a:lnRef idx="1">
-            <a:schemeClr val="accent1"/>
-          </a:lnRef>
-          <a:fillRef idx="3">
-            <a:schemeClr val="accent1"/>
-          </a:fillRef>
-          <a:effectRef idx="2">
-            <a:schemeClr val="accent1"/>
-          </a:effectRef>
-          <a:fontRef idx="minor">
-            <a:schemeClr val="lt1"/>
-          </a:fontRef>
-        </p:style>
-        <p:txBody>
-          <a:bodyPr rtlCol="0" anchor="ctr" lIns="54864" rIns="54864" tIns="0" bIns="0"/>
-          <a:lstStyle/>
-          <a:p>
-            <a:pPr algn="ctr"/>
-            <a:r>
-              <a:rPr sz="1300" b="1">
-                <a:solidFill>
-                  <a:srgbClr val="9B1B30"/>
-                </a:solidFill>
-                <a:latin typeface="Calibri"/>
-              </a:rPr>
-              <a:t>▶  Notebook, Sección 6.2, celda 118</a:t>
-            </a:r>
-          </a:p>
-        </p:txBody>
-      </p:sp>
-      <p:sp>
-        <p:nvSpPr>
-          <p:cNvPr id="11" name="Oval 10"/>
-          <p:cNvSpPr/>
-          <p:nvPr/>
-        </p:nvSpPr>
-        <p:spPr>
-          <a:xfrm>
-            <a:off x="548640" y="6473952"/>
-            <a:ext cx="100584" cy="100584"/>
-          </a:xfrm>
-          <a:prstGeom prst="ellipse">
-            <a:avLst/>
-          </a:prstGeom>
-          <a:solidFill>
-            <a:srgbClr val="E4002B"/>
-          </a:solidFill>
-          <a:ln>
-            <a:noFill/>
-          </a:ln>
-          <a:effectLst/>
-        </p:spPr>
-        <p:style>
-          <a:lnRef idx="1">
-            <a:schemeClr val="accent1"/>
-          </a:lnRef>
-          <a:fillRef idx="3">
-            <a:schemeClr val="accent1"/>
-          </a:fillRef>
-          <a:effectRef idx="2">
-            <a:schemeClr val="accent1"/>
-          </a:effectRef>
-          <a:fontRef idx="minor">
-            <a:schemeClr val="lt1"/>
-          </a:fontRef>
-        </p:style>
-        <p:txBody>
-          <a:bodyPr rtlCol="0" anchor="ctr"/>
-          <a:lstStyle/>
-          <a:p>
-            <a:pPr algn="ctr"/>
-          </a:p>
-        </p:txBody>
-      </p:sp>
-      <p:sp>
-        <p:nvSpPr>
-          <p:cNvPr id="12" name="TextBox 11"/>
-          <p:cNvSpPr txBox="1"/>
-          <p:nvPr/>
-        </p:nvSpPr>
-        <p:spPr>
-          <a:xfrm>
-            <a:off x="749808" y="6437376"/>
-            <a:ext cx="7772400" cy="274320"/>
-          </a:xfrm>
-          <a:prstGeom prst="rect">
-            <a:avLst/>
-          </a:prstGeom>
-          <a:noFill/>
-        </p:spPr>
-        <p:txBody>
-          <a:bodyPr wrap="square" anchor="t" lIns="0" rIns="0" tIns="0" bIns="0">
-            <a:spAutoFit/>
-          </a:bodyPr>
-          <a:lstStyle/>
-          <a:p>
-            <a:pPr algn="l"/>
-            <a:r>
-              <a:rPr sz="900" b="0">
-                <a:solidFill>
-                  <a:srgbClr val="6E6E6E"/>
-                </a:solidFill>
-                <a:latin typeface="Calibri"/>
-              </a:rPr>
-              <a:t>S05 — Herramientas para la Ciencia de Datos, UPC</a:t>
-            </a:r>
-          </a:p>
-        </p:txBody>
-      </p:sp>
-      <p:sp>
-        <p:nvSpPr>
-          <p:cNvPr id="13" name="TextBox 12"/>
-          <p:cNvSpPr txBox="1"/>
-          <p:nvPr/>
-        </p:nvSpPr>
-        <p:spPr>
-          <a:xfrm>
-            <a:off x="10180320" y="6437376"/>
-            <a:ext cx="1463040" cy="274320"/>
-          </a:xfrm>
-          <a:prstGeom prst="rect">
-            <a:avLst/>
-          </a:prstGeom>
-          <a:noFill/>
-        </p:spPr>
-        <p:txBody>
-          <a:bodyPr wrap="square" anchor="t" lIns="0" rIns="0" tIns="0" bIns="0">
-            <a:spAutoFit/>
-          </a:bodyPr>
-          <a:lstStyle/>
-          <a:p>
-            <a:pPr algn="r"/>
-            <a:r>
-              <a:rPr sz="900" b="0">
-                <a:solidFill>
-                  <a:srgbClr val="6E6E6E"/>
-                </a:solidFill>
-                <a:latin typeface="Calibri"/>
-              </a:rPr>
-              <a:t>24 / 26</a:t>
-            </a:r>
-          </a:p>
-        </p:txBody>
-      </p:sp>
-    </p:spTree>
-  </p:cSld>
-  <p:clrMapOvr>
-    <a:masterClrMapping/>
-  </p:clrMapOvr>
-</p:sld>
-</file>
-
-<file path=ppt/slides/slide25.xml><?xml version="1.0" encoding="utf-8"?>
+<file path=ppt/slides/slide21.xml><?xml version="1.0" encoding="utf-8"?>
 <p:sld xmlns:a="http://schemas.openxmlformats.org/drawingml/2006/main" xmlns:p="http://schemas.openxmlformats.org/presentationml/2006/main" xmlns:r="http://schemas.openxmlformats.org/officeDocument/2006/relationships">
   <p:cSld>
     <p:bg>
@@ -14809,7 +13330,7 @@
                 </a:solidFill>
                 <a:latin typeface="Calibri"/>
               </a:rPr>
-              <a:t>25 / 26</a:t>
+              <a:t>21 / 22</a:t>
             </a:r>
           </a:p>
         </p:txBody>
@@ -14822,7 +13343,7 @@
 </p:sld>
 </file>
 
-<file path=ppt/slides/slide26.xml><?xml version="1.0" encoding="utf-8"?>
+<file path=ppt/slides/slide22.xml><?xml version="1.0" encoding="utf-8"?>
 <p:sld xmlns:a="http://schemas.openxmlformats.org/drawingml/2006/main" xmlns:p="http://schemas.openxmlformats.org/presentationml/2006/main" xmlns:r="http://schemas.openxmlformats.org/officeDocument/2006/relationships">
   <p:cSld>
     <p:bg>
@@ -15634,7 +14155,7 @@
                 </a:solidFill>
                 <a:latin typeface="Calibri"/>
               </a:rPr>
-              <a:t>26 / 26</a:t>
+              <a:t>22 / 22</a:t>
             </a:r>
           </a:p>
         </p:txBody>
@@ -15748,7 +14269,7 @@
                 </a:solidFill>
                 <a:latin typeface="Calibri"/>
               </a:rPr>
-              <a:t>Capítulo 5.1</a:t>
+              <a:t>El problema</a:t>
             </a:r>
           </a:p>
         </p:txBody>
@@ -15783,7 +14304,7 @@
                 </a:solidFill>
                 <a:latin typeface="Calibri"/>
               </a:rPr>
-              <a:t>¿Por qué el OLS pierde eficacia con un número elevado de variables?</a:t>
+              <a:t>Por qué el OLS falla cuando hay muchas variables</a:t>
             </a:r>
           </a:p>
         </p:txBody>
@@ -16273,7 +14794,7 @@
                 </a:solidFill>
                 <a:latin typeface="Calibri"/>
               </a:rPr>
-              <a:t>4 / 26</a:t>
+              <a:t>4 / 22</a:t>
             </a:r>
           </a:p>
         </p:txBody>
@@ -17201,7 +15722,7 @@
                 </a:solidFill>
                 <a:latin typeface="Calibri"/>
               </a:rPr>
-              <a:t>5 / 26</a:t>
+              <a:t>5 / 22</a:t>
             </a:r>
           </a:p>
         </p:txBody>
@@ -17464,7 +15985,7 @@
                 </a:solidFill>
                 <a:latin typeface="Calibri"/>
               </a:rPr>
-              <a:t>¿Qué significa penalizar un coeficiente?</a:t>
+              <a:t>Contraer o seleccionar</a:t>
             </a:r>
           </a:p>
         </p:txBody>
@@ -17499,11 +16020,35 @@
                 </a:solidFill>
                 <a:latin typeface="Calibri"/>
               </a:rPr>
-              <a:t>Capítulo 5.2 — jueves, bloques A1 y A2</a:t>
-            </a:r>
-          </a:p>
-        </p:txBody>
-      </p:sp>
+              <a:t>Ridge (L2), LASSO (L1) y la réplica de ESL / prostate</a:t>
+            </a:r>
+          </a:p>
+        </p:txBody>
+      </p:sp>
+      <p:pic>
+        <p:nvPicPr>
+          <p:cNvPr id="5" name="Picture 4" descr="funnel__FFFFFF.png"/>
+          <p:cNvPicPr>
+            <a:picLocks noChangeAspect="1"/>
+          </p:cNvPicPr>
+          <p:nvPr/>
+        </p:nvPicPr>
+        <p:blipFill>
+          <a:blip r:embed="rId2"/>
+          <a:stretch>
+            <a:fillRect/>
+          </a:stretch>
+        </p:blipFill>
+        <p:spPr>
+          <a:xfrm>
+            <a:off x="10195560" y="640080"/>
+            <a:ext cx="1051560" cy="1051560"/>
+          </a:xfrm>
+          <a:prstGeom prst="rect">
+            <a:avLst/>
+          </a:prstGeom>
+        </p:spPr>
+      </p:pic>
     </p:spTree>
   </p:cSld>
   <p:clrMapOvr>
@@ -17518,7 +16063,7 @@
     <p:bg>
       <p:bgPr>
         <a:solidFill>
-          <a:srgbClr val="9B1B30"/>
+          <a:srgbClr val="FFFFFF"/>
         </a:solidFill>
         <a:effectLst/>
       </p:bgPr>
@@ -17532,20 +16077,55 @@
       <p:grpSpPr/>
       <p:sp>
         <p:nvSpPr>
-          <p:cNvPr id="2" name="Oval 1"/>
+          <p:cNvPr id="2" name="TextBox 1"/>
+          <p:cNvSpPr txBox="1"/>
+          <p:nvPr/>
+        </p:nvSpPr>
+        <p:spPr>
+          <a:xfrm>
+            <a:off x="548640" y="457200"/>
+            <a:ext cx="11094720" cy="292608"/>
+          </a:xfrm>
+          <a:prstGeom prst="rect">
+            <a:avLst/>
+          </a:prstGeom>
+          <a:noFill/>
+        </p:spPr>
+        <p:txBody>
+          <a:bodyPr wrap="square" anchor="t" lIns="0" rIns="0" tIns="0" bIns="0">
+            <a:spAutoFit/>
+          </a:bodyPr>
+          <a:lstStyle/>
+          <a:p>
+            <a:pPr algn="l"/>
+            <a:r>
+              <a:rPr sz="1300" b="1">
+                <a:solidFill>
+                  <a:srgbClr val="9B1B30"/>
+                </a:solidFill>
+                <a:latin typeface="Calibri"/>
+              </a:rPr>
+              <a:t>EL NÚCLEO DE LA SESIÓN — DEFINICIONES SECCIÓN 3</a:t>
+            </a:r>
+          </a:p>
+        </p:txBody>
+      </p:sp>
+      <p:sp>
+        <p:nvSpPr>
+          <p:cNvPr id="3" name="Oval 2"/>
           <p:cNvSpPr/>
           <p:nvPr/>
         </p:nvSpPr>
         <p:spPr>
           <a:xfrm>
-            <a:off x="914400" y="2103120"/>
-            <a:ext cx="2377440" cy="2377440"/>
+            <a:off x="548640" y="1298448"/>
+            <a:ext cx="841248" cy="841248"/>
           </a:xfrm>
           <a:prstGeom prst="ellipse">
             <a:avLst/>
           </a:prstGeom>
           <a:solidFill>
-            <a:srgbClr val="FFFFFF"/>
+            <a:srgbClr val="E4002B"/>
           </a:solidFill>
           <a:ln>
             <a:noFill/>
@@ -17567,95 +16147,16 @@
           </a:fontRef>
         </p:style>
         <p:txBody>
-          <a:bodyPr rtlCol="0" anchor="ctr" lIns="0" rIns="0" tIns="0" bIns="0"/>
+          <a:bodyPr rtlCol="0" anchor="ctr"/>
           <a:lstStyle/>
           <a:p>
             <a:pPr algn="ctr"/>
-            <a:r>
-              <a:rPr sz="10000" b="1">
-                <a:solidFill>
-                  <a:srgbClr val="9B1B30"/>
-                </a:solidFill>
-                <a:latin typeface="Calibri"/>
-              </a:rPr>
-              <a:t>2</a:t>
-            </a:r>
-          </a:p>
-        </p:txBody>
-      </p:sp>
-      <p:sp>
-        <p:nvSpPr>
-          <p:cNvPr id="3" name="TextBox 2"/>
-          <p:cNvSpPr txBox="1"/>
-          <p:nvPr/>
-        </p:nvSpPr>
-        <p:spPr>
-          <a:xfrm>
-            <a:off x="3931920" y="2651760"/>
-            <a:ext cx="7589520" cy="1371600"/>
-          </a:xfrm>
-          <a:prstGeom prst="rect">
-            <a:avLst/>
-          </a:prstGeom>
-          <a:noFill/>
-        </p:spPr>
-        <p:txBody>
-          <a:bodyPr wrap="square" anchor="t" lIns="0" rIns="0" tIns="0" bIns="0">
-            <a:spAutoFit/>
-          </a:bodyPr>
-          <a:lstStyle/>
-          <a:p>
-            <a:pPr algn="l"/>
-            <a:r>
-              <a:rPr sz="4000" b="1">
-                <a:solidFill>
-                  <a:srgbClr val="FFFFFF"/>
-                </a:solidFill>
-                <a:latin typeface="Calibri"/>
-              </a:rPr>
-              <a:t>¿Qué significa penalizar un coeficiente?</a:t>
-            </a:r>
-          </a:p>
-        </p:txBody>
-      </p:sp>
-      <p:sp>
-        <p:nvSpPr>
-          <p:cNvPr id="4" name="TextBox 3"/>
-          <p:cNvSpPr txBox="1"/>
-          <p:nvPr/>
-        </p:nvSpPr>
-        <p:spPr>
-          <a:xfrm>
-            <a:off x="3931920" y="3977639"/>
-            <a:ext cx="7589520" cy="914400"/>
-          </a:xfrm>
-          <a:prstGeom prst="rect">
-            <a:avLst/>
-          </a:prstGeom>
-          <a:noFill/>
-        </p:spPr>
-        <p:txBody>
-          <a:bodyPr wrap="square" anchor="t" lIns="0" rIns="0" tIns="0" bIns="0">
-            <a:spAutoFit/>
-          </a:bodyPr>
-          <a:lstStyle/>
-          <a:p>
-            <a:pPr algn="l"/>
-            <a:r>
-              <a:rPr sz="1700" b="0">
-                <a:solidFill>
-                  <a:srgbClr val="FCEDEE"/>
-                </a:solidFill>
-                <a:latin typeface="Calibri"/>
-              </a:rPr>
-              <a:t>¿Qué significa penalizar un coeficiente?</a:t>
-            </a:r>
           </a:p>
         </p:txBody>
       </p:sp>
       <p:pic>
         <p:nvPicPr>
-          <p:cNvPr id="5" name="Picture 4" descr="funnel__FFFFFF.png"/>
+          <p:cNvPr id="4" name="Picture 3" descr="book-open__FFFFFF.png"/>
           <p:cNvPicPr>
             <a:picLocks noChangeAspect="1"/>
           </p:cNvPicPr>
@@ -17669,14 +16170,469 @@
         </p:blipFill>
         <p:spPr>
           <a:xfrm>
-            <a:off x="10195560" y="640080"/>
-            <a:ext cx="1051560" cy="1051560"/>
+            <a:off x="784189" y="1533997"/>
+            <a:ext cx="370150" cy="370150"/>
           </a:xfrm>
           <a:prstGeom prst="rect">
             <a:avLst/>
           </a:prstGeom>
         </p:spPr>
       </p:pic>
+      <p:sp>
+        <p:nvSpPr>
+          <p:cNvPr id="5" name="TextBox 4"/>
+          <p:cNvSpPr txBox="1"/>
+          <p:nvPr/>
+        </p:nvSpPr>
+        <p:spPr>
+          <a:xfrm>
+            <a:off x="1719072" y="1280160"/>
+            <a:ext cx="9924288" cy="914400"/>
+          </a:xfrm>
+          <a:prstGeom prst="rect">
+            <a:avLst/>
+          </a:prstGeom>
+          <a:noFill/>
+        </p:spPr>
+        <p:txBody>
+          <a:bodyPr wrap="square" anchor="ctr" lIns="0" rIns="0" tIns="0" bIns="0">
+            <a:spAutoFit/>
+          </a:bodyPr>
+          <a:lstStyle/>
+          <a:p>
+            <a:pPr algn="l"/>
+            <a:r>
+              <a:rPr sz="5200" b="1">
+                <a:solidFill>
+                  <a:srgbClr val="2D2D2D"/>
+                </a:solidFill>
+                <a:latin typeface="Calibri"/>
+              </a:rPr>
+              <a:t>Regularización</a:t>
+            </a:r>
+          </a:p>
+        </p:txBody>
+      </p:sp>
+      <p:sp>
+        <p:nvSpPr>
+          <p:cNvPr id="6" name="TextBox 5"/>
+          <p:cNvSpPr txBox="1"/>
+          <p:nvPr/>
+        </p:nvSpPr>
+        <p:spPr>
+          <a:xfrm>
+            <a:off x="548640" y="2542032"/>
+            <a:ext cx="11094720" cy="274320"/>
+          </a:xfrm>
+          <a:prstGeom prst="rect">
+            <a:avLst/>
+          </a:prstGeom>
+          <a:noFill/>
+        </p:spPr>
+        <p:txBody>
+          <a:bodyPr wrap="square" anchor="t" lIns="0" rIns="0" tIns="0" bIns="0">
+            <a:spAutoFit/>
+          </a:bodyPr>
+          <a:lstStyle/>
+          <a:p>
+            <a:pPr algn="l"/>
+            <a:r>
+              <a:rPr sz="1100" b="1">
+                <a:solidFill>
+                  <a:srgbClr val="9B1B30"/>
+                </a:solidFill>
+                <a:latin typeface="Calibri"/>
+              </a:rPr>
+              <a:t>DEFINICIÓN</a:t>
+            </a:r>
+          </a:p>
+        </p:txBody>
+      </p:sp>
+      <p:sp>
+        <p:nvSpPr>
+          <p:cNvPr id="7" name="TextBox 6"/>
+          <p:cNvSpPr txBox="1"/>
+          <p:nvPr/>
+        </p:nvSpPr>
+        <p:spPr>
+          <a:xfrm>
+            <a:off x="548640" y="2834640"/>
+            <a:ext cx="11094720" cy="1371600"/>
+          </a:xfrm>
+          <a:prstGeom prst="rect">
+            <a:avLst/>
+          </a:prstGeom>
+          <a:noFill/>
+        </p:spPr>
+        <p:txBody>
+          <a:bodyPr wrap="square" anchor="t" lIns="0" rIns="0" tIns="0" bIns="0">
+            <a:spAutoFit/>
+          </a:bodyPr>
+          <a:lstStyle/>
+          <a:p>
+            <a:pPr algn="l">
+              <a:lnSpc>
+                <a:spcPct val="122000"/>
+              </a:lnSpc>
+            </a:pPr>
+            <a:r>
+              <a:rPr sz="2000" b="0">
+                <a:solidFill>
+                  <a:srgbClr val="2D2D2D"/>
+                </a:solidFill>
+                <a:latin typeface="Calibri"/>
+              </a:rPr>
+              <a:t>Al ajuste (RSS) se le suma una penalización sobre el tamaño de los coeficientes: contrae β, más sesgo y menos varianza.</a:t>
+            </a:r>
+          </a:p>
+        </p:txBody>
+      </p:sp>
+      <p:sp>
+        <p:nvSpPr>
+          <p:cNvPr id="8" name="Rounded Rectangle 7"/>
+          <p:cNvSpPr/>
+          <p:nvPr/>
+        </p:nvSpPr>
+        <p:spPr>
+          <a:xfrm>
+            <a:off x="548640" y="4434840"/>
+            <a:ext cx="11094720" cy="1234440"/>
+          </a:xfrm>
+          <a:prstGeom prst="roundRect">
+            <a:avLst/>
+          </a:prstGeom>
+          <a:solidFill>
+            <a:srgbClr val="FCEDEE"/>
+          </a:solidFill>
+          <a:ln>
+            <a:noFill/>
+          </a:ln>
+          <a:effectLst/>
+        </p:spPr>
+        <p:style>
+          <a:lnRef idx="1">
+            <a:schemeClr val="accent1"/>
+          </a:lnRef>
+          <a:fillRef idx="3">
+            <a:schemeClr val="accent1"/>
+          </a:fillRef>
+          <a:effectRef idx="2">
+            <a:schemeClr val="accent1"/>
+          </a:effectRef>
+          <a:fontRef idx="minor">
+            <a:schemeClr val="lt1"/>
+          </a:fontRef>
+        </p:style>
+        <p:txBody>
+          <a:bodyPr rtlCol="0" anchor="ctr"/>
+          <a:lstStyle/>
+          <a:p>
+            <a:pPr algn="ctr"/>
+          </a:p>
+        </p:txBody>
+      </p:sp>
+      <p:pic>
+        <p:nvPicPr>
+          <p:cNvPr id="9" name="Picture 8" descr="lightbulb__E4002B.png"/>
+          <p:cNvPicPr>
+            <a:picLocks noChangeAspect="1"/>
+          </p:cNvPicPr>
+          <p:nvPr/>
+        </p:nvPicPr>
+        <p:blipFill>
+          <a:blip r:embed="rId3"/>
+          <a:stretch>
+            <a:fillRect/>
+          </a:stretch>
+        </p:blipFill>
+        <p:spPr>
+          <a:xfrm>
+            <a:off x="841248" y="4617720"/>
+            <a:ext cx="274320" cy="274320"/>
+          </a:xfrm>
+          <a:prstGeom prst="rect">
+            <a:avLst/>
+          </a:prstGeom>
+        </p:spPr>
+      </p:pic>
+      <p:sp>
+        <p:nvSpPr>
+          <p:cNvPr id="10" name="TextBox 9"/>
+          <p:cNvSpPr txBox="1"/>
+          <p:nvPr/>
+        </p:nvSpPr>
+        <p:spPr>
+          <a:xfrm>
+            <a:off x="1207008" y="4608576"/>
+            <a:ext cx="2743200" cy="274320"/>
+          </a:xfrm>
+          <a:prstGeom prst="rect">
+            <a:avLst/>
+          </a:prstGeom>
+          <a:noFill/>
+        </p:spPr>
+        <p:txBody>
+          <a:bodyPr wrap="square" anchor="t" lIns="0" rIns="0" tIns="0" bIns="0">
+            <a:spAutoFit/>
+          </a:bodyPr>
+          <a:lstStyle/>
+          <a:p>
+            <a:pPr algn="l"/>
+            <a:r>
+              <a:rPr sz="1100" b="1">
+                <a:solidFill>
+                  <a:srgbClr val="9B1B30"/>
+                </a:solidFill>
+                <a:latin typeface="Calibri"/>
+              </a:rPr>
+              <a:t>EJEMPLO</a:t>
+            </a:r>
+          </a:p>
+        </p:txBody>
+      </p:sp>
+      <p:sp>
+        <p:nvSpPr>
+          <p:cNvPr id="11" name="TextBox 10"/>
+          <p:cNvSpPr txBox="1"/>
+          <p:nvPr/>
+        </p:nvSpPr>
+        <p:spPr>
+          <a:xfrm>
+            <a:off x="859536" y="4956048"/>
+            <a:ext cx="10472928" cy="640080"/>
+          </a:xfrm>
+          <a:prstGeom prst="rect">
+            <a:avLst/>
+          </a:prstGeom>
+          <a:noFill/>
+        </p:spPr>
+        <p:txBody>
+          <a:bodyPr wrap="square" anchor="t" lIns="0" rIns="0" tIns="0" bIns="0">
+            <a:spAutoFit/>
+          </a:bodyPr>
+          <a:lstStyle/>
+          <a:p>
+            <a:pPr algn="l">
+              <a:lnSpc>
+                <a:spcPct val="115000"/>
+              </a:lnSpc>
+            </a:pPr>
+            <a:r>
+              <a:rPr sz="1500" b="0">
+                <a:solidFill>
+                  <a:srgbClr val="2D2D2D"/>
+                </a:solidFill>
+                <a:latin typeface="Calibri"/>
+              </a:rPr>
+              <a:t>min RSS + λ·P(β): la forma de P(β) define Ridge (L2), LASSO (L1) o Elastic Net (L1+L2).</a:t>
+            </a:r>
+          </a:p>
+        </p:txBody>
+      </p:sp>
+      <p:sp>
+        <p:nvSpPr>
+          <p:cNvPr id="12" name="TextBox 11"/>
+          <p:cNvSpPr txBox="1"/>
+          <p:nvPr/>
+        </p:nvSpPr>
+        <p:spPr>
+          <a:xfrm>
+            <a:off x="548640" y="5961888"/>
+            <a:ext cx="11094720" cy="292608"/>
+          </a:xfrm>
+          <a:prstGeom prst="rect">
+            <a:avLst/>
+          </a:prstGeom>
+          <a:noFill/>
+        </p:spPr>
+        <p:txBody>
+          <a:bodyPr wrap="square" anchor="t" lIns="0" rIns="0" tIns="0" bIns="0">
+            <a:spAutoFit/>
+          </a:bodyPr>
+          <a:lstStyle/>
+          <a:p>
+            <a:pPr algn="l"/>
+            <a:r>
+              <a:rPr sz="1000" b="0">
+                <a:solidFill>
+                  <a:srgbClr val="6E6E6E"/>
+                </a:solidFill>
+                <a:latin typeface="Calibri"/>
+              </a:rPr>
+              <a:t>el glosario de la sesión; ISLR Sección 6.2 (shrinkage methods).</a:t>
+            </a:r>
+          </a:p>
+        </p:txBody>
+      </p:sp>
+      <p:sp>
+        <p:nvSpPr>
+          <p:cNvPr id="13" name="Rounded Rectangle 12"/>
+          <p:cNvSpPr/>
+          <p:nvPr/>
+        </p:nvSpPr>
+        <p:spPr>
+          <a:xfrm>
+            <a:off x="8458200" y="301752"/>
+            <a:ext cx="3200400" cy="402336"/>
+          </a:xfrm>
+          <a:prstGeom prst="roundRect">
+            <a:avLst/>
+          </a:prstGeom>
+          <a:solidFill>
+            <a:srgbClr val="FCEDEE"/>
+          </a:solidFill>
+          <a:ln w="15875">
+            <a:solidFill>
+              <a:srgbClr val="E4002B"/>
+            </a:solidFill>
+          </a:ln>
+          <a:effectLst/>
+        </p:spPr>
+        <p:style>
+          <a:lnRef idx="1">
+            <a:schemeClr val="accent1"/>
+          </a:lnRef>
+          <a:fillRef idx="3">
+            <a:schemeClr val="accent1"/>
+          </a:fillRef>
+          <a:effectRef idx="2">
+            <a:schemeClr val="accent1"/>
+          </a:effectRef>
+          <a:fontRef idx="minor">
+            <a:schemeClr val="lt1"/>
+          </a:fontRef>
+        </p:style>
+        <p:txBody>
+          <a:bodyPr rtlCol="0" anchor="ctr" lIns="54864" rIns="54864" tIns="0" bIns="0"/>
+          <a:lstStyle/>
+          <a:p>
+            <a:pPr algn="ctr"/>
+            <a:r>
+              <a:rPr sz="1300" b="1">
+                <a:solidFill>
+                  <a:srgbClr val="9B1B30"/>
+                </a:solidFill>
+                <a:latin typeface="Calibri"/>
+              </a:rPr>
+              <a:t>▶  Notebook, Sección 3, teoría guiada, celda 9</a:t>
+            </a:r>
+          </a:p>
+        </p:txBody>
+      </p:sp>
+      <p:sp>
+        <p:nvSpPr>
+          <p:cNvPr id="14" name="Oval 13"/>
+          <p:cNvSpPr/>
+          <p:nvPr/>
+        </p:nvSpPr>
+        <p:spPr>
+          <a:xfrm>
+            <a:off x="548640" y="6473952"/>
+            <a:ext cx="100584" cy="100584"/>
+          </a:xfrm>
+          <a:prstGeom prst="ellipse">
+            <a:avLst/>
+          </a:prstGeom>
+          <a:solidFill>
+            <a:srgbClr val="E4002B"/>
+          </a:solidFill>
+          <a:ln>
+            <a:noFill/>
+          </a:ln>
+          <a:effectLst/>
+        </p:spPr>
+        <p:style>
+          <a:lnRef idx="1">
+            <a:schemeClr val="accent1"/>
+          </a:lnRef>
+          <a:fillRef idx="3">
+            <a:schemeClr val="accent1"/>
+          </a:fillRef>
+          <a:effectRef idx="2">
+            <a:schemeClr val="accent1"/>
+          </a:effectRef>
+          <a:fontRef idx="minor">
+            <a:schemeClr val="lt1"/>
+          </a:fontRef>
+        </p:style>
+        <p:txBody>
+          <a:bodyPr rtlCol="0" anchor="ctr"/>
+          <a:lstStyle/>
+          <a:p>
+            <a:pPr algn="ctr"/>
+          </a:p>
+        </p:txBody>
+      </p:sp>
+      <p:sp>
+        <p:nvSpPr>
+          <p:cNvPr id="15" name="TextBox 14"/>
+          <p:cNvSpPr txBox="1"/>
+          <p:nvPr/>
+        </p:nvSpPr>
+        <p:spPr>
+          <a:xfrm>
+            <a:off x="749808" y="6437376"/>
+            <a:ext cx="7772400" cy="274320"/>
+          </a:xfrm>
+          <a:prstGeom prst="rect">
+            <a:avLst/>
+          </a:prstGeom>
+          <a:noFill/>
+        </p:spPr>
+        <p:txBody>
+          <a:bodyPr wrap="square" anchor="t" lIns="0" rIns="0" tIns="0" bIns="0">
+            <a:spAutoFit/>
+          </a:bodyPr>
+          <a:lstStyle/>
+          <a:p>
+            <a:pPr algn="l"/>
+            <a:r>
+              <a:rPr sz="900" b="0">
+                <a:solidFill>
+                  <a:srgbClr val="6E6E6E"/>
+                </a:solidFill>
+                <a:latin typeface="Calibri"/>
+              </a:rPr>
+              <a:t>S05 — Herramientas para la Ciencia de Datos, UPC</a:t>
+            </a:r>
+          </a:p>
+        </p:txBody>
+      </p:sp>
+      <p:sp>
+        <p:nvSpPr>
+          <p:cNvPr id="16" name="TextBox 15"/>
+          <p:cNvSpPr txBox="1"/>
+          <p:nvPr/>
+        </p:nvSpPr>
+        <p:spPr>
+          <a:xfrm>
+            <a:off x="10180320" y="6437376"/>
+            <a:ext cx="1463040" cy="274320"/>
+          </a:xfrm>
+          <a:prstGeom prst="rect">
+            <a:avLst/>
+          </a:prstGeom>
+          <a:noFill/>
+        </p:spPr>
+        <p:txBody>
+          <a:bodyPr wrap="square" anchor="t" lIns="0" rIns="0" tIns="0" bIns="0">
+            <a:spAutoFit/>
+          </a:bodyPr>
+          <a:lstStyle/>
+          <a:p>
+            <a:pPr algn="r"/>
+            <a:r>
+              <a:rPr sz="900" b="0">
+                <a:solidFill>
+                  <a:srgbClr val="6E6E6E"/>
+                </a:solidFill>
+                <a:latin typeface="Calibri"/>
+              </a:rPr>
+              <a:t>8 / 22</a:t>
+            </a:r>
+          </a:p>
+        </p:txBody>
+      </p:sp>
     </p:spTree>
   </p:cSld>
   <p:clrMapOvr>
@@ -17711,7 +16667,7 @@
         </p:nvSpPr>
         <p:spPr>
           <a:xfrm>
-            <a:off x="548640" y="457200"/>
+            <a:off x="548640" y="411480"/>
             <a:ext cx="11094720" cy="292608"/>
           </a:xfrm>
           <a:prstGeom prst="rect">
@@ -17733,21 +16689,460 @@
                 </a:solidFill>
                 <a:latin typeface="Calibri"/>
               </a:rPr>
-              <a:t>EL NÚCLEO DE LA SESIÓN — DEFINICIONES SECCIÓN 3</a:t>
-            </a:r>
-          </a:p>
-        </p:txBody>
-      </p:sp>
-      <p:sp>
-        <p:nvSpPr>
-          <p:cNvPr id="3" name="Oval 2"/>
+              <a:t>DOS PENALIZACIONES, DOS COMPORTAMIENTOS — ISLR SECCIÓN 6.2</a:t>
+            </a:r>
+          </a:p>
+        </p:txBody>
+      </p:sp>
+      <p:sp>
+        <p:nvSpPr>
+          <p:cNvPr id="3" name="TextBox 2"/>
+          <p:cNvSpPr txBox="1"/>
+          <p:nvPr/>
+        </p:nvSpPr>
+        <p:spPr>
+          <a:xfrm>
+            <a:off x="548640" y="731520"/>
+            <a:ext cx="11094720" cy="777240"/>
+          </a:xfrm>
+          <a:prstGeom prst="rect">
+            <a:avLst/>
+          </a:prstGeom>
+          <a:noFill/>
+        </p:spPr>
+        <p:txBody>
+          <a:bodyPr wrap="square" anchor="t" lIns="0" rIns="0" tIns="0" bIns="0">
+            <a:spAutoFit/>
+          </a:bodyPr>
+          <a:lstStyle/>
+          <a:p>
+            <a:pPr algn="l"/>
+            <a:r>
+              <a:rPr sz="4000" b="1">
+                <a:solidFill>
+                  <a:srgbClr val="2D2D2D"/>
+                </a:solidFill>
+                <a:latin typeface="Calibri"/>
+              </a:rPr>
+              <a:t>Ridge contrae todo; el LASSO además selecciona</a:t>
+            </a:r>
+          </a:p>
+        </p:txBody>
+      </p:sp>
+      <p:sp>
+        <p:nvSpPr>
+          <p:cNvPr id="4" name="Rounded Rectangle 3"/>
           <p:cNvSpPr/>
           <p:nvPr/>
         </p:nvSpPr>
         <p:spPr>
           <a:xfrm>
-            <a:off x="548640" y="1298448"/>
-            <a:ext cx="841248" cy="841248"/>
+            <a:off x="548640" y="1828800"/>
+            <a:ext cx="5285232" cy="3611880"/>
+          </a:xfrm>
+          <a:prstGeom prst="roundRect">
+            <a:avLst/>
+          </a:prstGeom>
+          <a:solidFill>
+            <a:srgbClr val="FCEDEE"/>
+          </a:solidFill>
+          <a:ln>
+            <a:noFill/>
+          </a:ln>
+          <a:effectLst/>
+        </p:spPr>
+        <p:style>
+          <a:lnRef idx="1">
+            <a:schemeClr val="accent1"/>
+          </a:lnRef>
+          <a:fillRef idx="3">
+            <a:schemeClr val="accent1"/>
+          </a:fillRef>
+          <a:effectRef idx="2">
+            <a:schemeClr val="accent1"/>
+          </a:effectRef>
+          <a:fontRef idx="minor">
+            <a:schemeClr val="lt1"/>
+          </a:fontRef>
+        </p:style>
+        <p:txBody>
+          <a:bodyPr rtlCol="0" anchor="ctr"/>
+          <a:lstStyle/>
+          <a:p>
+            <a:pPr algn="ctr"/>
+          </a:p>
+        </p:txBody>
+      </p:sp>
+      <p:sp>
+        <p:nvSpPr>
+          <p:cNvPr id="5" name="TextBox 4"/>
+          <p:cNvSpPr txBox="1"/>
+          <p:nvPr/>
+        </p:nvSpPr>
+        <p:spPr>
+          <a:xfrm>
+            <a:off x="841248" y="2048256"/>
+            <a:ext cx="4700016" cy="548640"/>
+          </a:xfrm>
+          <a:prstGeom prst="rect">
+            <a:avLst/>
+          </a:prstGeom>
+          <a:noFill/>
+        </p:spPr>
+        <p:txBody>
+          <a:bodyPr wrap="square" anchor="t" lIns="0" rIns="0" tIns="0" bIns="0">
+            <a:spAutoFit/>
+          </a:bodyPr>
+          <a:lstStyle/>
+          <a:p>
+            <a:pPr algn="l">
+              <a:lnSpc>
+                <a:spcPct val="105000"/>
+              </a:lnSpc>
+            </a:pPr>
+            <a:r>
+              <a:rPr sz="1600" b="1">
+                <a:solidFill>
+                  <a:srgbClr val="9B1B30"/>
+                </a:solidFill>
+                <a:latin typeface="Calibri"/>
+              </a:rPr>
+              <a:t>Ridge (L2)</a:t>
+            </a:r>
+          </a:p>
+        </p:txBody>
+      </p:sp>
+      <p:pic>
+        <p:nvPicPr>
+          <p:cNvPr id="6" name="Picture 5" descr="deck_ridge_encogimiento.png"/>
+          <p:cNvPicPr>
+            <a:picLocks noChangeAspect="1"/>
+          </p:cNvPicPr>
+          <p:nvPr/>
+        </p:nvPicPr>
+        <p:blipFill>
+          <a:blip r:embed="rId2"/>
+          <a:stretch>
+            <a:fillRect/>
+          </a:stretch>
+        </p:blipFill>
+        <p:spPr>
+          <a:xfrm>
+            <a:off x="1621063" y="2724912"/>
+            <a:ext cx="3140386" cy="1874519"/>
+          </a:xfrm>
+          <a:prstGeom prst="rect">
+            <a:avLst/>
+          </a:prstGeom>
+        </p:spPr>
+      </p:pic>
+      <p:sp>
+        <p:nvSpPr>
+          <p:cNvPr id="7" name="TextBox 6"/>
+          <p:cNvSpPr txBox="1"/>
+          <p:nvPr/>
+        </p:nvSpPr>
+        <p:spPr>
+          <a:xfrm>
+            <a:off x="877824" y="4745735"/>
+            <a:ext cx="4626864" cy="512065"/>
+          </a:xfrm>
+          <a:prstGeom prst="rect">
+            <a:avLst/>
+          </a:prstGeom>
+          <a:noFill/>
+        </p:spPr>
+        <p:txBody>
+          <a:bodyPr wrap="square" lIns="0" tIns="0" bIns="0">
+            <a:spAutoFit/>
+          </a:bodyPr>
+          <a:lstStyle/>
+          <a:p>
+            <a:pPr>
+              <a:lnSpc>
+                <a:spcPct val="105000"/>
+              </a:lnSpc>
+              <a:spcAft>
+                <a:spcPts val="700"/>
+              </a:spcAft>
+            </a:pPr>
+            <a:r>
+              <a:rPr sz="1300">
+                <a:solidFill>
+                  <a:srgbClr val="E4002B"/>
+                </a:solidFill>
+                <a:latin typeface="Calibri"/>
+              </a:rPr>
+              <a:t>▪  </a:t>
+            </a:r>
+            <a:r>
+              <a:rPr sz="1300">
+                <a:solidFill>
+                  <a:srgbClr val="2D2D2D"/>
+                </a:solidFill>
+                <a:latin typeface="Calibri"/>
+              </a:rPr>
+              <a:t>Penaliza Σβ²</a:t>
+            </a:r>
+          </a:p>
+          <a:p>
+            <a:pPr>
+              <a:lnSpc>
+                <a:spcPct val="105000"/>
+              </a:lnSpc>
+              <a:spcAft>
+                <a:spcPts val="700"/>
+              </a:spcAft>
+            </a:pPr>
+            <a:r>
+              <a:rPr sz="1300">
+                <a:solidFill>
+                  <a:srgbClr val="E4002B"/>
+                </a:solidFill>
+                <a:latin typeface="Calibri"/>
+              </a:rPr>
+              <a:t>▪  </a:t>
+            </a:r>
+            <a:r>
+              <a:rPr sz="1300">
+                <a:solidFill>
+                  <a:srgbClr val="2D2D2D"/>
+                </a:solidFill>
+                <a:latin typeface="Calibri"/>
+              </a:rPr>
+              <a:t>Contrae, nunca anula</a:t>
+            </a:r>
+          </a:p>
+          <a:p>
+            <a:pPr>
+              <a:lnSpc>
+                <a:spcPct val="105000"/>
+              </a:lnSpc>
+              <a:spcAft>
+                <a:spcPts val="700"/>
+              </a:spcAft>
+            </a:pPr>
+            <a:r>
+              <a:rPr sz="1300">
+                <a:solidFill>
+                  <a:srgbClr val="E4002B"/>
+                </a:solidFill>
+                <a:latin typeface="Calibri"/>
+              </a:rPr>
+              <a:t>▪  </a:t>
+            </a:r>
+            <a:r>
+              <a:rPr sz="1300">
+                <a:solidFill>
+                  <a:srgbClr val="2D2D2D"/>
+                </a:solidFill>
+                <a:latin typeface="Calibri"/>
+              </a:rPr>
+              <a:t>Cura la colinealidad</a:t>
+            </a:r>
+          </a:p>
+        </p:txBody>
+      </p:sp>
+      <p:sp>
+        <p:nvSpPr>
+          <p:cNvPr id="8" name="Rounded Rectangle 7"/>
+          <p:cNvSpPr/>
+          <p:nvPr/>
+        </p:nvSpPr>
+        <p:spPr>
+          <a:xfrm>
+            <a:off x="6355080" y="1828800"/>
+            <a:ext cx="5285232" cy="3611880"/>
+          </a:xfrm>
+          <a:prstGeom prst="roundRect">
+            <a:avLst/>
+          </a:prstGeom>
+          <a:solidFill>
+            <a:srgbClr val="FCEDEE"/>
+          </a:solidFill>
+          <a:ln>
+            <a:noFill/>
+          </a:ln>
+          <a:effectLst/>
+        </p:spPr>
+        <p:style>
+          <a:lnRef idx="1">
+            <a:schemeClr val="accent1"/>
+          </a:lnRef>
+          <a:fillRef idx="3">
+            <a:schemeClr val="accent1"/>
+          </a:fillRef>
+          <a:effectRef idx="2">
+            <a:schemeClr val="accent1"/>
+          </a:effectRef>
+          <a:fontRef idx="minor">
+            <a:schemeClr val="lt1"/>
+          </a:fontRef>
+        </p:style>
+        <p:txBody>
+          <a:bodyPr rtlCol="0" anchor="ctr"/>
+          <a:lstStyle/>
+          <a:p>
+            <a:pPr algn="ctr"/>
+          </a:p>
+        </p:txBody>
+      </p:sp>
+      <p:sp>
+        <p:nvSpPr>
+          <p:cNvPr id="9" name="TextBox 8"/>
+          <p:cNvSpPr txBox="1"/>
+          <p:nvPr/>
+        </p:nvSpPr>
+        <p:spPr>
+          <a:xfrm>
+            <a:off x="6647688" y="2048256"/>
+            <a:ext cx="4700016" cy="548640"/>
+          </a:xfrm>
+          <a:prstGeom prst="rect">
+            <a:avLst/>
+          </a:prstGeom>
+          <a:noFill/>
+        </p:spPr>
+        <p:txBody>
+          <a:bodyPr wrap="square" anchor="t" lIns="0" rIns="0" tIns="0" bIns="0">
+            <a:spAutoFit/>
+          </a:bodyPr>
+          <a:lstStyle/>
+          <a:p>
+            <a:pPr algn="l">
+              <a:lnSpc>
+                <a:spcPct val="105000"/>
+              </a:lnSpc>
+            </a:pPr>
+            <a:r>
+              <a:rPr sz="1600" b="1">
+                <a:solidFill>
+                  <a:srgbClr val="9B1B30"/>
+                </a:solidFill>
+                <a:latin typeface="Calibri"/>
+              </a:rPr>
+              <a:t>LASSO (L1)</a:t>
+            </a:r>
+          </a:p>
+        </p:txBody>
+      </p:sp>
+      <p:sp>
+        <p:nvSpPr>
+          <p:cNvPr id="10" name="TextBox 9"/>
+          <p:cNvSpPr txBox="1"/>
+          <p:nvPr/>
+        </p:nvSpPr>
+        <p:spPr>
+          <a:xfrm>
+            <a:off x="6684264" y="2724912"/>
+            <a:ext cx="4626864" cy="2532888"/>
+          </a:xfrm>
+          <a:prstGeom prst="rect">
+            <a:avLst/>
+          </a:prstGeom>
+          <a:noFill/>
+        </p:spPr>
+        <p:txBody>
+          <a:bodyPr wrap="square" lIns="0" tIns="0" bIns="0">
+            <a:spAutoFit/>
+          </a:bodyPr>
+          <a:lstStyle/>
+          <a:p>
+            <a:pPr>
+              <a:lnSpc>
+                <a:spcPct val="105000"/>
+              </a:lnSpc>
+              <a:spcAft>
+                <a:spcPts val="700"/>
+              </a:spcAft>
+            </a:pPr>
+            <a:r>
+              <a:rPr sz="1300">
+                <a:solidFill>
+                  <a:srgbClr val="E4002B"/>
+                </a:solidFill>
+                <a:latin typeface="Calibri"/>
+              </a:rPr>
+              <a:t>▪  </a:t>
+            </a:r>
+            <a:r>
+              <a:rPr sz="1300">
+                <a:solidFill>
+                  <a:srgbClr val="2D2D2D"/>
+                </a:solidFill>
+                <a:latin typeface="Calibri"/>
+              </a:rPr>
+              <a:t>Penaliza Σ|β|</a:t>
+            </a:r>
+          </a:p>
+          <a:p>
+            <a:pPr>
+              <a:lnSpc>
+                <a:spcPct val="105000"/>
+              </a:lnSpc>
+              <a:spcAft>
+                <a:spcPts val="700"/>
+              </a:spcAft>
+            </a:pPr>
+            <a:r>
+              <a:rPr sz="1300">
+                <a:solidFill>
+                  <a:srgbClr val="E4002B"/>
+                </a:solidFill>
+                <a:latin typeface="Calibri"/>
+              </a:rPr>
+              <a:t>▪  </a:t>
+            </a:r>
+            <a:r>
+              <a:rPr sz="1300">
+                <a:solidFill>
+                  <a:srgbClr val="2D2D2D"/>
+                </a:solidFill>
+                <a:latin typeface="Calibri"/>
+              </a:rPr>
+              <a:t>Anula: modelo ralo</a:t>
+            </a:r>
+          </a:p>
+          <a:p>
+            <a:pPr>
+              <a:lnSpc>
+                <a:spcPct val="105000"/>
+              </a:lnSpc>
+              <a:spcAft>
+                <a:spcPts val="700"/>
+              </a:spcAft>
+            </a:pPr>
+            <a:r>
+              <a:rPr sz="1300">
+                <a:solidFill>
+                  <a:srgbClr val="E4002B"/>
+                </a:solidFill>
+                <a:latin typeface="Calibri"/>
+              </a:rPr>
+              <a:t>▪  </a:t>
+            </a:r>
+            <a:r>
+              <a:rPr sz="1300">
+                <a:solidFill>
+                  <a:srgbClr val="2D2D2D"/>
+                </a:solidFill>
+                <a:latin typeface="Calibri"/>
+              </a:rPr>
+              <a:t>Selecciona solo</a:t>
+            </a:r>
+          </a:p>
+        </p:txBody>
+      </p:sp>
+      <p:sp>
+        <p:nvSpPr>
+          <p:cNvPr id="11" name="Oval 10"/>
+          <p:cNvSpPr/>
+          <p:nvPr/>
+        </p:nvSpPr>
+        <p:spPr>
+          <a:xfrm>
+            <a:off x="5897880" y="3406140"/>
+            <a:ext cx="457200" cy="457200"/>
           </a:xfrm>
           <a:prstGeom prst="ellipse">
             <a:avLst/>
@@ -17775,82 +17170,32 @@
           </a:fontRef>
         </p:style>
         <p:txBody>
-          <a:bodyPr rtlCol="0" anchor="ctr"/>
+          <a:bodyPr rtlCol="0" anchor="ctr" lIns="0" rIns="0" tIns="0" bIns="0"/>
           <a:lstStyle/>
           <a:p>
             <a:pPr algn="ctr"/>
-          </a:p>
-        </p:txBody>
-      </p:sp>
-      <p:pic>
-        <p:nvPicPr>
-          <p:cNvPr id="4" name="Picture 3" descr="book-open__FFFFFF.png"/>
-          <p:cNvPicPr>
-            <a:picLocks noChangeAspect="1"/>
-          </p:cNvPicPr>
-          <p:nvPr/>
-        </p:nvPicPr>
-        <p:blipFill>
-          <a:blip r:embed="rId2"/>
-          <a:stretch>
-            <a:fillRect/>
-          </a:stretch>
-        </p:blipFill>
-        <p:spPr>
-          <a:xfrm>
-            <a:off x="784189" y="1533997"/>
-            <a:ext cx="370150" cy="370150"/>
-          </a:xfrm>
-          <a:prstGeom prst="rect">
-            <a:avLst/>
-          </a:prstGeom>
-        </p:spPr>
-      </p:pic>
-      <p:sp>
-        <p:nvSpPr>
-          <p:cNvPr id="5" name="TextBox 4"/>
+            <a:r>
+              <a:rPr sz="1500" b="1">
+                <a:solidFill>
+                  <a:srgbClr val="FFFFFF"/>
+                </a:solidFill>
+                <a:latin typeface="Calibri"/>
+              </a:rPr>
+              <a:t>vs</a:t>
+            </a:r>
+          </a:p>
+        </p:txBody>
+      </p:sp>
+      <p:sp>
+        <p:nvSpPr>
+          <p:cNvPr id="12" name="TextBox 11"/>
           <p:cNvSpPr txBox="1"/>
           <p:nvPr/>
         </p:nvSpPr>
         <p:spPr>
           <a:xfrm>
-            <a:off x="1719072" y="1280160"/>
-            <a:ext cx="9924288" cy="914400"/>
-          </a:xfrm>
-          <a:prstGeom prst="rect">
-            <a:avLst/>
-          </a:prstGeom>
-          <a:noFill/>
-        </p:spPr>
-        <p:txBody>
-          <a:bodyPr wrap="square" anchor="ctr" lIns="0" rIns="0" tIns="0" bIns="0">
-            <a:spAutoFit/>
-          </a:bodyPr>
-          <a:lstStyle/>
-          <a:p>
-            <a:pPr algn="l"/>
-            <a:r>
-              <a:rPr sz="5200" b="1">
-                <a:solidFill>
-                  <a:srgbClr val="2D2D2D"/>
-                </a:solidFill>
-                <a:latin typeface="Calibri"/>
-              </a:rPr>
-              <a:t>Regularización</a:t>
-            </a:r>
-          </a:p>
-        </p:txBody>
-      </p:sp>
-      <p:sp>
-        <p:nvSpPr>
-          <p:cNvPr id="6" name="TextBox 5"/>
-          <p:cNvSpPr txBox="1"/>
-          <p:nvPr/>
-        </p:nvSpPr>
-        <p:spPr>
-          <a:xfrm>
-            <a:off x="548640" y="2542032"/>
-            <a:ext cx="11094720" cy="274320"/>
+            <a:off x="548640" y="5961888"/>
+            <a:ext cx="11094720" cy="292608"/>
           </a:xfrm>
           <a:prstGeom prst="rect">
             <a:avLst/>
@@ -17865,229 +17210,13 @@
           <a:p>
             <a:pPr algn="l"/>
             <a:r>
-              <a:rPr sz="1100" b="1">
-                <a:solidFill>
-                  <a:srgbClr val="9B1B30"/>
-                </a:solidFill>
-                <a:latin typeface="Calibri"/>
-              </a:rPr>
-              <a:t>DEFINICIÓN</a:t>
-            </a:r>
-          </a:p>
-        </p:txBody>
-      </p:sp>
-      <p:sp>
-        <p:nvSpPr>
-          <p:cNvPr id="7" name="TextBox 6"/>
-          <p:cNvSpPr txBox="1"/>
-          <p:nvPr/>
-        </p:nvSpPr>
-        <p:spPr>
-          <a:xfrm>
-            <a:off x="548640" y="2834640"/>
-            <a:ext cx="11094720" cy="1371600"/>
-          </a:xfrm>
-          <a:prstGeom prst="rect">
-            <a:avLst/>
-          </a:prstGeom>
-          <a:noFill/>
-        </p:spPr>
-        <p:txBody>
-          <a:bodyPr wrap="square" anchor="t" lIns="0" rIns="0" tIns="0" bIns="0">
-            <a:spAutoFit/>
-          </a:bodyPr>
-          <a:lstStyle/>
-          <a:p>
-            <a:pPr algn="l">
-              <a:lnSpc>
-                <a:spcPct val="122000"/>
-              </a:lnSpc>
-            </a:pPr>
-            <a:r>
-              <a:rPr sz="2000" b="0">
-                <a:solidFill>
-                  <a:srgbClr val="2D2D2D"/>
-                </a:solidFill>
-                <a:latin typeface="Calibri"/>
-              </a:rPr>
-              <a:t>Al ajuste (RSS) se le suma una penalización sobre el tamaño de los coeficientes: contrae β, más sesgo y menos varianza.</a:t>
-            </a:r>
-          </a:p>
-        </p:txBody>
-      </p:sp>
-      <p:sp>
-        <p:nvSpPr>
-          <p:cNvPr id="8" name="Rounded Rectangle 7"/>
-          <p:cNvSpPr/>
-          <p:nvPr/>
-        </p:nvSpPr>
-        <p:spPr>
-          <a:xfrm>
-            <a:off x="548640" y="4434840"/>
-            <a:ext cx="11094720" cy="1234440"/>
-          </a:xfrm>
-          <a:prstGeom prst="roundRect">
-            <a:avLst/>
-          </a:prstGeom>
-          <a:solidFill>
-            <a:srgbClr val="FCEDEE"/>
-          </a:solidFill>
-          <a:ln>
-            <a:noFill/>
-          </a:ln>
-          <a:effectLst/>
-        </p:spPr>
-        <p:style>
-          <a:lnRef idx="1">
-            <a:schemeClr val="accent1"/>
-          </a:lnRef>
-          <a:fillRef idx="3">
-            <a:schemeClr val="accent1"/>
-          </a:fillRef>
-          <a:effectRef idx="2">
-            <a:schemeClr val="accent1"/>
-          </a:effectRef>
-          <a:fontRef idx="minor">
-            <a:schemeClr val="lt1"/>
-          </a:fontRef>
-        </p:style>
-        <p:txBody>
-          <a:bodyPr rtlCol="0" anchor="ctr"/>
-          <a:lstStyle/>
-          <a:p>
-            <a:pPr algn="ctr"/>
-          </a:p>
-        </p:txBody>
-      </p:sp>
-      <p:pic>
-        <p:nvPicPr>
-          <p:cNvPr id="9" name="Picture 8" descr="lightbulb__E4002B.png"/>
-          <p:cNvPicPr>
-            <a:picLocks noChangeAspect="1"/>
-          </p:cNvPicPr>
-          <p:nvPr/>
-        </p:nvPicPr>
-        <p:blipFill>
-          <a:blip r:embed="rId3"/>
-          <a:stretch>
-            <a:fillRect/>
-          </a:stretch>
-        </p:blipFill>
-        <p:spPr>
-          <a:xfrm>
-            <a:off x="841248" y="4617720"/>
-            <a:ext cx="274320" cy="274320"/>
-          </a:xfrm>
-          <a:prstGeom prst="rect">
-            <a:avLst/>
-          </a:prstGeom>
-        </p:spPr>
-      </p:pic>
-      <p:sp>
-        <p:nvSpPr>
-          <p:cNvPr id="10" name="TextBox 9"/>
-          <p:cNvSpPr txBox="1"/>
-          <p:nvPr/>
-        </p:nvSpPr>
-        <p:spPr>
-          <a:xfrm>
-            <a:off x="1207008" y="4608576"/>
-            <a:ext cx="2743200" cy="274320"/>
-          </a:xfrm>
-          <a:prstGeom prst="rect">
-            <a:avLst/>
-          </a:prstGeom>
-          <a:noFill/>
-        </p:spPr>
-        <p:txBody>
-          <a:bodyPr wrap="square" anchor="t" lIns="0" rIns="0" tIns="0" bIns="0">
-            <a:spAutoFit/>
-          </a:bodyPr>
-          <a:lstStyle/>
-          <a:p>
-            <a:pPr algn="l"/>
-            <a:r>
-              <a:rPr sz="1100" b="1">
-                <a:solidFill>
-                  <a:srgbClr val="9B1B30"/>
-                </a:solidFill>
-                <a:latin typeface="Calibri"/>
-              </a:rPr>
-              <a:t>EJEMPLO</a:t>
-            </a:r>
-          </a:p>
-        </p:txBody>
-      </p:sp>
-      <p:sp>
-        <p:nvSpPr>
-          <p:cNvPr id="11" name="TextBox 10"/>
-          <p:cNvSpPr txBox="1"/>
-          <p:nvPr/>
-        </p:nvSpPr>
-        <p:spPr>
-          <a:xfrm>
-            <a:off x="859536" y="4956048"/>
-            <a:ext cx="10472928" cy="640080"/>
-          </a:xfrm>
-          <a:prstGeom prst="rect">
-            <a:avLst/>
-          </a:prstGeom>
-          <a:noFill/>
-        </p:spPr>
-        <p:txBody>
-          <a:bodyPr wrap="square" anchor="t" lIns="0" rIns="0" tIns="0" bIns="0">
-            <a:spAutoFit/>
-          </a:bodyPr>
-          <a:lstStyle/>
-          <a:p>
-            <a:pPr algn="l">
-              <a:lnSpc>
-                <a:spcPct val="115000"/>
-              </a:lnSpc>
-            </a:pPr>
-            <a:r>
-              <a:rPr sz="1500" b="0">
-                <a:solidFill>
-                  <a:srgbClr val="2D2D2D"/>
-                </a:solidFill>
-                <a:latin typeface="Calibri"/>
-              </a:rPr>
-              <a:t>min RSS + λ·P(β): la forma de P(β) define Ridge (L2), LASSO (L1) o Elastic Net (L1+L2).</a:t>
-            </a:r>
-          </a:p>
-        </p:txBody>
-      </p:sp>
-      <p:sp>
-        <p:nvSpPr>
-          <p:cNvPr id="12" name="TextBox 11"/>
-          <p:cNvSpPr txBox="1"/>
-          <p:nvPr/>
-        </p:nvSpPr>
-        <p:spPr>
-          <a:xfrm>
-            <a:off x="548640" y="5961888"/>
-            <a:ext cx="11094720" cy="292608"/>
-          </a:xfrm>
-          <a:prstGeom prst="rect">
-            <a:avLst/>
-          </a:prstGeom>
-          <a:noFill/>
-        </p:spPr>
-        <p:txBody>
-          <a:bodyPr wrap="square" anchor="t" lIns="0" rIns="0" tIns="0" bIns="0">
-            <a:spAutoFit/>
-          </a:bodyPr>
-          <a:lstStyle/>
-          <a:p>
-            <a:pPr algn="l"/>
-            <a:r>
               <a:rPr sz="1000" b="0">
                 <a:solidFill>
                   <a:srgbClr val="6E6E6E"/>
                 </a:solidFill>
                 <a:latin typeface="Calibri"/>
               </a:rPr>
-              <a:t>el glosario de la sesión; ISLR Sección 6.2 (shrinkage methods).</a:t>
+              <a:t>figuras/S05_fig_ridge_encogimiento.png (venv). Hoerl &amp; Kennard (1970); Tibshirani (1996).</a:t>
             </a:r>
           </a:p>
         </p:txBody>
@@ -18142,7 +17271,7 @@
                 </a:solidFill>
                 <a:latin typeface="Calibri"/>
               </a:rPr>
-              <a:t>▶  Notebook, Sección 3, teoría guiada, celda 9</a:t>
+              <a:t>▶  Notebook, Sección 3, demo RIDGE, celda 16</a:t>
             </a:r>
           </a:p>
         </p:txBody>
@@ -18256,7 +17385,7 @@
                 </a:solidFill>
                 <a:latin typeface="Calibri"/>
               </a:rPr>
-              <a:t>9 / 26</a:t>
+              <a:t>9 / 22</a:t>
             </a:r>
           </a:p>
         </p:txBody>
